--- a/clase6/teorica_6.pptx
+++ b/clase6/teorica_6.pptx
@@ -10,7 +10,7 @@
   <p:sldIdLst>
     <p:sldId id="256" r:id="rId2"/>
     <p:sldId id="264" r:id="rId3"/>
-    <p:sldId id="351" r:id="rId4"/>
+    <p:sldId id="345" r:id="rId4"/>
     <p:sldId id="265" r:id="rId5"/>
     <p:sldId id="267" r:id="rId6"/>
     <p:sldId id="291" r:id="rId7"/>
@@ -2021,7 +2021,11 @@
               </a:spcAft>
               <a:buNone/>
             </a:pPr>
-            <a:endParaRPr/>
+            <a:r>
+              <a:rPr lang="es-MX" dirty="0"/>
+              <a:t>En todos los casos mostramos ejemplos</a:t>
+            </a:r>
+            <a:endParaRPr dirty="0"/>
           </a:p>
         </p:txBody>
       </p:sp>
@@ -11222,112 +11226,250 @@
           </a:p>
         </p:txBody>
       </p:sp>
-      <p:sp>
-        <p:nvSpPr>
-          <p:cNvPr id="4" name="Rectangle 3">
-            <a:extLst>
-              <a:ext uri="{FF2B5EF4-FFF2-40B4-BE49-F238E27FC236}">
-                <a16:creationId xmlns:a16="http://schemas.microsoft.com/office/drawing/2014/main" id="{34B14F17-07BB-AA6F-5524-B2FD099C5A92}"/>
-              </a:ext>
-            </a:extLst>
-          </p:cNvPr>
-          <p:cNvSpPr/>
-          <p:nvPr/>
-        </p:nvSpPr>
-        <p:spPr>
-          <a:xfrm>
-            <a:off x="685800" y="2255520"/>
-            <a:ext cx="1821180" cy="632460"/>
-          </a:xfrm>
-          <a:prstGeom prst="rect">
-            <a:avLst/>
-          </a:prstGeom>
-          <a:solidFill>
-            <a:schemeClr val="bg1">
-              <a:lumMod val="95000"/>
-            </a:schemeClr>
-          </a:solidFill>
-          <a:effectLst/>
-        </p:spPr>
-        <p:style>
-          <a:lnRef idx="1">
-            <a:schemeClr val="accent4"/>
-          </a:lnRef>
-          <a:fillRef idx="2">
-            <a:schemeClr val="accent4"/>
-          </a:fillRef>
-          <a:effectRef idx="1">
-            <a:schemeClr val="accent4"/>
-          </a:effectRef>
-          <a:fontRef idx="minor">
-            <a:schemeClr val="dk1"/>
-          </a:fontRef>
-        </p:style>
-        <p:txBody>
-          <a:bodyPr rtlCol="0" anchor="ctr"/>
-          <a:lstStyle/>
-          <a:p>
-            <a:pPr algn="ctr"/>
-            <a:r>
-              <a:rPr lang="en-US" dirty="0"/>
-              <a:t>KNN (K=5)</a:t>
-            </a:r>
-          </a:p>
-        </p:txBody>
-      </p:sp>
-      <p:sp>
-        <p:nvSpPr>
-          <p:cNvPr id="5" name="Rectangle 4">
-            <a:extLst>
-              <a:ext uri="{FF2B5EF4-FFF2-40B4-BE49-F238E27FC236}">
-                <a16:creationId xmlns:a16="http://schemas.microsoft.com/office/drawing/2014/main" id="{7A10AD5C-676C-BBAD-3523-18F60EE7B3B3}"/>
-              </a:ext>
-            </a:extLst>
-          </p:cNvPr>
-          <p:cNvSpPr/>
-          <p:nvPr/>
-        </p:nvSpPr>
-        <p:spPr>
-          <a:xfrm>
-            <a:off x="685800" y="3040380"/>
-            <a:ext cx="1821180" cy="632460"/>
-          </a:xfrm>
-          <a:prstGeom prst="rect">
-            <a:avLst/>
-          </a:prstGeom>
-          <a:solidFill>
-            <a:schemeClr val="bg1">
-              <a:lumMod val="95000"/>
-            </a:schemeClr>
-          </a:solidFill>
-          <a:effectLst/>
-        </p:spPr>
-        <p:style>
-          <a:lnRef idx="1">
-            <a:schemeClr val="accent4"/>
-          </a:lnRef>
-          <a:fillRef idx="2">
-            <a:schemeClr val="accent4"/>
-          </a:fillRef>
-          <a:effectRef idx="1">
-            <a:schemeClr val="accent4"/>
-          </a:effectRef>
-          <a:fontRef idx="minor">
-            <a:schemeClr val="dk1"/>
-          </a:fontRef>
-        </p:style>
-        <p:txBody>
-          <a:bodyPr rtlCol="0" anchor="ctr"/>
-          <a:lstStyle/>
-          <a:p>
-            <a:pPr algn="ctr"/>
-            <a:r>
-              <a:rPr lang="en-US" dirty="0"/>
-              <a:t>KNN (K=10)</a:t>
-            </a:r>
-          </a:p>
-        </p:txBody>
-      </p:sp>
+      <mc:AlternateContent xmlns:mc="http://schemas.openxmlformats.org/markup-compatibility/2006">
+        <mc:Choice xmlns:a14="http://schemas.microsoft.com/office/drawing/2010/main" Requires="a14">
+          <p:sp>
+            <p:nvSpPr>
+              <p:cNvPr id="4" name="Rectangle 3">
+                <a:extLst>
+                  <a:ext uri="{FF2B5EF4-FFF2-40B4-BE49-F238E27FC236}">
+                    <a16:creationId xmlns:a16="http://schemas.microsoft.com/office/drawing/2014/main" id="{34B14F17-07BB-AA6F-5524-B2FD099C5A92}"/>
+                  </a:ext>
+                </a:extLst>
+              </p:cNvPr>
+              <p:cNvSpPr/>
+              <p:nvPr/>
+            </p:nvSpPr>
+            <p:spPr>
+              <a:xfrm>
+                <a:off x="685800" y="2255520"/>
+                <a:ext cx="1821180" cy="632460"/>
+              </a:xfrm>
+              <a:prstGeom prst="rect">
+                <a:avLst/>
+              </a:prstGeom>
+              <a:solidFill>
+                <a:schemeClr val="bg1">
+                  <a:lumMod val="95000"/>
+                </a:schemeClr>
+              </a:solidFill>
+              <a:effectLst/>
+            </p:spPr>
+            <p:style>
+              <a:lnRef idx="1">
+                <a:schemeClr val="accent4"/>
+              </a:lnRef>
+              <a:fillRef idx="2">
+                <a:schemeClr val="accent4"/>
+              </a:fillRef>
+              <a:effectRef idx="1">
+                <a:schemeClr val="accent4"/>
+              </a:effectRef>
+              <a:fontRef idx="minor">
+                <a:schemeClr val="dk1"/>
+              </a:fontRef>
+            </p:style>
+            <p:txBody>
+              <a:bodyPr rtlCol="0" anchor="ctr"/>
+              <a:lstStyle/>
+              <a:p>
+                <a:pPr algn="ctr"/>
+                <a:r>
+                  <a:rPr lang="en-US" dirty="0"/>
+                  <a:t>LASSO (</a:t>
+                </a:r>
+                <a14:m>
+                  <m:oMath xmlns:m="http://schemas.openxmlformats.org/officeDocument/2006/math">
+                    <m:r>
+                      <a:rPr lang="es-MX" b="0" i="1" smtClean="0">
+                        <a:latin typeface="Cambria Math" panose="02040503050406030204" pitchFamily="18" charset="0"/>
+                      </a:rPr>
+                      <m:t>𝜆</m:t>
+                    </m:r>
+                    <m:r>
+                      <a:rPr lang="es-MX" b="0" i="1" smtClean="0">
+                        <a:latin typeface="Cambria Math" panose="02040503050406030204" pitchFamily="18" charset="0"/>
+                      </a:rPr>
+                      <m:t>=0.5</m:t>
+                    </m:r>
+                  </m:oMath>
+                </a14:m>
+                <a:r>
+                  <a:rPr lang="en-US" dirty="0"/>
+                  <a:t>)</a:t>
+                </a:r>
+              </a:p>
+            </p:txBody>
+          </p:sp>
+        </mc:Choice>
+        <mc:Fallback>
+          <p:sp>
+            <p:nvSpPr>
+              <p:cNvPr id="4" name="Rectangle 3">
+                <a:extLst>
+                  <a:ext uri="{FF2B5EF4-FFF2-40B4-BE49-F238E27FC236}">
+                    <a16:creationId xmlns:a16="http://schemas.microsoft.com/office/drawing/2014/main" id="{34B14F17-07BB-AA6F-5524-B2FD099C5A92}"/>
+                  </a:ext>
+                </a:extLst>
+              </p:cNvPr>
+              <p:cNvSpPr>
+                <a:spLocks noRot="1" noChangeAspect="1" noMove="1" noResize="1" noEditPoints="1" noAdjustHandles="1" noChangeArrowheads="1" noChangeShapeType="1" noTextEdit="1"/>
+              </p:cNvSpPr>
+              <p:nvPr/>
+            </p:nvSpPr>
+            <p:spPr>
+              <a:xfrm>
+                <a:off x="685800" y="2255520"/>
+                <a:ext cx="1821180" cy="632460"/>
+              </a:xfrm>
+              <a:prstGeom prst="rect">
+                <a:avLst/>
+              </a:prstGeom>
+              <a:blipFill>
+                <a:blip r:embed="rId2"/>
+                <a:stretch>
+                  <a:fillRect/>
+                </a:stretch>
+              </a:blipFill>
+              <a:effectLst/>
+            </p:spPr>
+            <p:txBody>
+              <a:bodyPr/>
+              <a:lstStyle/>
+              <a:p>
+                <a:r>
+                  <a:rPr lang="es-AR">
+                    <a:noFill/>
+                  </a:rPr>
+                  <a:t> </a:t>
+                </a:r>
+              </a:p>
+            </p:txBody>
+          </p:sp>
+        </mc:Fallback>
+      </mc:AlternateContent>
+      <mc:AlternateContent xmlns:mc="http://schemas.openxmlformats.org/markup-compatibility/2006">
+        <mc:Choice xmlns:a14="http://schemas.microsoft.com/office/drawing/2010/main" Requires="a14">
+          <p:sp>
+            <p:nvSpPr>
+              <p:cNvPr id="5" name="Rectangle 4">
+                <a:extLst>
+                  <a:ext uri="{FF2B5EF4-FFF2-40B4-BE49-F238E27FC236}">
+                    <a16:creationId xmlns:a16="http://schemas.microsoft.com/office/drawing/2014/main" id="{7A10AD5C-676C-BBAD-3523-18F60EE7B3B3}"/>
+                  </a:ext>
+                </a:extLst>
+              </p:cNvPr>
+              <p:cNvSpPr/>
+              <p:nvPr/>
+            </p:nvSpPr>
+            <p:spPr>
+              <a:xfrm>
+                <a:off x="685800" y="3040380"/>
+                <a:ext cx="1821180" cy="632460"/>
+              </a:xfrm>
+              <a:prstGeom prst="rect">
+                <a:avLst/>
+              </a:prstGeom>
+              <a:solidFill>
+                <a:schemeClr val="bg1">
+                  <a:lumMod val="95000"/>
+                </a:schemeClr>
+              </a:solidFill>
+              <a:effectLst/>
+            </p:spPr>
+            <p:style>
+              <a:lnRef idx="1">
+                <a:schemeClr val="accent4"/>
+              </a:lnRef>
+              <a:fillRef idx="2">
+                <a:schemeClr val="accent4"/>
+              </a:fillRef>
+              <a:effectRef idx="1">
+                <a:schemeClr val="accent4"/>
+              </a:effectRef>
+              <a:fontRef idx="minor">
+                <a:schemeClr val="dk1"/>
+              </a:fontRef>
+            </p:style>
+            <p:txBody>
+              <a:bodyPr rtlCol="0" anchor="ctr"/>
+              <a:lstStyle/>
+              <a:p>
+                <a:pPr algn="ctr"/>
+                <a:r>
+                  <a:rPr lang="en-US" dirty="0"/>
+                  <a:t>LASSO (</a:t>
+                </a:r>
+                <a14:m>
+                  <m:oMath xmlns:m="http://schemas.openxmlformats.org/officeDocument/2006/math">
+                    <m:r>
+                      <a:rPr lang="es-MX" b="0" i="1" smtClean="0">
+                        <a:latin typeface="Cambria Math" panose="02040503050406030204" pitchFamily="18" charset="0"/>
+                      </a:rPr>
+                      <m:t>𝜆</m:t>
+                    </m:r>
+                    <m:r>
+                      <a:rPr lang="es-MX" b="0" i="1" smtClean="0">
+                        <a:latin typeface="Cambria Math" panose="02040503050406030204" pitchFamily="18" charset="0"/>
+                      </a:rPr>
+                      <m:t>=0.2</m:t>
+                    </m:r>
+                  </m:oMath>
+                </a14:m>
+                <a:r>
+                  <a:rPr lang="en-US" dirty="0"/>
+                  <a:t>)</a:t>
+                </a:r>
+              </a:p>
+            </p:txBody>
+          </p:sp>
+        </mc:Choice>
+        <mc:Fallback>
+          <p:sp>
+            <p:nvSpPr>
+              <p:cNvPr id="5" name="Rectangle 4">
+                <a:extLst>
+                  <a:ext uri="{FF2B5EF4-FFF2-40B4-BE49-F238E27FC236}">
+                    <a16:creationId xmlns:a16="http://schemas.microsoft.com/office/drawing/2014/main" id="{7A10AD5C-676C-BBAD-3523-18F60EE7B3B3}"/>
+                  </a:ext>
+                </a:extLst>
+              </p:cNvPr>
+              <p:cNvSpPr>
+                <a:spLocks noRot="1" noChangeAspect="1" noMove="1" noResize="1" noEditPoints="1" noAdjustHandles="1" noChangeArrowheads="1" noChangeShapeType="1" noTextEdit="1"/>
+              </p:cNvSpPr>
+              <p:nvPr/>
+            </p:nvSpPr>
+            <p:spPr>
+              <a:xfrm>
+                <a:off x="685800" y="3040380"/>
+                <a:ext cx="1821180" cy="632460"/>
+              </a:xfrm>
+              <a:prstGeom prst="rect">
+                <a:avLst/>
+              </a:prstGeom>
+              <a:blipFill>
+                <a:blip r:embed="rId3"/>
+                <a:stretch>
+                  <a:fillRect/>
+                </a:stretch>
+              </a:blipFill>
+              <a:effectLst/>
+            </p:spPr>
+            <p:txBody>
+              <a:bodyPr/>
+              <a:lstStyle/>
+              <a:p>
+                <a:r>
+                  <a:rPr lang="es-AR">
+                    <a:noFill/>
+                  </a:rPr>
+                  <a:t> </a:t>
+                </a:r>
+              </a:p>
+            </p:txBody>
+          </p:sp>
+        </mc:Fallback>
+      </mc:AlternateContent>
       <p:sp>
         <p:nvSpPr>
           <p:cNvPr id="7" name="Rectangle 6">
@@ -11556,59 +11698,128 @@
           </a:p>
         </p:txBody>
       </p:sp>
-      <p:sp>
-        <p:nvSpPr>
-          <p:cNvPr id="11" name="Rectangle 10">
-            <a:extLst>
-              <a:ext uri="{FF2B5EF4-FFF2-40B4-BE49-F238E27FC236}">
-                <a16:creationId xmlns:a16="http://schemas.microsoft.com/office/drawing/2014/main" id="{02A53AE6-C40D-62B1-55FC-BD9FE32EE8F5}"/>
-              </a:ext>
-            </a:extLst>
-          </p:cNvPr>
-          <p:cNvSpPr/>
-          <p:nvPr/>
-        </p:nvSpPr>
-        <p:spPr>
-          <a:xfrm>
-            <a:off x="6637020" y="2537460"/>
-            <a:ext cx="1821180" cy="632460"/>
-          </a:xfrm>
-          <a:prstGeom prst="rect">
-            <a:avLst/>
-          </a:prstGeom>
-          <a:solidFill>
-            <a:schemeClr val="bg1">
-              <a:lumMod val="95000"/>
-            </a:schemeClr>
-          </a:solidFill>
-          <a:effectLst/>
-        </p:spPr>
-        <p:style>
-          <a:lnRef idx="1">
-            <a:schemeClr val="accent4"/>
-          </a:lnRef>
-          <a:fillRef idx="2">
-            <a:schemeClr val="accent4"/>
-          </a:fillRef>
-          <a:effectRef idx="1">
-            <a:schemeClr val="accent4"/>
-          </a:effectRef>
-          <a:fontRef idx="minor">
-            <a:schemeClr val="dk1"/>
-          </a:fontRef>
-        </p:style>
-        <p:txBody>
-          <a:bodyPr rtlCol="0" anchor="ctr"/>
-          <a:lstStyle/>
-          <a:p>
-            <a:pPr algn="ctr"/>
-            <a:r>
-              <a:rPr lang="en-US" dirty="0"/>
-              <a:t>KNN (K=10)</a:t>
-            </a:r>
-          </a:p>
-        </p:txBody>
-      </p:sp>
+      <mc:AlternateContent xmlns:mc="http://schemas.openxmlformats.org/markup-compatibility/2006">
+        <mc:Choice xmlns:a14="http://schemas.microsoft.com/office/drawing/2010/main" Requires="a14">
+          <p:sp>
+            <p:nvSpPr>
+              <p:cNvPr id="11" name="Rectangle 10">
+                <a:extLst>
+                  <a:ext uri="{FF2B5EF4-FFF2-40B4-BE49-F238E27FC236}">
+                    <a16:creationId xmlns:a16="http://schemas.microsoft.com/office/drawing/2014/main" id="{02A53AE6-C40D-62B1-55FC-BD9FE32EE8F5}"/>
+                  </a:ext>
+                </a:extLst>
+              </p:cNvPr>
+              <p:cNvSpPr/>
+              <p:nvPr/>
+            </p:nvSpPr>
+            <p:spPr>
+              <a:xfrm>
+                <a:off x="6637020" y="2537460"/>
+                <a:ext cx="1821180" cy="632460"/>
+              </a:xfrm>
+              <a:prstGeom prst="rect">
+                <a:avLst/>
+              </a:prstGeom>
+              <a:solidFill>
+                <a:schemeClr val="bg1">
+                  <a:lumMod val="95000"/>
+                </a:schemeClr>
+              </a:solidFill>
+              <a:effectLst/>
+            </p:spPr>
+            <p:style>
+              <a:lnRef idx="1">
+                <a:schemeClr val="accent4"/>
+              </a:lnRef>
+              <a:fillRef idx="2">
+                <a:schemeClr val="accent4"/>
+              </a:fillRef>
+              <a:effectRef idx="1">
+                <a:schemeClr val="accent4"/>
+              </a:effectRef>
+              <a:fontRef idx="minor">
+                <a:schemeClr val="dk1"/>
+              </a:fontRef>
+            </p:style>
+            <p:txBody>
+              <a:bodyPr rtlCol="0" anchor="ctr"/>
+              <a:lstStyle/>
+              <a:p>
+                <a:pPr algn="ctr"/>
+                <a:r>
+                  <a:rPr lang="en-US" dirty="0"/>
+                  <a:t>LASSO (</a:t>
+                </a:r>
+                <a14:m>
+                  <m:oMath xmlns:m="http://schemas.openxmlformats.org/officeDocument/2006/math">
+                    <m:r>
+                      <a:rPr lang="es-MX" b="0" i="1" smtClean="0">
+                        <a:latin typeface="Cambria Math" panose="02040503050406030204" pitchFamily="18" charset="0"/>
+                      </a:rPr>
+                      <m:t>𝜆</m:t>
+                    </m:r>
+                    <m:r>
+                      <a:rPr lang="es-MX" b="0" i="1" smtClean="0">
+                        <a:latin typeface="Cambria Math" panose="02040503050406030204" pitchFamily="18" charset="0"/>
+                      </a:rPr>
+                      <m:t>=0.2</m:t>
+                    </m:r>
+                  </m:oMath>
+                </a14:m>
+                <a:r>
+                  <a:rPr lang="en-US" dirty="0"/>
+                  <a:t>)</a:t>
+                </a:r>
+              </a:p>
+            </p:txBody>
+          </p:sp>
+        </mc:Choice>
+        <mc:Fallback>
+          <p:sp>
+            <p:nvSpPr>
+              <p:cNvPr id="11" name="Rectangle 10">
+                <a:extLst>
+                  <a:ext uri="{FF2B5EF4-FFF2-40B4-BE49-F238E27FC236}">
+                    <a16:creationId xmlns:a16="http://schemas.microsoft.com/office/drawing/2014/main" id="{02A53AE6-C40D-62B1-55FC-BD9FE32EE8F5}"/>
+                  </a:ext>
+                </a:extLst>
+              </p:cNvPr>
+              <p:cNvSpPr>
+                <a:spLocks noRot="1" noChangeAspect="1" noMove="1" noResize="1" noEditPoints="1" noAdjustHandles="1" noChangeArrowheads="1" noChangeShapeType="1" noTextEdit="1"/>
+              </p:cNvSpPr>
+              <p:nvPr/>
+            </p:nvSpPr>
+            <p:spPr>
+              <a:xfrm>
+                <a:off x="6637020" y="2537460"/>
+                <a:ext cx="1821180" cy="632460"/>
+              </a:xfrm>
+              <a:prstGeom prst="rect">
+                <a:avLst/>
+              </a:prstGeom>
+              <a:blipFill>
+                <a:blip r:embed="rId4"/>
+                <a:stretch>
+                  <a:fillRect/>
+                </a:stretch>
+              </a:blipFill>
+              <a:effectLst/>
+            </p:spPr>
+            <p:txBody>
+              <a:bodyPr/>
+              <a:lstStyle/>
+              <a:p>
+                <a:r>
+                  <a:rPr lang="es-AR">
+                    <a:noFill/>
+                  </a:rPr>
+                  <a:t> </a:t>
+                </a:r>
+              </a:p>
+            </p:txBody>
+          </p:sp>
+        </mc:Fallback>
+      </mc:AlternateContent>
       <p:cxnSp>
         <p:nvCxnSpPr>
           <p:cNvPr id="13" name="Straight Arrow Connector 12">
@@ -12175,19 +12386,25 @@
       </p:sp>
       <p:graphicFrame>
         <p:nvGraphicFramePr>
-          <p:cNvPr id="121" name="Google Shape;121;p21"/>
+          <p:cNvPr id="4" name="Google Shape;121;p21">
+            <a:extLst>
+              <a:ext uri="{FF2B5EF4-FFF2-40B4-BE49-F238E27FC236}">
+                <a16:creationId xmlns:a16="http://schemas.microsoft.com/office/drawing/2014/main" id="{4EA3B72B-3213-4158-96F8-2F71BE59908B}"/>
+              </a:ext>
+            </a:extLst>
+          </p:cNvPr>
           <p:cNvGraphicFramePr/>
           <p:nvPr>
             <p:extLst>
               <p:ext uri="{D42A27DB-BD31-4B8C-83A1-F6EECF244321}">
-                <p14:modId xmlns:p14="http://schemas.microsoft.com/office/powerpoint/2010/main" val="2756269044"/>
+                <p14:modId xmlns:p14="http://schemas.microsoft.com/office/powerpoint/2010/main" val="2971145288"/>
               </p:ext>
             </p:extLst>
           </p:nvPr>
         </p:nvGraphicFramePr>
         <p:xfrm>
           <a:off x="311750" y="1238250"/>
-          <a:ext cx="8520550" cy="3728890"/>
+          <a:ext cx="8584913" cy="3708502"/>
         </p:xfrm>
         <a:graphic>
           <a:graphicData uri="http://schemas.openxmlformats.org/drawingml/2006/table">
@@ -12197,28 +12414,21 @@
                 <a:tableStyleId>{272BD5B9-A1A1-4B16-8F28-979374803D1B}</a:tableStyleId>
               </a:tblPr>
               <a:tblGrid>
-                <a:gridCol w="936758">
+                <a:gridCol w="1093973">
                   <a:extLst>
                     <a:ext uri="{9D8B030D-6E8A-4147-A177-3AD203B41FA5}">
                       <a16:colId xmlns:a16="http://schemas.microsoft.com/office/drawing/2014/main" val="20000"/>
                     </a:ext>
                   </a:extLst>
                 </a:gridCol>
-                <a:gridCol w="1169377">
-                  <a:extLst>
-                    <a:ext uri="{9D8B030D-6E8A-4147-A177-3AD203B41FA5}">
-                      <a16:colId xmlns:a16="http://schemas.microsoft.com/office/drawing/2014/main" val="20001"/>
-                    </a:ext>
-                  </a:extLst>
-                </a:gridCol>
-                <a:gridCol w="3648807">
+                <a:gridCol w="3915870">
                   <a:extLst>
                     <a:ext uri="{9D8B030D-6E8A-4147-A177-3AD203B41FA5}">
                       <a16:colId xmlns:a16="http://schemas.microsoft.com/office/drawing/2014/main" val="20002"/>
                     </a:ext>
                   </a:extLst>
                 </a:gridCol>
-                <a:gridCol w="2765608">
+                <a:gridCol w="3575070">
                   <a:extLst>
                     <a:ext uri="{9D8B030D-6E8A-4147-A177-3AD203B41FA5}">
                       <a16:colId xmlns:a16="http://schemas.microsoft.com/office/drawing/2014/main" val="20003"/>
@@ -12226,7 +12436,7 @@
                   </a:extLst>
                 </a:gridCol>
               </a:tblGrid>
-              <a:tr h="505525">
+              <a:tr h="514654">
                 <a:tc>
                   <a:txBody>
                     <a:bodyPr/>
@@ -12242,7 +12452,7 @@
                         <a:buNone/>
                       </a:pPr>
                       <a:r>
-                        <a:rPr lang="en-GB" b="1">
+                        <a:rPr lang="en-GB" b="1" dirty="0" err="1">
                           <a:solidFill>
                             <a:srgbClr val="FFFFFF"/>
                           </a:solidFill>
@@ -12253,94 +12463,7 @@
                         </a:rPr>
                         <a:t>Clase</a:t>
                       </a:r>
-                      <a:endParaRPr b="1">
-                        <a:solidFill>
-                          <a:srgbClr val="FFFFFF"/>
-                        </a:solidFill>
-                        <a:latin typeface="Proxima Nova"/>
-                        <a:ea typeface="Proxima Nova"/>
-                        <a:cs typeface="Proxima Nova"/>
-                        <a:sym typeface="Proxima Nova"/>
-                      </a:endParaRPr>
-                    </a:p>
-                  </a:txBody>
-                  <a:tcPr marL="91425" marR="91425" marT="91425" marB="91425" anchor="ctr">
-                    <a:lnL w="9525" cap="flat" cmpd="sng">
-                      <a:solidFill>
-                        <a:srgbClr val="9E9E9E">
-                          <a:alpha val="0"/>
-                        </a:srgbClr>
-                      </a:solidFill>
-                      <a:prstDash val="solid"/>
-                      <a:round/>
-                      <a:headEnd type="none" w="sm" len="sm"/>
-                      <a:tailEnd type="none" w="sm" len="sm"/>
-                    </a:lnL>
-                    <a:lnR w="9525" cap="flat" cmpd="sng">
-                      <a:solidFill>
-                        <a:srgbClr val="9E9E9E">
-                          <a:alpha val="0"/>
-                        </a:srgbClr>
-                      </a:solidFill>
-                      <a:prstDash val="solid"/>
-                      <a:round/>
-                      <a:headEnd type="none" w="sm" len="sm"/>
-                      <a:tailEnd type="none" w="sm" len="sm"/>
-                    </a:lnR>
-                    <a:lnT w="9525" cap="flat" cmpd="sng">
-                      <a:solidFill>
-                        <a:srgbClr val="9E9E9E">
-                          <a:alpha val="0"/>
-                        </a:srgbClr>
-                      </a:solidFill>
-                      <a:prstDash val="solid"/>
-                      <a:round/>
-                      <a:headEnd type="none" w="sm" len="sm"/>
-                      <a:tailEnd type="none" w="sm" len="sm"/>
-                    </a:lnT>
-                    <a:lnB w="9525" cap="flat" cmpd="sng">
-                      <a:solidFill>
-                        <a:srgbClr val="9E9E9E">
-                          <a:alpha val="0"/>
-                        </a:srgbClr>
-                      </a:solidFill>
-                      <a:prstDash val="solid"/>
-                      <a:round/>
-                      <a:headEnd type="none" w="sm" len="sm"/>
-                      <a:tailEnd type="none" w="sm" len="sm"/>
-                    </a:lnB>
-                    <a:solidFill>
-                      <a:schemeClr val="dk2"/>
-                    </a:solidFill>
-                  </a:tcPr>
-                </a:tc>
-                <a:tc>
-                  <a:txBody>
-                    <a:bodyPr/>
-                    <a:lstStyle/>
-                    <a:p>
-                      <a:pPr marL="0" lvl="0" indent="0" algn="ctr" rtl="0">
-                        <a:spcBef>
-                          <a:spcPts val="0"/>
-                        </a:spcBef>
-                        <a:spcAft>
-                          <a:spcPts val="0"/>
-                        </a:spcAft>
-                        <a:buNone/>
-                      </a:pPr>
-                      <a:r>
-                        <a:rPr lang="en-GB" b="1">
-                          <a:solidFill>
-                            <a:srgbClr val="FFFFFF"/>
-                          </a:solidFill>
-                          <a:latin typeface="Proxima Nova"/>
-                          <a:ea typeface="Proxima Nova"/>
-                          <a:cs typeface="Proxima Nova"/>
-                          <a:sym typeface="Proxima Nova"/>
-                        </a:rPr>
-                        <a:t>Fecha</a:t>
-                      </a:r>
-                      <a:endParaRPr b="1">
+                      <a:endParaRPr b="1" dirty="0">
                         <a:solidFill>
                           <a:srgbClr val="FFFFFF"/>
                         </a:solidFill>
@@ -12439,7 +12562,7 @@
                     </a:p>
                   </a:txBody>
                   <a:tcPr marL="91425" marR="91425" marT="91425" marB="91425" anchor="ctr">
-                    <a:lnL w="9525" cap="flat" cmpd="sng">
+                    <a:lnL w="9525" cap="flat" cmpd="sng" algn="ctr">
                       <a:solidFill>
                         <a:srgbClr val="9E9E9E">
                           <a:alpha val="0"/>
@@ -12472,7 +12595,7 @@
                       <a:headEnd type="none" w="sm" len="sm"/>
                       <a:tailEnd type="none" w="sm" len="sm"/>
                     </a:lnT>
-                    <a:lnB w="9525" cap="flat" cmpd="sng">
+                    <a:lnB w="9525" cap="flat" cmpd="sng" algn="ctr">
                       <a:solidFill>
                         <a:srgbClr val="9E9E9E">
                           <a:alpha val="0"/>
@@ -12581,362 +12704,7 @@
                   </a:ext>
                 </a:extLst>
               </a:tr>
-              <a:tr h="505525">
-                <a:tc>
-                  <a:txBody>
-                    <a:bodyPr/>
-                    <a:lstStyle/>
-                    <a:p>
-                      <a:pPr marL="0" lvl="0" indent="0" algn="ctr" rtl="0">
-                        <a:spcBef>
-                          <a:spcPts val="0"/>
-                        </a:spcBef>
-                        <a:spcAft>
-                          <a:spcPts val="0"/>
-                        </a:spcAft>
-                        <a:buNone/>
-                      </a:pPr>
-                      <a:r>
-                        <a:rPr lang="en-GB">
-                          <a:latin typeface="Proxima Nova"/>
-                          <a:ea typeface="Proxima Nova"/>
-                          <a:cs typeface="Proxima Nova"/>
-                          <a:sym typeface="Proxima Nova"/>
-                        </a:rPr>
-                        <a:t>1</a:t>
-                      </a:r>
-                      <a:endParaRPr>
-                        <a:latin typeface="Proxima Nova"/>
-                        <a:ea typeface="Proxima Nova"/>
-                        <a:cs typeface="Proxima Nova"/>
-                        <a:sym typeface="Proxima Nova"/>
-                      </a:endParaRPr>
-                    </a:p>
-                  </a:txBody>
-                  <a:tcPr marL="91425" marR="91425" marT="91425" marB="91425" anchor="ctr">
-                    <a:lnL w="9525" cap="flat" cmpd="sng">
-                      <a:solidFill>
-                        <a:srgbClr val="9E9E9E">
-                          <a:alpha val="0"/>
-                        </a:srgbClr>
-                      </a:solidFill>
-                      <a:prstDash val="solid"/>
-                      <a:round/>
-                      <a:headEnd type="none" w="sm" len="sm"/>
-                      <a:tailEnd type="none" w="sm" len="sm"/>
-                    </a:lnL>
-                    <a:lnR w="9525" cap="flat" cmpd="sng">
-                      <a:solidFill>
-                        <a:srgbClr val="9E9E9E">
-                          <a:alpha val="0"/>
-                        </a:srgbClr>
-                      </a:solidFill>
-                      <a:prstDash val="solid"/>
-                      <a:round/>
-                      <a:headEnd type="none" w="sm" len="sm"/>
-                      <a:tailEnd type="none" w="sm" len="sm"/>
-                    </a:lnR>
-                    <a:lnT w="9525" cap="flat" cmpd="sng">
-                      <a:solidFill>
-                        <a:srgbClr val="9E9E9E">
-                          <a:alpha val="0"/>
-                        </a:srgbClr>
-                      </a:solidFill>
-                      <a:prstDash val="solid"/>
-                      <a:round/>
-                      <a:headEnd type="none" w="sm" len="sm"/>
-                      <a:tailEnd type="none" w="sm" len="sm"/>
-                    </a:lnT>
-                    <a:lnB w="9525" cap="flat" cmpd="sng">
-                      <a:solidFill>
-                        <a:srgbClr val="9E9E9E">
-                          <a:alpha val="0"/>
-                        </a:srgbClr>
-                      </a:solidFill>
-                      <a:prstDash val="solid"/>
-                      <a:round/>
-                      <a:headEnd type="none" w="sm" len="sm"/>
-                      <a:tailEnd type="none" w="sm" len="sm"/>
-                    </a:lnB>
-                  </a:tcPr>
-                </a:tc>
-                <a:tc>
-                  <a:txBody>
-                    <a:bodyPr/>
-                    <a:lstStyle/>
-                    <a:p>
-                      <a:pPr marL="0" lvl="0" indent="0" algn="ctr" rtl="0">
-                        <a:spcBef>
-                          <a:spcPts val="0"/>
-                        </a:spcBef>
-                        <a:spcAft>
-                          <a:spcPts val="0"/>
-                        </a:spcAft>
-                        <a:buNone/>
-                      </a:pPr>
-                      <a:r>
-                        <a:rPr lang="en-GB" dirty="0">
-                          <a:latin typeface="Proxima Nova"/>
-                          <a:ea typeface="Proxima Nova"/>
-                          <a:cs typeface="Proxima Nova"/>
-                          <a:sym typeface="Proxima Nova"/>
-                        </a:rPr>
-                        <a:t>13/8</a:t>
-                      </a:r>
-                      <a:endParaRPr dirty="0">
-                        <a:latin typeface="Proxima Nova"/>
-                        <a:ea typeface="Proxima Nova"/>
-                        <a:cs typeface="Proxima Nova"/>
-                        <a:sym typeface="Proxima Nova"/>
-                      </a:endParaRPr>
-                    </a:p>
-                  </a:txBody>
-                  <a:tcPr marL="91425" marR="91425" marT="91425" marB="91425" anchor="ctr">
-                    <a:lnL w="9525" cap="flat" cmpd="sng">
-                      <a:solidFill>
-                        <a:srgbClr val="9E9E9E">
-                          <a:alpha val="0"/>
-                        </a:srgbClr>
-                      </a:solidFill>
-                      <a:prstDash val="solid"/>
-                      <a:round/>
-                      <a:headEnd type="none" w="sm" len="sm"/>
-                      <a:tailEnd type="none" w="sm" len="sm"/>
-                    </a:lnL>
-                    <a:lnR w="9525" cap="flat" cmpd="sng">
-                      <a:solidFill>
-                        <a:srgbClr val="9E9E9E">
-                          <a:alpha val="0"/>
-                        </a:srgbClr>
-                      </a:solidFill>
-                      <a:prstDash val="solid"/>
-                      <a:round/>
-                      <a:headEnd type="none" w="sm" len="sm"/>
-                      <a:tailEnd type="none" w="sm" len="sm"/>
-                    </a:lnR>
-                    <a:lnT w="9525" cap="flat" cmpd="sng">
-                      <a:solidFill>
-                        <a:srgbClr val="9E9E9E">
-                          <a:alpha val="0"/>
-                        </a:srgbClr>
-                      </a:solidFill>
-                      <a:prstDash val="solid"/>
-                      <a:round/>
-                      <a:headEnd type="none" w="sm" len="sm"/>
-                      <a:tailEnd type="none" w="sm" len="sm"/>
-                    </a:lnT>
-                    <a:lnB w="9525" cap="flat" cmpd="sng">
-                      <a:solidFill>
-                        <a:srgbClr val="9E9E9E">
-                          <a:alpha val="0"/>
-                        </a:srgbClr>
-                      </a:solidFill>
-                      <a:prstDash val="solid"/>
-                      <a:round/>
-                      <a:headEnd type="none" w="sm" len="sm"/>
-                      <a:tailEnd type="none" w="sm" len="sm"/>
-                    </a:lnB>
-                  </a:tcPr>
-                </a:tc>
-                <a:tc>
-                  <a:txBody>
-                    <a:bodyPr/>
-                    <a:lstStyle/>
-                    <a:p>
-                      <a:pPr marL="0" lvl="0" indent="0" algn="ctr" rtl="0">
-                        <a:spcBef>
-                          <a:spcPts val="0"/>
-                        </a:spcBef>
-                        <a:spcAft>
-                          <a:spcPts val="0"/>
-                        </a:spcAft>
-                        <a:buNone/>
-                      </a:pPr>
-                      <a:r>
-                        <a:rPr lang="en-GB" dirty="0">
-                          <a:latin typeface="Proxima Nova"/>
-                          <a:ea typeface="Proxima Nova"/>
-                          <a:cs typeface="Proxima Nova"/>
-                          <a:sym typeface="Proxima Nova"/>
-                        </a:rPr>
-                        <a:t>Intro, </a:t>
-                      </a:r>
-                      <a:r>
-                        <a:rPr lang="en-GB" dirty="0" err="1">
-                          <a:latin typeface="Proxima Nova"/>
-                          <a:ea typeface="Proxima Nova"/>
-                          <a:cs typeface="Proxima Nova"/>
-                          <a:sym typeface="Proxima Nova"/>
-                        </a:rPr>
-                        <a:t>tipos</a:t>
-                      </a:r>
-                      <a:r>
-                        <a:rPr lang="en-GB" dirty="0">
-                          <a:latin typeface="Proxima Nova"/>
-                          <a:ea typeface="Proxima Nova"/>
-                          <a:cs typeface="Proxima Nova"/>
-                          <a:sym typeface="Proxima Nova"/>
-                        </a:rPr>
-                        <a:t> de </a:t>
-                      </a:r>
-                      <a:r>
-                        <a:rPr lang="en-GB" dirty="0" err="1">
-                          <a:latin typeface="Proxima Nova"/>
-                          <a:ea typeface="Proxima Nova"/>
-                          <a:cs typeface="Proxima Nova"/>
-                          <a:sym typeface="Proxima Nova"/>
-                        </a:rPr>
-                        <a:t>modelos</a:t>
-                      </a:r>
-                      <a:r>
-                        <a:rPr lang="en-GB" dirty="0">
-                          <a:latin typeface="Proxima Nova"/>
-                          <a:ea typeface="Proxima Nova"/>
-                          <a:cs typeface="Proxima Nova"/>
-                          <a:sym typeface="Proxima Nova"/>
-                        </a:rPr>
-                        <a:t>, trade-offs</a:t>
-                      </a:r>
-                      <a:endParaRPr dirty="0">
-                        <a:latin typeface="Proxima Nova"/>
-                        <a:ea typeface="Proxima Nova"/>
-                        <a:cs typeface="Proxima Nova"/>
-                        <a:sym typeface="Proxima Nova"/>
-                      </a:endParaRPr>
-                    </a:p>
-                  </a:txBody>
-                  <a:tcPr marL="91425" marR="91425" marT="91425" marB="91425" anchor="ctr">
-                    <a:lnL w="9525" cap="flat" cmpd="sng">
-                      <a:solidFill>
-                        <a:srgbClr val="9E9E9E">
-                          <a:alpha val="0"/>
-                        </a:srgbClr>
-                      </a:solidFill>
-                      <a:prstDash val="solid"/>
-                      <a:round/>
-                      <a:headEnd type="none" w="sm" len="sm"/>
-                      <a:tailEnd type="none" w="sm" len="sm"/>
-                    </a:lnL>
-                    <a:lnR w="9525" cap="flat" cmpd="sng">
-                      <a:solidFill>
-                        <a:srgbClr val="9E9E9E">
-                          <a:alpha val="0"/>
-                        </a:srgbClr>
-                      </a:solidFill>
-                      <a:prstDash val="solid"/>
-                      <a:round/>
-                      <a:headEnd type="none" w="sm" len="sm"/>
-                      <a:tailEnd type="none" w="sm" len="sm"/>
-                    </a:lnR>
-                    <a:lnT w="9525" cap="flat" cmpd="sng">
-                      <a:solidFill>
-                        <a:srgbClr val="9E9E9E">
-                          <a:alpha val="0"/>
-                        </a:srgbClr>
-                      </a:solidFill>
-                      <a:prstDash val="solid"/>
-                      <a:round/>
-                      <a:headEnd type="none" w="sm" len="sm"/>
-                      <a:tailEnd type="none" w="sm" len="sm"/>
-                    </a:lnT>
-                    <a:lnB w="9525" cap="flat" cmpd="sng">
-                      <a:solidFill>
-                        <a:srgbClr val="9E9E9E">
-                          <a:alpha val="0"/>
-                        </a:srgbClr>
-                      </a:solidFill>
-                      <a:prstDash val="solid"/>
-                      <a:round/>
-                      <a:headEnd type="none" w="sm" len="sm"/>
-                      <a:tailEnd type="none" w="sm" len="sm"/>
-                    </a:lnB>
-                  </a:tcPr>
-                </a:tc>
-                <a:tc>
-                  <a:txBody>
-                    <a:bodyPr/>
-                    <a:lstStyle/>
-                    <a:p>
-                      <a:pPr marL="0" lvl="0" indent="0" algn="ctr" rtl="0">
-                        <a:spcBef>
-                          <a:spcPts val="0"/>
-                        </a:spcBef>
-                        <a:spcAft>
-                          <a:spcPts val="0"/>
-                        </a:spcAft>
-                        <a:buNone/>
-                      </a:pPr>
-                      <a:r>
-                        <a:rPr lang="en-GB" sz="1200" dirty="0">
-                          <a:latin typeface="Proxima Nova"/>
-                          <a:ea typeface="Proxima Nova"/>
-                          <a:cs typeface="Proxima Nova"/>
-                          <a:sym typeface="Proxima Nova"/>
-                        </a:rPr>
-                        <a:t>Cap 2 ISLR + Cap 1 TMR + Caps 4 y 5 IMS</a:t>
-                      </a:r>
-                      <a:endParaRPr sz="1200" dirty="0">
-                        <a:latin typeface="Proxima Nova"/>
-                        <a:ea typeface="Proxima Nova"/>
-                        <a:cs typeface="Proxima Nova"/>
-                        <a:sym typeface="Proxima Nova"/>
-                      </a:endParaRPr>
-                    </a:p>
-                  </a:txBody>
-                  <a:tcPr marL="91425" marR="91425" marT="91425" marB="91425" anchor="ctr">
-                    <a:lnL w="9525" cap="flat" cmpd="sng">
-                      <a:solidFill>
-                        <a:srgbClr val="9E9E9E">
-                          <a:alpha val="0"/>
-                        </a:srgbClr>
-                      </a:solidFill>
-                      <a:prstDash val="solid"/>
-                      <a:round/>
-                      <a:headEnd type="none" w="sm" len="sm"/>
-                      <a:tailEnd type="none" w="sm" len="sm"/>
-                    </a:lnL>
-                    <a:lnR w="9525" cap="flat" cmpd="sng">
-                      <a:solidFill>
-                        <a:srgbClr val="9E9E9E">
-                          <a:alpha val="0"/>
-                        </a:srgbClr>
-                      </a:solidFill>
-                      <a:prstDash val="solid"/>
-                      <a:round/>
-                      <a:headEnd type="none" w="sm" len="sm"/>
-                      <a:tailEnd type="none" w="sm" len="sm"/>
-                    </a:lnR>
-                    <a:lnT w="9525" cap="flat" cmpd="sng">
-                      <a:solidFill>
-                        <a:srgbClr val="9E9E9E">
-                          <a:alpha val="0"/>
-                        </a:srgbClr>
-                      </a:solidFill>
-                      <a:prstDash val="solid"/>
-                      <a:round/>
-                      <a:headEnd type="none" w="sm" len="sm"/>
-                      <a:tailEnd type="none" w="sm" len="sm"/>
-                    </a:lnT>
-                    <a:lnB w="9525" cap="flat" cmpd="sng">
-                      <a:solidFill>
-                        <a:srgbClr val="9E9E9E">
-                          <a:alpha val="0"/>
-                        </a:srgbClr>
-                      </a:solidFill>
-                      <a:prstDash val="solid"/>
-                      <a:round/>
-                      <a:headEnd type="none" w="sm" len="sm"/>
-                      <a:tailEnd type="none" w="sm" len="sm"/>
-                    </a:lnB>
-                  </a:tcPr>
-                </a:tc>
-                <a:extLst>
-                  <a:ext uri="{0D108BD9-81ED-4DB2-BD59-A6C34878D82A}">
-                    <a16:rowId xmlns:a16="http://schemas.microsoft.com/office/drawing/2014/main" val="10001"/>
-                  </a:ext>
-                </a:extLst>
-              </a:tr>
-              <a:tr h="505525">
+              <a:tr h="514654">
                 <a:tc>
                   <a:txBody>
                     <a:bodyPr/>
@@ -12961,7 +12729,7 @@
                           <a:cs typeface="Proxima Nova"/>
                           <a:sym typeface="Proxima Nova"/>
                         </a:rPr>
-                        <a:t>2</a:t>
+                        <a:t>1</a:t>
                       </a:r>
                       <a:endParaRPr dirty="0">
                         <a:solidFill>
@@ -13045,8 +12813,240 @@
                           <a:cs typeface="Proxima Nova"/>
                           <a:sym typeface="Proxima Nova"/>
                         </a:rPr>
-                        <a:t>20/8</a:t>
+                        <a:t>Intro, </a:t>
                       </a:r>
+                      <a:r>
+                        <a:rPr lang="en-GB" dirty="0" err="1">
+                          <a:solidFill>
+                            <a:schemeClr val="tx1"/>
+                          </a:solidFill>
+                          <a:latin typeface="Proxima Nova"/>
+                          <a:ea typeface="Proxima Nova"/>
+                          <a:cs typeface="Proxima Nova"/>
+                          <a:sym typeface="Proxima Nova"/>
+                        </a:rPr>
+                        <a:t>tipos</a:t>
+                      </a:r>
+                      <a:r>
+                        <a:rPr lang="en-GB" dirty="0">
+                          <a:solidFill>
+                            <a:schemeClr val="tx1"/>
+                          </a:solidFill>
+                          <a:latin typeface="Proxima Nova"/>
+                          <a:ea typeface="Proxima Nova"/>
+                          <a:cs typeface="Proxima Nova"/>
+                          <a:sym typeface="Proxima Nova"/>
+                        </a:rPr>
+                        <a:t> de </a:t>
+                      </a:r>
+                      <a:r>
+                        <a:rPr lang="en-GB" dirty="0" err="1">
+                          <a:solidFill>
+                            <a:schemeClr val="tx1"/>
+                          </a:solidFill>
+                          <a:latin typeface="Proxima Nova"/>
+                          <a:ea typeface="Proxima Nova"/>
+                          <a:cs typeface="Proxima Nova"/>
+                          <a:sym typeface="Proxima Nova"/>
+                        </a:rPr>
+                        <a:t>modelos</a:t>
+                      </a:r>
+                      <a:r>
+                        <a:rPr lang="en-GB" dirty="0">
+                          <a:solidFill>
+                            <a:schemeClr val="tx1"/>
+                          </a:solidFill>
+                          <a:latin typeface="Proxima Nova"/>
+                          <a:ea typeface="Proxima Nova"/>
+                          <a:cs typeface="Proxima Nova"/>
+                          <a:sym typeface="Proxima Nova"/>
+                        </a:rPr>
+                        <a:t>, trade-offs</a:t>
+                      </a:r>
+                      <a:endParaRPr dirty="0">
+                        <a:solidFill>
+                          <a:schemeClr val="tx1"/>
+                        </a:solidFill>
+                        <a:latin typeface="Proxima Nova"/>
+                        <a:ea typeface="Proxima Nova"/>
+                        <a:cs typeface="Proxima Nova"/>
+                        <a:sym typeface="Proxima Nova"/>
+                      </a:endParaRPr>
+                    </a:p>
+                  </a:txBody>
+                  <a:tcPr marL="91425" marR="91425" marT="91425" marB="91425" anchor="ctr">
+                    <a:lnL w="9525" cap="flat" cmpd="sng" algn="ctr">
+                      <a:solidFill>
+                        <a:srgbClr val="9E9E9E">
+                          <a:alpha val="0"/>
+                        </a:srgbClr>
+                      </a:solidFill>
+                      <a:prstDash val="solid"/>
+                      <a:round/>
+                      <a:headEnd type="none" w="sm" len="sm"/>
+                      <a:tailEnd type="none" w="sm" len="sm"/>
+                    </a:lnL>
+                    <a:lnR w="9525" cap="flat" cmpd="sng">
+                      <a:solidFill>
+                        <a:srgbClr val="9E9E9E">
+                          <a:alpha val="0"/>
+                        </a:srgbClr>
+                      </a:solidFill>
+                      <a:prstDash val="solid"/>
+                      <a:round/>
+                      <a:headEnd type="none" w="sm" len="sm"/>
+                      <a:tailEnd type="none" w="sm" len="sm"/>
+                    </a:lnR>
+                    <a:lnT w="9525" cap="flat" cmpd="sng" algn="ctr">
+                      <a:solidFill>
+                        <a:srgbClr val="9E9E9E">
+                          <a:alpha val="0"/>
+                        </a:srgbClr>
+                      </a:solidFill>
+                      <a:prstDash val="solid"/>
+                      <a:round/>
+                      <a:headEnd type="none" w="sm" len="sm"/>
+                      <a:tailEnd type="none" w="sm" len="sm"/>
+                    </a:lnT>
+                    <a:lnB w="9525" cap="flat" cmpd="sng" algn="ctr">
+                      <a:solidFill>
+                        <a:srgbClr val="9E9E9E">
+                          <a:alpha val="0"/>
+                        </a:srgbClr>
+                      </a:solidFill>
+                      <a:prstDash val="solid"/>
+                      <a:round/>
+                      <a:headEnd type="none" w="sm" len="sm"/>
+                      <a:tailEnd type="none" w="sm" len="sm"/>
+                    </a:lnB>
+                  </a:tcPr>
+                </a:tc>
+                <a:tc>
+                  <a:txBody>
+                    <a:bodyPr/>
+                    <a:lstStyle/>
+                    <a:p>
+                      <a:pPr marL="0" lvl="0" indent="0" algn="ctr" rtl="0">
+                        <a:spcBef>
+                          <a:spcPts val="0"/>
+                        </a:spcBef>
+                        <a:spcAft>
+                          <a:spcPts val="0"/>
+                        </a:spcAft>
+                        <a:buNone/>
+                      </a:pPr>
+                      <a:r>
+                        <a:rPr lang="en-GB" sz="1200" dirty="0">
+                          <a:solidFill>
+                            <a:schemeClr val="tx1"/>
+                          </a:solidFill>
+                          <a:latin typeface="Proxima Nova"/>
+                          <a:ea typeface="Proxima Nova"/>
+                          <a:cs typeface="Proxima Nova"/>
+                          <a:sym typeface="Proxima Nova"/>
+                        </a:rPr>
+                        <a:t>Cap 2 ISLR + Cap 1 TMR + Caps 4 y 5 IMS</a:t>
+                      </a:r>
+                      <a:endParaRPr sz="1200" dirty="0">
+                        <a:solidFill>
+                          <a:schemeClr val="tx1"/>
+                        </a:solidFill>
+                        <a:latin typeface="Proxima Nova"/>
+                        <a:ea typeface="Proxima Nova"/>
+                        <a:cs typeface="Proxima Nova"/>
+                        <a:sym typeface="Proxima Nova"/>
+                      </a:endParaRPr>
+                    </a:p>
+                  </a:txBody>
+                  <a:tcPr marL="91425" marR="91425" marT="91425" marB="91425" anchor="ctr">
+                    <a:lnL w="9525" cap="flat" cmpd="sng">
+                      <a:solidFill>
+                        <a:srgbClr val="9E9E9E">
+                          <a:alpha val="0"/>
+                        </a:srgbClr>
+                      </a:solidFill>
+                      <a:prstDash val="solid"/>
+                      <a:round/>
+                      <a:headEnd type="none" w="sm" len="sm"/>
+                      <a:tailEnd type="none" w="sm" len="sm"/>
+                    </a:lnL>
+                    <a:lnR w="9525" cap="flat" cmpd="sng">
+                      <a:solidFill>
+                        <a:srgbClr val="9E9E9E">
+                          <a:alpha val="0"/>
+                        </a:srgbClr>
+                      </a:solidFill>
+                      <a:prstDash val="solid"/>
+                      <a:round/>
+                      <a:headEnd type="none" w="sm" len="sm"/>
+                      <a:tailEnd type="none" w="sm" len="sm"/>
+                    </a:lnR>
+                    <a:lnT w="9525" cap="flat" cmpd="sng">
+                      <a:solidFill>
+                        <a:srgbClr val="9E9E9E">
+                          <a:alpha val="0"/>
+                        </a:srgbClr>
+                      </a:solidFill>
+                      <a:prstDash val="solid"/>
+                      <a:round/>
+                      <a:headEnd type="none" w="sm" len="sm"/>
+                      <a:tailEnd type="none" w="sm" len="sm"/>
+                    </a:lnT>
+                    <a:lnB w="9525" cap="flat" cmpd="sng">
+                      <a:solidFill>
+                        <a:srgbClr val="9E9E9E">
+                          <a:alpha val="0"/>
+                        </a:srgbClr>
+                      </a:solidFill>
+                      <a:prstDash val="solid"/>
+                      <a:round/>
+                      <a:headEnd type="none" w="sm" len="sm"/>
+                      <a:tailEnd type="none" w="sm" len="sm"/>
+                    </a:lnB>
+                  </a:tcPr>
+                </a:tc>
+                <a:extLst>
+                  <a:ext uri="{0D108BD9-81ED-4DB2-BD59-A6C34878D82A}">
+                    <a16:rowId xmlns:a16="http://schemas.microsoft.com/office/drawing/2014/main" val="10001"/>
+                  </a:ext>
+                </a:extLst>
+              </a:tr>
+              <a:tr h="620578">
+                <a:tc>
+                  <a:txBody>
+                    <a:bodyPr/>
+                    <a:lstStyle/>
+                    <a:p>
+                      <a:pPr marL="0" lvl="0" indent="0" algn="ctr" rtl="0">
+                        <a:spcBef>
+                          <a:spcPts val="0"/>
+                        </a:spcBef>
+                        <a:spcAft>
+                          <a:spcPts val="0"/>
+                        </a:spcAft>
+                        <a:buNone/>
+                      </a:pPr>
+                      <a:r>
+                        <a:rPr lang="en-GB" dirty="0">
+                          <a:solidFill>
+                            <a:schemeClr val="tx1"/>
+                          </a:solidFill>
+                          <a:latin typeface="Proxima Nova"/>
+                          <a:ea typeface="Proxima Nova"/>
+                          <a:cs typeface="Proxima Nova"/>
+                          <a:sym typeface="Proxima Nova"/>
+                        </a:rPr>
+                        <a:t>2</a:t>
+                      </a:r>
+                      <a:endParaRPr dirty="0">
+                        <a:solidFill>
+                          <a:schemeClr val="tx1"/>
+                        </a:solidFill>
+                        <a:latin typeface="Proxima Nova"/>
+                        <a:ea typeface="Proxima Nova"/>
+                        <a:cs typeface="Proxima Nova"/>
+                        <a:sym typeface="Proxima Nova"/>
+                      </a:endParaRPr>
                     </a:p>
                   </a:txBody>
                   <a:tcPr marL="91425" marR="91425" marT="91425" marB="91425" anchor="ctr">
@@ -13169,7 +13169,7 @@
                     </a:p>
                   </a:txBody>
                   <a:tcPr marL="91425" marR="91425" marT="91425" marB="91425" anchor="ctr">
-                    <a:lnL w="9525" cap="flat" cmpd="sng">
+                    <a:lnL w="9525" cap="flat" cmpd="sng" algn="ctr">
                       <a:solidFill>
                         <a:srgbClr val="9E9E9E">
                           <a:alpha val="0"/>
@@ -13191,7 +13191,7 @@
                       <a:headEnd type="none" w="sm" len="sm"/>
                       <a:tailEnd type="none" w="sm" len="sm"/>
                     </a:lnR>
-                    <a:lnT w="9525" cap="flat" cmpd="sng">
+                    <a:lnT w="9525" cap="flat" cmpd="sng" algn="ctr">
                       <a:solidFill>
                         <a:srgbClr val="9E9E9E">
                           <a:alpha val="0"/>
@@ -13202,7 +13202,7 @@
                       <a:headEnd type="none" w="sm" len="sm"/>
                       <a:tailEnd type="none" w="sm" len="sm"/>
                     </a:lnT>
-                    <a:lnB w="9525" cap="flat" cmpd="sng">
+                    <a:lnB w="9525" cap="flat" cmpd="sng" algn="ctr">
                       <a:solidFill>
                         <a:srgbClr val="9E9E9E">
                           <a:alpha val="0"/>
@@ -13230,18 +13230,6 @@
                         <a:buNone/>
                       </a:pPr>
                       <a:r>
-                        <a:rPr lang="es-AR" sz="1200" dirty="0" err="1">
-                          <a:solidFill>
-                            <a:schemeClr val="tx1"/>
-                          </a:solidFill>
-                          <a:latin typeface="Proxima Nova"/>
-                          <a:ea typeface="Proxima Nova"/>
-                          <a:cs typeface="Proxima Nova"/>
-                          <a:sym typeface="Proxima Nova"/>
-                        </a:rPr>
-                        <a:t>Caps</a:t>
-                      </a:r>
-                      <a:r>
                         <a:rPr lang="es-AR" sz="1200" dirty="0">
                           <a:solidFill>
                             <a:schemeClr val="tx1"/>
@@ -13251,7 +13239,7 @@
                           <a:cs typeface="Proxima Nova"/>
                           <a:sym typeface="Proxima Nova"/>
                         </a:rPr>
-                        <a:t> 3 y 13.1 </a:t>
+                        <a:t>Cap 3.1 </a:t>
                       </a:r>
                       <a:r>
                         <a:rPr lang="en-GB" sz="1200" dirty="0">
@@ -13380,7 +13368,7 @@
                   </a:ext>
                 </a:extLst>
               </a:tr>
-              <a:tr h="505525">
+              <a:tr h="514654">
                 <a:tc>
                   <a:txBody>
                     <a:bodyPr/>
@@ -13396,10 +13384,7 @@
                         <a:buNone/>
                       </a:pPr>
                       <a:r>
-                        <a:rPr lang="en-GB" dirty="0">
-                          <a:solidFill>
-                            <a:schemeClr val="tx1"/>
-                          </a:solidFill>
+                        <a:rPr lang="en-GB">
                           <a:latin typeface="Proxima Nova"/>
                           <a:ea typeface="Proxima Nova"/>
                           <a:cs typeface="Proxima Nova"/>
@@ -13407,10 +13392,594 @@
                         </a:rPr>
                         <a:t>3</a:t>
                       </a:r>
+                      <a:endParaRPr>
+                        <a:latin typeface="Proxima Nova"/>
+                        <a:ea typeface="Proxima Nova"/>
+                        <a:cs typeface="Proxima Nova"/>
+                        <a:sym typeface="Proxima Nova"/>
+                      </a:endParaRPr>
+                    </a:p>
+                  </a:txBody>
+                  <a:tcPr marL="91425" marR="91425" marT="91425" marB="91425" anchor="ctr">
+                    <a:lnL w="9525" cap="flat" cmpd="sng">
+                      <a:solidFill>
+                        <a:srgbClr val="9E9E9E">
+                          <a:alpha val="0"/>
+                        </a:srgbClr>
+                      </a:solidFill>
+                      <a:prstDash val="solid"/>
+                      <a:round/>
+                      <a:headEnd type="none" w="sm" len="sm"/>
+                      <a:tailEnd type="none" w="sm" len="sm"/>
+                    </a:lnL>
+                    <a:lnR w="9525" cap="flat" cmpd="sng">
+                      <a:solidFill>
+                        <a:srgbClr val="9E9E9E">
+                          <a:alpha val="0"/>
+                        </a:srgbClr>
+                      </a:solidFill>
+                      <a:prstDash val="solid"/>
+                      <a:round/>
+                      <a:headEnd type="none" w="sm" len="sm"/>
+                      <a:tailEnd type="none" w="sm" len="sm"/>
+                    </a:lnR>
+                    <a:lnT w="9525" cap="flat" cmpd="sng">
+                      <a:solidFill>
+                        <a:srgbClr val="9E9E9E">
+                          <a:alpha val="0"/>
+                        </a:srgbClr>
+                      </a:solidFill>
+                      <a:prstDash val="solid"/>
+                      <a:round/>
+                      <a:headEnd type="none" w="sm" len="sm"/>
+                      <a:tailEnd type="none" w="sm" len="sm"/>
+                    </a:lnT>
+                    <a:lnB w="9525" cap="flat" cmpd="sng">
+                      <a:solidFill>
+                        <a:srgbClr val="9E9E9E">
+                          <a:alpha val="0"/>
+                        </a:srgbClr>
+                      </a:solidFill>
+                      <a:prstDash val="solid"/>
+                      <a:round/>
+                      <a:headEnd type="none" w="sm" len="sm"/>
+                      <a:tailEnd type="none" w="sm" len="sm"/>
+                    </a:lnB>
+                  </a:tcPr>
+                </a:tc>
+                <a:tc>
+                  <a:txBody>
+                    <a:bodyPr/>
+                    <a:lstStyle/>
+                    <a:p>
+                      <a:pPr marL="0" lvl="0" indent="0" algn="ctr" rtl="0">
+                        <a:spcBef>
+                          <a:spcPts val="0"/>
+                        </a:spcBef>
+                        <a:spcAft>
+                          <a:spcPts val="0"/>
+                        </a:spcAft>
+                        <a:buNone/>
+                      </a:pPr>
+                      <a:r>
+                        <a:rPr lang="es-AR" dirty="0">
+                          <a:latin typeface="Proxima Nova"/>
+                          <a:ea typeface="Proxima Nova"/>
+                          <a:cs typeface="Proxima Nova"/>
+                          <a:sym typeface="Proxima Nova"/>
+                        </a:rPr>
+                        <a:t>Regresión lineal múltiple</a:t>
+                      </a:r>
                       <a:endParaRPr dirty="0">
-                        <a:solidFill>
-                          <a:schemeClr val="tx1"/>
-                        </a:solidFill>
+                        <a:latin typeface="Proxima Nova"/>
+                        <a:ea typeface="Proxima Nova"/>
+                        <a:cs typeface="Proxima Nova"/>
+                        <a:sym typeface="Proxima Nova"/>
+                      </a:endParaRPr>
+                    </a:p>
+                  </a:txBody>
+                  <a:tcPr marL="91425" marR="91425" marT="91425" marB="91425" anchor="ctr">
+                    <a:lnL w="9525" cap="flat" cmpd="sng" algn="ctr">
+                      <a:solidFill>
+                        <a:srgbClr val="9E9E9E">
+                          <a:alpha val="0"/>
+                        </a:srgbClr>
+                      </a:solidFill>
+                      <a:prstDash val="solid"/>
+                      <a:round/>
+                      <a:headEnd type="none" w="sm" len="sm"/>
+                      <a:tailEnd type="none" w="sm" len="sm"/>
+                    </a:lnL>
+                    <a:lnR w="9525" cap="flat" cmpd="sng">
+                      <a:solidFill>
+                        <a:srgbClr val="9E9E9E">
+                          <a:alpha val="0"/>
+                        </a:srgbClr>
+                      </a:solidFill>
+                      <a:prstDash val="solid"/>
+                      <a:round/>
+                      <a:headEnd type="none" w="sm" len="sm"/>
+                      <a:tailEnd type="none" w="sm" len="sm"/>
+                    </a:lnR>
+                    <a:lnT w="9525" cap="flat" cmpd="sng" algn="ctr">
+                      <a:solidFill>
+                        <a:srgbClr val="9E9E9E">
+                          <a:alpha val="0"/>
+                        </a:srgbClr>
+                      </a:solidFill>
+                      <a:prstDash val="solid"/>
+                      <a:round/>
+                      <a:headEnd type="none" w="sm" len="sm"/>
+                      <a:tailEnd type="none" w="sm" len="sm"/>
+                    </a:lnT>
+                    <a:lnB w="9525" cap="flat" cmpd="sng" algn="ctr">
+                      <a:solidFill>
+                        <a:srgbClr val="9E9E9E">
+                          <a:alpha val="0"/>
+                        </a:srgbClr>
+                      </a:solidFill>
+                      <a:prstDash val="solid"/>
+                      <a:round/>
+                      <a:headEnd type="none" w="sm" len="sm"/>
+                      <a:tailEnd type="none" w="sm" len="sm"/>
+                    </a:lnB>
+                  </a:tcPr>
+                </a:tc>
+                <a:tc>
+                  <a:txBody>
+                    <a:bodyPr/>
+                    <a:lstStyle/>
+                    <a:p>
+                      <a:pPr marL="0" lvl="0" indent="0" algn="ctr" rtl="0">
+                        <a:spcBef>
+                          <a:spcPts val="0"/>
+                        </a:spcBef>
+                        <a:spcAft>
+                          <a:spcPts val="0"/>
+                        </a:spcAft>
+                        <a:buNone/>
+                      </a:pPr>
+                      <a:r>
+                        <a:rPr lang="es-AR" sz="1200" dirty="0">
+                          <a:latin typeface="Proxima Nova"/>
+                          <a:ea typeface="Proxima Nova"/>
+                          <a:cs typeface="Proxima Nova"/>
+                          <a:sym typeface="Proxima Nova"/>
+                        </a:rPr>
+                        <a:t>Cap 3.2 a 3.6 </a:t>
+                      </a:r>
+                      <a:r>
+                        <a:rPr lang="en-GB" sz="1200" dirty="0">
+                          <a:latin typeface="Proxima Nova"/>
+                          <a:ea typeface="Proxima Nova"/>
+                          <a:cs typeface="Proxima Nova"/>
+                          <a:sym typeface="Proxima Nova"/>
+                        </a:rPr>
+                        <a:t>ISLR</a:t>
+                      </a:r>
+                      <a:r>
+                        <a:rPr lang="es-AR" sz="1200" dirty="0">
+                          <a:latin typeface="Proxima Nova"/>
+                          <a:ea typeface="Proxima Nova"/>
+                          <a:cs typeface="Proxima Nova"/>
+                          <a:sym typeface="Proxima Nova"/>
+                        </a:rPr>
+                        <a:t> + </a:t>
+                      </a:r>
+                      <a:r>
+                        <a:rPr lang="es-AR" sz="1200" dirty="0" err="1">
+                          <a:latin typeface="Proxima Nova"/>
+                          <a:ea typeface="Proxima Nova"/>
+                          <a:cs typeface="Proxima Nova"/>
+                          <a:sym typeface="Proxima Nova"/>
+                        </a:rPr>
+                        <a:t>Caps</a:t>
+                      </a:r>
+                      <a:r>
+                        <a:rPr lang="es-AR" sz="1200" dirty="0">
+                          <a:latin typeface="Proxima Nova"/>
+                          <a:ea typeface="Proxima Nova"/>
+                          <a:cs typeface="Proxima Nova"/>
+                          <a:sym typeface="Proxima Nova"/>
+                        </a:rPr>
+                        <a:t> 7 y 8 TMR + </a:t>
+                      </a:r>
+                      <a:r>
+                        <a:rPr lang="es-AR" sz="1200" dirty="0" err="1">
+                          <a:latin typeface="Proxima Nova"/>
+                          <a:ea typeface="Proxima Nova"/>
+                          <a:cs typeface="Proxima Nova"/>
+                          <a:sym typeface="Proxima Nova"/>
+                        </a:rPr>
+                        <a:t>Cap</a:t>
+                      </a:r>
+                      <a:r>
+                        <a:rPr lang="es-AR" sz="1200" dirty="0">
+                          <a:latin typeface="Proxima Nova"/>
+                          <a:ea typeface="Proxima Nova"/>
+                          <a:cs typeface="Proxima Nova"/>
+                          <a:sym typeface="Proxima Nova"/>
+                        </a:rPr>
+                        <a:t> 8 IMS</a:t>
+                      </a:r>
+                    </a:p>
+                  </a:txBody>
+                  <a:tcPr marL="91425" marR="91425" marT="91425" marB="91425" anchor="ctr">
+                    <a:lnL w="9525" cap="flat" cmpd="sng">
+                      <a:solidFill>
+                        <a:srgbClr val="9E9E9E">
+                          <a:alpha val="0"/>
+                        </a:srgbClr>
+                      </a:solidFill>
+                      <a:prstDash val="solid"/>
+                      <a:round/>
+                      <a:headEnd type="none" w="sm" len="sm"/>
+                      <a:tailEnd type="none" w="sm" len="sm"/>
+                    </a:lnL>
+                    <a:lnR w="9525" cap="flat" cmpd="sng">
+                      <a:solidFill>
+                        <a:srgbClr val="9E9E9E">
+                          <a:alpha val="0"/>
+                        </a:srgbClr>
+                      </a:solidFill>
+                      <a:prstDash val="solid"/>
+                      <a:round/>
+                      <a:headEnd type="none" w="sm" len="sm"/>
+                      <a:tailEnd type="none" w="sm" len="sm"/>
+                    </a:lnR>
+                    <a:lnT w="9525" cap="flat" cmpd="sng">
+                      <a:solidFill>
+                        <a:srgbClr val="9E9E9E">
+                          <a:alpha val="0"/>
+                        </a:srgbClr>
+                      </a:solidFill>
+                      <a:prstDash val="solid"/>
+                      <a:round/>
+                      <a:headEnd type="none" w="sm" len="sm"/>
+                      <a:tailEnd type="none" w="sm" len="sm"/>
+                    </a:lnT>
+                    <a:lnB w="9525" cap="flat" cmpd="sng">
+                      <a:solidFill>
+                        <a:srgbClr val="9E9E9E">
+                          <a:alpha val="0"/>
+                        </a:srgbClr>
+                      </a:solidFill>
+                      <a:prstDash val="solid"/>
+                      <a:round/>
+                      <a:headEnd type="none" w="sm" len="sm"/>
+                      <a:tailEnd type="none" w="sm" len="sm"/>
+                    </a:lnB>
+                  </a:tcPr>
+                </a:tc>
+                <a:extLst>
+                  <a:ext uri="{0D108BD9-81ED-4DB2-BD59-A6C34878D82A}">
+                    <a16:rowId xmlns:a16="http://schemas.microsoft.com/office/drawing/2014/main" val="10003"/>
+                  </a:ext>
+                </a:extLst>
+              </a:tr>
+              <a:tr h="514654">
+                <a:tc>
+                  <a:txBody>
+                    <a:bodyPr/>
+                    <a:lstStyle/>
+                    <a:p>
+                      <a:pPr marL="0" lvl="0" indent="0" algn="ctr" rtl="0">
+                        <a:spcBef>
+                          <a:spcPts val="0"/>
+                        </a:spcBef>
+                        <a:spcAft>
+                          <a:spcPts val="0"/>
+                        </a:spcAft>
+                        <a:buNone/>
+                      </a:pPr>
+                      <a:r>
+                        <a:rPr lang="en-GB">
+                          <a:latin typeface="Proxima Nova"/>
+                          <a:ea typeface="Proxima Nova"/>
+                          <a:cs typeface="Proxima Nova"/>
+                          <a:sym typeface="Proxima Nova"/>
+                        </a:rPr>
+                        <a:t>4</a:t>
+                      </a:r>
+                      <a:endParaRPr>
+                        <a:latin typeface="Proxima Nova"/>
+                        <a:ea typeface="Proxima Nova"/>
+                        <a:cs typeface="Proxima Nova"/>
+                        <a:sym typeface="Proxima Nova"/>
+                      </a:endParaRPr>
+                    </a:p>
+                  </a:txBody>
+                  <a:tcPr marL="91425" marR="91425" marT="91425" marB="91425" anchor="ctr">
+                    <a:lnL w="9525" cap="flat" cmpd="sng">
+                      <a:solidFill>
+                        <a:srgbClr val="9E9E9E">
+                          <a:alpha val="0"/>
+                        </a:srgbClr>
+                      </a:solidFill>
+                      <a:prstDash val="solid"/>
+                      <a:round/>
+                      <a:headEnd type="none" w="sm" len="sm"/>
+                      <a:tailEnd type="none" w="sm" len="sm"/>
+                    </a:lnL>
+                    <a:lnR w="9525" cap="flat" cmpd="sng">
+                      <a:solidFill>
+                        <a:srgbClr val="9E9E9E">
+                          <a:alpha val="0"/>
+                        </a:srgbClr>
+                      </a:solidFill>
+                      <a:prstDash val="solid"/>
+                      <a:round/>
+                      <a:headEnd type="none" w="sm" len="sm"/>
+                      <a:tailEnd type="none" w="sm" len="sm"/>
+                    </a:lnR>
+                    <a:lnT w="9525" cap="flat" cmpd="sng">
+                      <a:solidFill>
+                        <a:srgbClr val="9E9E9E">
+                          <a:alpha val="0"/>
+                        </a:srgbClr>
+                      </a:solidFill>
+                      <a:prstDash val="solid"/>
+                      <a:round/>
+                      <a:headEnd type="none" w="sm" len="sm"/>
+                      <a:tailEnd type="none" w="sm" len="sm"/>
+                    </a:lnT>
+                    <a:lnB w="9525" cap="flat" cmpd="sng">
+                      <a:solidFill>
+                        <a:srgbClr val="9E9E9E">
+                          <a:alpha val="0"/>
+                        </a:srgbClr>
+                      </a:solidFill>
+                      <a:prstDash val="solid"/>
+                      <a:round/>
+                      <a:headEnd type="none" w="sm" len="sm"/>
+                      <a:tailEnd type="none" w="sm" len="sm"/>
+                    </a:lnB>
+                  </a:tcPr>
+                </a:tc>
+                <a:tc>
+                  <a:txBody>
+                    <a:bodyPr/>
+                    <a:lstStyle/>
+                    <a:p>
+                      <a:pPr marL="0" lvl="0" indent="0" algn="ctr" rtl="0">
+                        <a:spcBef>
+                          <a:spcPts val="0"/>
+                        </a:spcBef>
+                        <a:spcAft>
+                          <a:spcPts val="0"/>
+                        </a:spcAft>
+                        <a:buNone/>
+                      </a:pPr>
+                      <a:r>
+                        <a:rPr lang="en-GB" dirty="0" err="1">
+                          <a:latin typeface="Proxima Nova"/>
+                          <a:ea typeface="Proxima Nova"/>
+                          <a:cs typeface="Proxima Nova"/>
+                          <a:sym typeface="Proxima Nova"/>
+                        </a:rPr>
+                        <a:t>Regresión</a:t>
+                      </a:r>
+                      <a:r>
+                        <a:rPr lang="en-GB" dirty="0">
+                          <a:latin typeface="Proxima Nova"/>
+                          <a:ea typeface="Proxima Nova"/>
+                          <a:cs typeface="Proxima Nova"/>
+                          <a:sym typeface="Proxima Nova"/>
+                        </a:rPr>
+                        <a:t> </a:t>
+                      </a:r>
+                      <a:r>
+                        <a:rPr lang="en-GB" dirty="0" err="1">
+                          <a:latin typeface="Proxima Nova"/>
+                          <a:ea typeface="Proxima Nova"/>
+                          <a:cs typeface="Proxima Nova"/>
+                          <a:sym typeface="Proxima Nova"/>
+                        </a:rPr>
+                        <a:t>logística</a:t>
+                      </a:r>
+                      <a:endParaRPr dirty="0">
+                        <a:latin typeface="Proxima Nova"/>
+                        <a:ea typeface="Proxima Nova"/>
+                        <a:cs typeface="Proxima Nova"/>
+                        <a:sym typeface="Proxima Nova"/>
+                      </a:endParaRPr>
+                    </a:p>
+                  </a:txBody>
+                  <a:tcPr marL="91425" marR="91425" marT="91425" marB="91425" anchor="ctr">
+                    <a:lnL w="9525" cap="flat" cmpd="sng" algn="ctr">
+                      <a:solidFill>
+                        <a:srgbClr val="9E9E9E">
+                          <a:alpha val="0"/>
+                        </a:srgbClr>
+                      </a:solidFill>
+                      <a:prstDash val="solid"/>
+                      <a:round/>
+                      <a:headEnd type="none" w="sm" len="sm"/>
+                      <a:tailEnd type="none" w="sm" len="sm"/>
+                    </a:lnL>
+                    <a:lnR w="9525" cap="flat" cmpd="sng">
+                      <a:solidFill>
+                        <a:srgbClr val="9E9E9E">
+                          <a:alpha val="0"/>
+                        </a:srgbClr>
+                      </a:solidFill>
+                      <a:prstDash val="solid"/>
+                      <a:round/>
+                      <a:headEnd type="none" w="sm" len="sm"/>
+                      <a:tailEnd type="none" w="sm" len="sm"/>
+                    </a:lnR>
+                    <a:lnT w="9525" cap="flat" cmpd="sng" algn="ctr">
+                      <a:solidFill>
+                        <a:srgbClr val="9E9E9E">
+                          <a:alpha val="0"/>
+                        </a:srgbClr>
+                      </a:solidFill>
+                      <a:prstDash val="solid"/>
+                      <a:round/>
+                      <a:headEnd type="none" w="sm" len="sm"/>
+                      <a:tailEnd type="none" w="sm" len="sm"/>
+                    </a:lnT>
+                    <a:lnB w="9525" cap="flat" cmpd="sng" algn="ctr">
+                      <a:solidFill>
+                        <a:srgbClr val="9E9E9E">
+                          <a:alpha val="0"/>
+                        </a:srgbClr>
+                      </a:solidFill>
+                      <a:prstDash val="solid"/>
+                      <a:round/>
+                      <a:headEnd type="none" w="sm" len="sm"/>
+                      <a:tailEnd type="none" w="sm" len="sm"/>
+                    </a:lnB>
+                  </a:tcPr>
+                </a:tc>
+                <a:tc>
+                  <a:txBody>
+                    <a:bodyPr/>
+                    <a:lstStyle/>
+                    <a:p>
+                      <a:pPr marL="0" lvl="0" indent="0" algn="ctr" rtl="0">
+                        <a:spcBef>
+                          <a:spcPts val="0"/>
+                        </a:spcBef>
+                        <a:spcAft>
+                          <a:spcPts val="0"/>
+                        </a:spcAft>
+                        <a:buNone/>
+                      </a:pPr>
+                      <a:r>
+                        <a:rPr lang="es-AR" sz="1200" dirty="0" err="1">
+                          <a:latin typeface="Proxima Nova"/>
+                          <a:ea typeface="Proxima Nova"/>
+                          <a:cs typeface="Proxima Nova"/>
+                          <a:sym typeface="Proxima Nova"/>
+                        </a:rPr>
+                        <a:t>Cap</a:t>
+                      </a:r>
+                      <a:r>
+                        <a:rPr lang="es-AR" sz="1200" dirty="0">
+                          <a:latin typeface="Proxima Nova"/>
+                          <a:ea typeface="Proxima Nova"/>
+                          <a:cs typeface="Proxima Nova"/>
+                          <a:sym typeface="Proxima Nova"/>
+                        </a:rPr>
+                        <a:t> 4.1 a 4.3 </a:t>
+                      </a:r>
+                      <a:r>
+                        <a:rPr lang="en-GB" sz="1200" dirty="0">
+                          <a:latin typeface="Proxima Nova"/>
+                          <a:ea typeface="Proxima Nova"/>
+                          <a:cs typeface="Proxima Nova"/>
+                          <a:sym typeface="Proxima Nova"/>
+                        </a:rPr>
+                        <a:t>ISLR</a:t>
+                      </a:r>
+                      <a:r>
+                        <a:rPr lang="es-AR" sz="1200" dirty="0">
+                          <a:latin typeface="Proxima Nova"/>
+                          <a:ea typeface="Proxima Nova"/>
+                          <a:cs typeface="Proxima Nova"/>
+                          <a:sym typeface="Proxima Nova"/>
+                        </a:rPr>
+                        <a:t> + </a:t>
+                      </a:r>
+                      <a:r>
+                        <a:rPr lang="es-AR" sz="1200" dirty="0" err="1">
+                          <a:latin typeface="Proxima Nova"/>
+                          <a:ea typeface="Proxima Nova"/>
+                          <a:cs typeface="Proxima Nova"/>
+                          <a:sym typeface="Proxima Nova"/>
+                        </a:rPr>
+                        <a:t>Cap</a:t>
+                      </a:r>
+                      <a:r>
+                        <a:rPr lang="es-AR" sz="1200" dirty="0">
+                          <a:latin typeface="Proxima Nova"/>
+                          <a:ea typeface="Proxima Nova"/>
+                          <a:cs typeface="Proxima Nova"/>
+                          <a:sym typeface="Proxima Nova"/>
+                        </a:rPr>
+                        <a:t> 9 IMS</a:t>
+                      </a:r>
+                    </a:p>
+                  </a:txBody>
+                  <a:tcPr marL="91425" marR="91425" marT="91425" marB="91425" anchor="ctr">
+                    <a:lnL w="9525" cap="flat" cmpd="sng">
+                      <a:solidFill>
+                        <a:srgbClr val="9E9E9E">
+                          <a:alpha val="0"/>
+                        </a:srgbClr>
+                      </a:solidFill>
+                      <a:prstDash val="solid"/>
+                      <a:round/>
+                      <a:headEnd type="none" w="sm" len="sm"/>
+                      <a:tailEnd type="none" w="sm" len="sm"/>
+                    </a:lnL>
+                    <a:lnR w="9525" cap="flat" cmpd="sng">
+                      <a:solidFill>
+                        <a:srgbClr val="9E9E9E">
+                          <a:alpha val="0"/>
+                        </a:srgbClr>
+                      </a:solidFill>
+                      <a:prstDash val="solid"/>
+                      <a:round/>
+                      <a:headEnd type="none" w="sm" len="sm"/>
+                      <a:tailEnd type="none" w="sm" len="sm"/>
+                    </a:lnR>
+                    <a:lnT w="9525" cap="flat" cmpd="sng">
+                      <a:solidFill>
+                        <a:srgbClr val="9E9E9E">
+                          <a:alpha val="0"/>
+                        </a:srgbClr>
+                      </a:solidFill>
+                      <a:prstDash val="solid"/>
+                      <a:round/>
+                      <a:headEnd type="none" w="sm" len="sm"/>
+                      <a:tailEnd type="none" w="sm" len="sm"/>
+                    </a:lnT>
+                    <a:lnB w="9525" cap="flat" cmpd="sng">
+                      <a:solidFill>
+                        <a:srgbClr val="9E9E9E">
+                          <a:alpha val="0"/>
+                        </a:srgbClr>
+                      </a:solidFill>
+                      <a:prstDash val="solid"/>
+                      <a:round/>
+                      <a:headEnd type="none" w="sm" len="sm"/>
+                      <a:tailEnd type="none" w="sm" len="sm"/>
+                    </a:lnB>
+                  </a:tcPr>
+                </a:tc>
+                <a:extLst>
+                  <a:ext uri="{0D108BD9-81ED-4DB2-BD59-A6C34878D82A}">
+                    <a16:rowId xmlns:a16="http://schemas.microsoft.com/office/drawing/2014/main" val="10004"/>
+                  </a:ext>
+                </a:extLst>
+              </a:tr>
+              <a:tr h="514654">
+                <a:tc>
+                  <a:txBody>
+                    <a:bodyPr/>
+                    <a:lstStyle/>
+                    <a:p>
+                      <a:pPr marL="0" lvl="0" indent="0" algn="ctr" rtl="0">
+                        <a:spcBef>
+                          <a:spcPts val="0"/>
+                        </a:spcBef>
+                        <a:spcAft>
+                          <a:spcPts val="0"/>
+                        </a:spcAft>
+                        <a:buNone/>
+                      </a:pPr>
+                      <a:r>
+                        <a:rPr lang="en-GB">
+                          <a:latin typeface="Proxima Nova"/>
+                          <a:ea typeface="Proxima Nova"/>
+                          <a:cs typeface="Proxima Nova"/>
+                          <a:sym typeface="Proxima Nova"/>
+                        </a:rPr>
+                        <a:t>5</a:t>
+                      </a:r>
+                      <a:endParaRPr>
                         <a:latin typeface="Proxima Nova"/>
                         <a:ea typeface="Proxima Nova"/>
                         <a:cs typeface="Proxima Nova"/>
@@ -13481,20 +14050,23 @@
                       </a:pPr>
                       <a:r>
                         <a:rPr lang="en-GB" dirty="0">
-                          <a:solidFill>
-                            <a:schemeClr val="tx1"/>
-                          </a:solidFill>
                           <a:latin typeface="Proxima Nova"/>
                           <a:ea typeface="Proxima Nova"/>
                           <a:cs typeface="Proxima Nova"/>
                           <a:sym typeface="Proxima Nova"/>
                         </a:rPr>
-                        <a:t>27/8</a:t>
+                        <a:t>LASSO</a:t>
                       </a:r>
+                      <a:endParaRPr dirty="0">
+                        <a:latin typeface="Proxima Nova"/>
+                        <a:ea typeface="Proxima Nova"/>
+                        <a:cs typeface="Proxima Nova"/>
+                        <a:sym typeface="Proxima Nova"/>
+                      </a:endParaRPr>
                     </a:p>
                   </a:txBody>
                   <a:tcPr marL="91425" marR="91425" marT="91425" marB="91425" anchor="ctr">
-                    <a:lnL w="9525" cap="flat" cmpd="sng">
+                    <a:lnL w="9525" cap="flat" cmpd="sng" algn="ctr">
                       <a:solidFill>
                         <a:srgbClr val="9E9E9E">
                           <a:alpha val="0"/>
@@ -13516,7 +14088,7 @@
                       <a:headEnd type="none" w="sm" len="sm"/>
                       <a:tailEnd type="none" w="sm" len="sm"/>
                     </a:lnR>
-                    <a:lnT w="9525" cap="flat" cmpd="sng">
+                    <a:lnT w="9525" cap="flat" cmpd="sng" algn="ctr">
                       <a:solidFill>
                         <a:srgbClr val="9E9E9E">
                           <a:alpha val="0"/>
@@ -13527,7 +14099,7 @@
                       <a:headEnd type="none" w="sm" len="sm"/>
                       <a:tailEnd type="none" w="sm" len="sm"/>
                     </a:lnT>
-                    <a:lnB w="9525" cap="flat" cmpd="sng">
+                    <a:lnB w="9525" cap="flat" cmpd="sng" algn="ctr">
                       <a:solidFill>
                         <a:srgbClr val="9E9E9E">
                           <a:alpha val="0"/>
@@ -13555,1044 +14127,16 @@
                         <a:buNone/>
                       </a:pPr>
                       <a:r>
-                        <a:rPr lang="es-AR" dirty="0">
-                          <a:solidFill>
-                            <a:schemeClr val="tx1"/>
-                          </a:solidFill>
+                        <a:rPr lang="es-AR" sz="1200" dirty="0">
                           <a:latin typeface="Proxima Nova"/>
                           <a:ea typeface="Proxima Nova"/>
                           <a:cs typeface="Proxima Nova"/>
                           <a:sym typeface="Proxima Nova"/>
                         </a:rPr>
-                        <a:t>Regresión lineal múltiple</a:t>
-                      </a:r>
-                      <a:endParaRPr dirty="0">
-                        <a:solidFill>
-                          <a:schemeClr val="tx1"/>
-                        </a:solidFill>
-                        <a:latin typeface="Proxima Nova"/>
-                        <a:ea typeface="Proxima Nova"/>
-                        <a:cs typeface="Proxima Nova"/>
-                        <a:sym typeface="Proxima Nova"/>
-                      </a:endParaRPr>
-                    </a:p>
-                  </a:txBody>
-                  <a:tcPr marL="91425" marR="91425" marT="91425" marB="91425" anchor="ctr">
-                    <a:lnL w="9525" cap="flat" cmpd="sng">
-                      <a:solidFill>
-                        <a:srgbClr val="9E9E9E">
-                          <a:alpha val="0"/>
-                        </a:srgbClr>
-                      </a:solidFill>
-                      <a:prstDash val="solid"/>
-                      <a:round/>
-                      <a:headEnd type="none" w="sm" len="sm"/>
-                      <a:tailEnd type="none" w="sm" len="sm"/>
-                    </a:lnL>
-                    <a:lnR w="9525" cap="flat" cmpd="sng">
-                      <a:solidFill>
-                        <a:srgbClr val="9E9E9E">
-                          <a:alpha val="0"/>
-                        </a:srgbClr>
-                      </a:solidFill>
-                      <a:prstDash val="solid"/>
-                      <a:round/>
-                      <a:headEnd type="none" w="sm" len="sm"/>
-                      <a:tailEnd type="none" w="sm" len="sm"/>
-                    </a:lnR>
-                    <a:lnT w="9525" cap="flat" cmpd="sng">
-                      <a:solidFill>
-                        <a:srgbClr val="9E9E9E">
-                          <a:alpha val="0"/>
-                        </a:srgbClr>
-                      </a:solidFill>
-                      <a:prstDash val="solid"/>
-                      <a:round/>
-                      <a:headEnd type="none" w="sm" len="sm"/>
-                      <a:tailEnd type="none" w="sm" len="sm"/>
-                    </a:lnT>
-                    <a:lnB w="9525" cap="flat" cmpd="sng">
-                      <a:solidFill>
-                        <a:srgbClr val="9E9E9E">
-                          <a:alpha val="0"/>
-                        </a:srgbClr>
-                      </a:solidFill>
-                      <a:prstDash val="solid"/>
-                      <a:round/>
-                      <a:headEnd type="none" w="sm" len="sm"/>
-                      <a:tailEnd type="none" w="sm" len="sm"/>
-                    </a:lnB>
-                  </a:tcPr>
-                </a:tc>
-                <a:tc>
-                  <a:txBody>
-                    <a:bodyPr/>
-                    <a:lstStyle/>
-                    <a:p>
-                      <a:pPr marL="0" lvl="0" indent="0" algn="ctr" rtl="0">
-                        <a:spcBef>
-                          <a:spcPts val="0"/>
-                        </a:spcBef>
-                        <a:spcAft>
-                          <a:spcPts val="0"/>
-                        </a:spcAft>
-                        <a:buNone/>
-                      </a:pPr>
-                      <a:r>
-                        <a:rPr lang="es-AR" sz="1200" dirty="0" err="1">
-                          <a:solidFill>
-                            <a:schemeClr val="tx1"/>
-                          </a:solidFill>
-                          <a:latin typeface="Proxima Nova"/>
-                          <a:ea typeface="Proxima Nova"/>
-                          <a:cs typeface="Proxima Nova"/>
-                          <a:sym typeface="Proxima Nova"/>
-                        </a:rPr>
-                        <a:t>Cap</a:t>
-                      </a:r>
-                      <a:r>
-                        <a:rPr lang="es-AR" sz="1200" dirty="0">
-                          <a:solidFill>
-                            <a:schemeClr val="tx1"/>
-                          </a:solidFill>
-                          <a:latin typeface="Proxima Nova"/>
-                          <a:ea typeface="Proxima Nova"/>
-                          <a:cs typeface="Proxima Nova"/>
-                          <a:sym typeface="Proxima Nova"/>
-                        </a:rPr>
-                        <a:t> 3 </a:t>
+                        <a:t>Cap 6.1 a 6.2 </a:t>
                       </a:r>
                       <a:r>
                         <a:rPr lang="en-GB" sz="1200" dirty="0">
-                          <a:solidFill>
-                            <a:schemeClr val="tx1"/>
-                          </a:solidFill>
-                          <a:latin typeface="Proxima Nova"/>
-                          <a:ea typeface="Proxima Nova"/>
-                          <a:cs typeface="Proxima Nova"/>
-                          <a:sym typeface="Proxima Nova"/>
-                        </a:rPr>
-                        <a:t>ISLR</a:t>
-                      </a:r>
-                      <a:r>
-                        <a:rPr lang="es-AR" sz="1200" dirty="0">
-                          <a:solidFill>
-                            <a:schemeClr val="tx1"/>
-                          </a:solidFill>
-                          <a:latin typeface="Proxima Nova"/>
-                          <a:ea typeface="Proxima Nova"/>
-                          <a:cs typeface="Proxima Nova"/>
-                          <a:sym typeface="Proxima Nova"/>
-                        </a:rPr>
-                        <a:t> + </a:t>
-                      </a:r>
-                      <a:r>
-                        <a:rPr lang="es-AR" sz="1200" dirty="0" err="1">
-                          <a:solidFill>
-                            <a:schemeClr val="tx1"/>
-                          </a:solidFill>
-                          <a:latin typeface="Proxima Nova"/>
-                          <a:ea typeface="Proxima Nova"/>
-                          <a:cs typeface="Proxima Nova"/>
-                          <a:sym typeface="Proxima Nova"/>
-                        </a:rPr>
-                        <a:t>Caps</a:t>
-                      </a:r>
-                      <a:r>
-                        <a:rPr lang="es-AR" sz="1200" dirty="0">
-                          <a:solidFill>
-                            <a:schemeClr val="tx1"/>
-                          </a:solidFill>
-                          <a:latin typeface="Proxima Nova"/>
-                          <a:ea typeface="Proxima Nova"/>
-                          <a:cs typeface="Proxima Nova"/>
-                          <a:sym typeface="Proxima Nova"/>
-                        </a:rPr>
-                        <a:t> 7 y 8 TMR + </a:t>
-                      </a:r>
-                      <a:r>
-                        <a:rPr lang="es-AR" sz="1200" dirty="0" err="1">
-                          <a:solidFill>
-                            <a:schemeClr val="tx1"/>
-                          </a:solidFill>
-                          <a:latin typeface="Proxima Nova"/>
-                          <a:ea typeface="Proxima Nova"/>
-                          <a:cs typeface="Proxima Nova"/>
-                          <a:sym typeface="Proxima Nova"/>
-                        </a:rPr>
-                        <a:t>Cap</a:t>
-                      </a:r>
-                      <a:r>
-                        <a:rPr lang="es-AR" sz="1200" dirty="0">
-                          <a:solidFill>
-                            <a:schemeClr val="tx1"/>
-                          </a:solidFill>
-                          <a:latin typeface="Proxima Nova"/>
-                          <a:ea typeface="Proxima Nova"/>
-                          <a:cs typeface="Proxima Nova"/>
-                          <a:sym typeface="Proxima Nova"/>
-                        </a:rPr>
-                        <a:t> 8 IMS</a:t>
-                      </a:r>
-                    </a:p>
-                  </a:txBody>
-                  <a:tcPr marL="91425" marR="91425" marT="91425" marB="91425" anchor="ctr">
-                    <a:lnL w="9525" cap="flat" cmpd="sng">
-                      <a:solidFill>
-                        <a:srgbClr val="9E9E9E">
-                          <a:alpha val="0"/>
-                        </a:srgbClr>
-                      </a:solidFill>
-                      <a:prstDash val="solid"/>
-                      <a:round/>
-                      <a:headEnd type="none" w="sm" len="sm"/>
-                      <a:tailEnd type="none" w="sm" len="sm"/>
-                    </a:lnL>
-                    <a:lnR w="9525" cap="flat" cmpd="sng">
-                      <a:solidFill>
-                        <a:srgbClr val="9E9E9E">
-                          <a:alpha val="0"/>
-                        </a:srgbClr>
-                      </a:solidFill>
-                      <a:prstDash val="solid"/>
-                      <a:round/>
-                      <a:headEnd type="none" w="sm" len="sm"/>
-                      <a:tailEnd type="none" w="sm" len="sm"/>
-                    </a:lnR>
-                    <a:lnT w="9525" cap="flat" cmpd="sng">
-                      <a:solidFill>
-                        <a:srgbClr val="9E9E9E">
-                          <a:alpha val="0"/>
-                        </a:srgbClr>
-                      </a:solidFill>
-                      <a:prstDash val="solid"/>
-                      <a:round/>
-                      <a:headEnd type="none" w="sm" len="sm"/>
-                      <a:tailEnd type="none" w="sm" len="sm"/>
-                    </a:lnT>
-                    <a:lnB w="9525" cap="flat" cmpd="sng">
-                      <a:solidFill>
-                        <a:srgbClr val="9E9E9E">
-                          <a:alpha val="0"/>
-                        </a:srgbClr>
-                      </a:solidFill>
-                      <a:prstDash val="solid"/>
-                      <a:round/>
-                      <a:headEnd type="none" w="sm" len="sm"/>
-                      <a:tailEnd type="none" w="sm" len="sm"/>
-                    </a:lnB>
-                  </a:tcPr>
-                </a:tc>
-                <a:extLst>
-                  <a:ext uri="{0D108BD9-81ED-4DB2-BD59-A6C34878D82A}">
-                    <a16:rowId xmlns:a16="http://schemas.microsoft.com/office/drawing/2014/main" val="10003"/>
-                  </a:ext>
-                </a:extLst>
-              </a:tr>
-              <a:tr h="505525">
-                <a:tc>
-                  <a:txBody>
-                    <a:bodyPr/>
-                    <a:lstStyle/>
-                    <a:p>
-                      <a:pPr marL="0" lvl="0" indent="0" algn="ctr" rtl="0">
-                        <a:spcBef>
-                          <a:spcPts val="0"/>
-                        </a:spcBef>
-                        <a:spcAft>
-                          <a:spcPts val="0"/>
-                        </a:spcAft>
-                        <a:buNone/>
-                      </a:pPr>
-                      <a:r>
-                        <a:rPr lang="en-GB" dirty="0">
-                          <a:solidFill>
-                            <a:schemeClr val="accent1"/>
-                          </a:solidFill>
-                          <a:latin typeface="Proxima Nova"/>
-                          <a:ea typeface="Proxima Nova"/>
-                          <a:cs typeface="Proxima Nova"/>
-                          <a:sym typeface="Proxima Nova"/>
-                        </a:rPr>
-                        <a:t>4</a:t>
-                      </a:r>
-                      <a:endParaRPr dirty="0">
-                        <a:solidFill>
-                          <a:schemeClr val="accent1"/>
-                        </a:solidFill>
-                        <a:latin typeface="Proxima Nova"/>
-                        <a:ea typeface="Proxima Nova"/>
-                        <a:cs typeface="Proxima Nova"/>
-                        <a:sym typeface="Proxima Nova"/>
-                      </a:endParaRPr>
-                    </a:p>
-                  </a:txBody>
-                  <a:tcPr marL="91425" marR="91425" marT="91425" marB="91425" anchor="ctr">
-                    <a:lnL w="9525" cap="flat" cmpd="sng">
-                      <a:solidFill>
-                        <a:srgbClr val="9E9E9E">
-                          <a:alpha val="0"/>
-                        </a:srgbClr>
-                      </a:solidFill>
-                      <a:prstDash val="solid"/>
-                      <a:round/>
-                      <a:headEnd type="none" w="sm" len="sm"/>
-                      <a:tailEnd type="none" w="sm" len="sm"/>
-                    </a:lnL>
-                    <a:lnR w="9525" cap="flat" cmpd="sng">
-                      <a:solidFill>
-                        <a:srgbClr val="9E9E9E">
-                          <a:alpha val="0"/>
-                        </a:srgbClr>
-                      </a:solidFill>
-                      <a:prstDash val="solid"/>
-                      <a:round/>
-                      <a:headEnd type="none" w="sm" len="sm"/>
-                      <a:tailEnd type="none" w="sm" len="sm"/>
-                    </a:lnR>
-                    <a:lnT w="9525" cap="flat" cmpd="sng">
-                      <a:solidFill>
-                        <a:srgbClr val="9E9E9E">
-                          <a:alpha val="0"/>
-                        </a:srgbClr>
-                      </a:solidFill>
-                      <a:prstDash val="solid"/>
-                      <a:round/>
-                      <a:headEnd type="none" w="sm" len="sm"/>
-                      <a:tailEnd type="none" w="sm" len="sm"/>
-                    </a:lnT>
-                    <a:lnB w="9525" cap="flat" cmpd="sng">
-                      <a:solidFill>
-                        <a:srgbClr val="9E9E9E">
-                          <a:alpha val="0"/>
-                        </a:srgbClr>
-                      </a:solidFill>
-                      <a:prstDash val="solid"/>
-                      <a:round/>
-                      <a:headEnd type="none" w="sm" len="sm"/>
-                      <a:tailEnd type="none" w="sm" len="sm"/>
-                    </a:lnB>
-                  </a:tcPr>
-                </a:tc>
-                <a:tc>
-                  <a:txBody>
-                    <a:bodyPr/>
-                    <a:lstStyle/>
-                    <a:p>
-                      <a:pPr marL="0" lvl="0" indent="0" algn="ctr" rtl="0">
-                        <a:spcBef>
-                          <a:spcPts val="0"/>
-                        </a:spcBef>
-                        <a:spcAft>
-                          <a:spcPts val="0"/>
-                        </a:spcAft>
-                        <a:buNone/>
-                      </a:pPr>
-                      <a:r>
-                        <a:rPr lang="en-GB" dirty="0">
-                          <a:solidFill>
-                            <a:schemeClr val="accent1"/>
-                          </a:solidFill>
-                          <a:latin typeface="Proxima Nova"/>
-                          <a:ea typeface="Proxima Nova"/>
-                          <a:cs typeface="Proxima Nova"/>
-                          <a:sym typeface="Proxima Nova"/>
-                        </a:rPr>
-                        <a:t>3/9</a:t>
-                      </a:r>
-                    </a:p>
-                  </a:txBody>
-                  <a:tcPr marL="91425" marR="91425" marT="91425" marB="91425" anchor="ctr">
-                    <a:lnL w="9525" cap="flat" cmpd="sng">
-                      <a:solidFill>
-                        <a:srgbClr val="9E9E9E">
-                          <a:alpha val="0"/>
-                        </a:srgbClr>
-                      </a:solidFill>
-                      <a:prstDash val="solid"/>
-                      <a:round/>
-                      <a:headEnd type="none" w="sm" len="sm"/>
-                      <a:tailEnd type="none" w="sm" len="sm"/>
-                    </a:lnL>
-                    <a:lnR w="9525" cap="flat" cmpd="sng">
-                      <a:solidFill>
-                        <a:srgbClr val="9E9E9E">
-                          <a:alpha val="0"/>
-                        </a:srgbClr>
-                      </a:solidFill>
-                      <a:prstDash val="solid"/>
-                      <a:round/>
-                      <a:headEnd type="none" w="sm" len="sm"/>
-                      <a:tailEnd type="none" w="sm" len="sm"/>
-                    </a:lnR>
-                    <a:lnT w="9525" cap="flat" cmpd="sng">
-                      <a:solidFill>
-                        <a:srgbClr val="9E9E9E">
-                          <a:alpha val="0"/>
-                        </a:srgbClr>
-                      </a:solidFill>
-                      <a:prstDash val="solid"/>
-                      <a:round/>
-                      <a:headEnd type="none" w="sm" len="sm"/>
-                      <a:tailEnd type="none" w="sm" len="sm"/>
-                    </a:lnT>
-                    <a:lnB w="9525" cap="flat" cmpd="sng">
-                      <a:solidFill>
-                        <a:srgbClr val="9E9E9E">
-                          <a:alpha val="0"/>
-                        </a:srgbClr>
-                      </a:solidFill>
-                      <a:prstDash val="solid"/>
-                      <a:round/>
-                      <a:headEnd type="none" w="sm" len="sm"/>
-                      <a:tailEnd type="none" w="sm" len="sm"/>
-                    </a:lnB>
-                  </a:tcPr>
-                </a:tc>
-                <a:tc>
-                  <a:txBody>
-                    <a:bodyPr/>
-                    <a:lstStyle/>
-                    <a:p>
-                      <a:pPr marL="0" lvl="0" indent="0" algn="ctr" rtl="0">
-                        <a:spcBef>
-                          <a:spcPts val="0"/>
-                        </a:spcBef>
-                        <a:spcAft>
-                          <a:spcPts val="0"/>
-                        </a:spcAft>
-                        <a:buNone/>
-                      </a:pPr>
-                      <a:r>
-                        <a:rPr lang="en-GB" dirty="0" err="1">
-                          <a:solidFill>
-                            <a:schemeClr val="accent1"/>
-                          </a:solidFill>
-                          <a:latin typeface="Proxima Nova"/>
-                          <a:ea typeface="Proxima Nova"/>
-                          <a:cs typeface="Proxima Nova"/>
-                          <a:sym typeface="Proxima Nova"/>
-                        </a:rPr>
-                        <a:t>Clasificación</a:t>
-                      </a:r>
-                      <a:r>
-                        <a:rPr lang="en-GB" dirty="0">
-                          <a:solidFill>
-                            <a:schemeClr val="accent1"/>
-                          </a:solidFill>
-                          <a:latin typeface="Proxima Nova"/>
-                          <a:ea typeface="Proxima Nova"/>
-                          <a:cs typeface="Proxima Nova"/>
-                          <a:sym typeface="Proxima Nova"/>
-                        </a:rPr>
-                        <a:t> </a:t>
-                      </a:r>
-                      <a:r>
-                        <a:rPr lang="en-GB" dirty="0">
-                          <a:solidFill>
-                            <a:schemeClr val="accent2"/>
-                          </a:solidFill>
-                          <a:latin typeface="Proxima Nova"/>
-                          <a:ea typeface="Proxima Nova"/>
-                          <a:cs typeface="Proxima Nova"/>
-                          <a:sym typeface="Proxima Nova"/>
-                        </a:rPr>
-                        <a:t>–</a:t>
-                      </a:r>
-                      <a:r>
-                        <a:rPr lang="en-GB" dirty="0">
-                          <a:solidFill>
-                            <a:schemeClr val="accent1"/>
-                          </a:solidFill>
-                          <a:latin typeface="Proxima Nova"/>
-                          <a:ea typeface="Proxima Nova"/>
-                          <a:cs typeface="Proxima Nova"/>
-                          <a:sym typeface="Proxima Nova"/>
-                        </a:rPr>
-                        <a:t> </a:t>
-                      </a:r>
-                      <a:r>
-                        <a:rPr lang="en-GB" dirty="0" err="1">
-                          <a:solidFill>
-                            <a:schemeClr val="accent1"/>
-                          </a:solidFill>
-                          <a:latin typeface="Proxima Nova"/>
-                          <a:ea typeface="Proxima Nova"/>
-                          <a:cs typeface="Proxima Nova"/>
-                          <a:sym typeface="Proxima Nova"/>
-                        </a:rPr>
-                        <a:t>Regresión</a:t>
-                      </a:r>
-                      <a:r>
-                        <a:rPr lang="en-GB" dirty="0">
-                          <a:solidFill>
-                            <a:schemeClr val="accent1"/>
-                          </a:solidFill>
-                          <a:latin typeface="Proxima Nova"/>
-                          <a:ea typeface="Proxima Nova"/>
-                          <a:cs typeface="Proxima Nova"/>
-                          <a:sym typeface="Proxima Nova"/>
-                        </a:rPr>
-                        <a:t> </a:t>
-                      </a:r>
-                      <a:r>
-                        <a:rPr lang="en-GB" dirty="0" err="1">
-                          <a:solidFill>
-                            <a:schemeClr val="accent1"/>
-                          </a:solidFill>
-                          <a:latin typeface="Proxima Nova"/>
-                          <a:ea typeface="Proxima Nova"/>
-                          <a:cs typeface="Proxima Nova"/>
-                          <a:sym typeface="Proxima Nova"/>
-                        </a:rPr>
-                        <a:t>logística</a:t>
-                      </a:r>
-                      <a:endParaRPr dirty="0">
-                        <a:solidFill>
-                          <a:schemeClr val="accent1"/>
-                        </a:solidFill>
-                        <a:latin typeface="Proxima Nova"/>
-                        <a:ea typeface="Proxima Nova"/>
-                        <a:cs typeface="Proxima Nova"/>
-                        <a:sym typeface="Proxima Nova"/>
-                      </a:endParaRPr>
-                    </a:p>
-                  </a:txBody>
-                  <a:tcPr marL="91425" marR="91425" marT="91425" marB="91425" anchor="ctr">
-                    <a:lnL w="9525" cap="flat" cmpd="sng">
-                      <a:solidFill>
-                        <a:srgbClr val="9E9E9E">
-                          <a:alpha val="0"/>
-                        </a:srgbClr>
-                      </a:solidFill>
-                      <a:prstDash val="solid"/>
-                      <a:round/>
-                      <a:headEnd type="none" w="sm" len="sm"/>
-                      <a:tailEnd type="none" w="sm" len="sm"/>
-                    </a:lnL>
-                    <a:lnR w="9525" cap="flat" cmpd="sng">
-                      <a:solidFill>
-                        <a:srgbClr val="9E9E9E">
-                          <a:alpha val="0"/>
-                        </a:srgbClr>
-                      </a:solidFill>
-                      <a:prstDash val="solid"/>
-                      <a:round/>
-                      <a:headEnd type="none" w="sm" len="sm"/>
-                      <a:tailEnd type="none" w="sm" len="sm"/>
-                    </a:lnR>
-                    <a:lnT w="9525" cap="flat" cmpd="sng">
-                      <a:solidFill>
-                        <a:srgbClr val="9E9E9E">
-                          <a:alpha val="0"/>
-                        </a:srgbClr>
-                      </a:solidFill>
-                      <a:prstDash val="solid"/>
-                      <a:round/>
-                      <a:headEnd type="none" w="sm" len="sm"/>
-                      <a:tailEnd type="none" w="sm" len="sm"/>
-                    </a:lnT>
-                    <a:lnB w="9525" cap="flat" cmpd="sng">
-                      <a:solidFill>
-                        <a:srgbClr val="9E9E9E">
-                          <a:alpha val="0"/>
-                        </a:srgbClr>
-                      </a:solidFill>
-                      <a:prstDash val="solid"/>
-                      <a:round/>
-                      <a:headEnd type="none" w="sm" len="sm"/>
-                      <a:tailEnd type="none" w="sm" len="sm"/>
-                    </a:lnB>
-                  </a:tcPr>
-                </a:tc>
-                <a:tc>
-                  <a:txBody>
-                    <a:bodyPr/>
-                    <a:lstStyle/>
-                    <a:p>
-                      <a:pPr marL="0" lvl="0" indent="0" algn="ctr" rtl="0">
-                        <a:spcBef>
-                          <a:spcPts val="0"/>
-                        </a:spcBef>
-                        <a:spcAft>
-                          <a:spcPts val="0"/>
-                        </a:spcAft>
-                        <a:buNone/>
-                      </a:pPr>
-                      <a:r>
-                        <a:rPr lang="es-AR" sz="1200" dirty="0" err="1">
-                          <a:solidFill>
-                            <a:schemeClr val="accent1"/>
-                          </a:solidFill>
-                          <a:latin typeface="Proxima Nova"/>
-                          <a:ea typeface="Proxima Nova"/>
-                          <a:cs typeface="Proxima Nova"/>
-                          <a:sym typeface="Proxima Nova"/>
-                        </a:rPr>
-                        <a:t>Cap</a:t>
-                      </a:r>
-                      <a:r>
-                        <a:rPr lang="es-AR" sz="1200" dirty="0">
-                          <a:solidFill>
-                            <a:schemeClr val="accent1"/>
-                          </a:solidFill>
-                          <a:latin typeface="Proxima Nova"/>
-                          <a:ea typeface="Proxima Nova"/>
-                          <a:cs typeface="Proxima Nova"/>
-                          <a:sym typeface="Proxima Nova"/>
-                        </a:rPr>
-                        <a:t> 4 </a:t>
-                      </a:r>
-                      <a:r>
-                        <a:rPr lang="en-GB" sz="1200" dirty="0">
-                          <a:solidFill>
-                            <a:schemeClr val="accent1"/>
-                          </a:solidFill>
-                          <a:latin typeface="Proxima Nova"/>
-                          <a:ea typeface="Proxima Nova"/>
-                          <a:cs typeface="Proxima Nova"/>
-                          <a:sym typeface="Proxima Nova"/>
-                        </a:rPr>
-                        <a:t>ISLR</a:t>
-                      </a:r>
-                      <a:r>
-                        <a:rPr lang="es-AR" sz="1200" dirty="0">
-                          <a:solidFill>
-                            <a:schemeClr val="accent1"/>
-                          </a:solidFill>
-                          <a:latin typeface="Proxima Nova"/>
-                          <a:ea typeface="Proxima Nova"/>
-                          <a:cs typeface="Proxima Nova"/>
-                          <a:sym typeface="Proxima Nova"/>
-                        </a:rPr>
-                        <a:t> + </a:t>
-                      </a:r>
-                      <a:r>
-                        <a:rPr lang="es-AR" sz="1200" dirty="0" err="1">
-                          <a:solidFill>
-                            <a:schemeClr val="accent1"/>
-                          </a:solidFill>
-                          <a:latin typeface="Proxima Nova"/>
-                          <a:ea typeface="Proxima Nova"/>
-                          <a:cs typeface="Proxima Nova"/>
-                          <a:sym typeface="Proxima Nova"/>
-                        </a:rPr>
-                        <a:t>Cap</a:t>
-                      </a:r>
-                      <a:r>
-                        <a:rPr lang="es-AR" sz="1200" dirty="0">
-                          <a:solidFill>
-                            <a:schemeClr val="accent1"/>
-                          </a:solidFill>
-                          <a:latin typeface="Proxima Nova"/>
-                          <a:ea typeface="Proxima Nova"/>
-                          <a:cs typeface="Proxima Nova"/>
-                          <a:sym typeface="Proxima Nova"/>
-                        </a:rPr>
-                        <a:t> 9 IMS</a:t>
-                      </a:r>
-                    </a:p>
-                  </a:txBody>
-                  <a:tcPr marL="91425" marR="91425" marT="91425" marB="91425" anchor="ctr">
-                    <a:lnL w="9525" cap="flat" cmpd="sng">
-                      <a:solidFill>
-                        <a:srgbClr val="9E9E9E">
-                          <a:alpha val="0"/>
-                        </a:srgbClr>
-                      </a:solidFill>
-                      <a:prstDash val="solid"/>
-                      <a:round/>
-                      <a:headEnd type="none" w="sm" len="sm"/>
-                      <a:tailEnd type="none" w="sm" len="sm"/>
-                    </a:lnL>
-                    <a:lnR w="9525" cap="flat" cmpd="sng">
-                      <a:solidFill>
-                        <a:srgbClr val="9E9E9E">
-                          <a:alpha val="0"/>
-                        </a:srgbClr>
-                      </a:solidFill>
-                      <a:prstDash val="solid"/>
-                      <a:round/>
-                      <a:headEnd type="none" w="sm" len="sm"/>
-                      <a:tailEnd type="none" w="sm" len="sm"/>
-                    </a:lnR>
-                    <a:lnT w="9525" cap="flat" cmpd="sng">
-                      <a:solidFill>
-                        <a:srgbClr val="9E9E9E">
-                          <a:alpha val="0"/>
-                        </a:srgbClr>
-                      </a:solidFill>
-                      <a:prstDash val="solid"/>
-                      <a:round/>
-                      <a:headEnd type="none" w="sm" len="sm"/>
-                      <a:tailEnd type="none" w="sm" len="sm"/>
-                    </a:lnT>
-                    <a:lnB w="9525" cap="flat" cmpd="sng">
-                      <a:solidFill>
-                        <a:srgbClr val="9E9E9E">
-                          <a:alpha val="0"/>
-                        </a:srgbClr>
-                      </a:solidFill>
-                      <a:prstDash val="solid"/>
-                      <a:round/>
-                      <a:headEnd type="none" w="sm" len="sm"/>
-                      <a:tailEnd type="none" w="sm" len="sm"/>
-                    </a:lnB>
-                  </a:tcPr>
-                </a:tc>
-                <a:extLst>
-                  <a:ext uri="{0D108BD9-81ED-4DB2-BD59-A6C34878D82A}">
-                    <a16:rowId xmlns:a16="http://schemas.microsoft.com/office/drawing/2014/main" val="10004"/>
-                  </a:ext>
-                </a:extLst>
-              </a:tr>
-              <a:tr h="505525">
-                <a:tc>
-                  <a:txBody>
-                    <a:bodyPr/>
-                    <a:lstStyle/>
-                    <a:p>
-                      <a:pPr marL="0" lvl="0" indent="0" algn="ctr" rtl="0">
-                        <a:spcBef>
-                          <a:spcPts val="0"/>
-                        </a:spcBef>
-                        <a:spcAft>
-                          <a:spcPts val="0"/>
-                        </a:spcAft>
-                        <a:buNone/>
-                      </a:pPr>
-                      <a:r>
-                        <a:rPr lang="en-GB" dirty="0">
-                          <a:solidFill>
-                            <a:schemeClr val="accent2"/>
-                          </a:solidFill>
-                          <a:latin typeface="Proxima Nova"/>
-                          <a:ea typeface="Proxima Nova"/>
-                          <a:cs typeface="Proxima Nova"/>
-                          <a:sym typeface="Proxima Nova"/>
-                        </a:rPr>
-                        <a:t>5</a:t>
-                      </a:r>
-                      <a:endParaRPr dirty="0">
-                        <a:solidFill>
-                          <a:schemeClr val="accent2"/>
-                        </a:solidFill>
-                        <a:latin typeface="Proxima Nova"/>
-                        <a:ea typeface="Proxima Nova"/>
-                        <a:cs typeface="Proxima Nova"/>
-                        <a:sym typeface="Proxima Nova"/>
-                      </a:endParaRPr>
-                    </a:p>
-                  </a:txBody>
-                  <a:tcPr marL="91425" marR="91425" marT="91425" marB="91425" anchor="ctr">
-                    <a:lnL w="9525" cap="flat" cmpd="sng">
-                      <a:solidFill>
-                        <a:srgbClr val="9E9E9E">
-                          <a:alpha val="0"/>
-                        </a:srgbClr>
-                      </a:solidFill>
-                      <a:prstDash val="solid"/>
-                      <a:round/>
-                      <a:headEnd type="none" w="sm" len="sm"/>
-                      <a:tailEnd type="none" w="sm" len="sm"/>
-                    </a:lnL>
-                    <a:lnR w="9525" cap="flat" cmpd="sng">
-                      <a:solidFill>
-                        <a:srgbClr val="9E9E9E">
-                          <a:alpha val="0"/>
-                        </a:srgbClr>
-                      </a:solidFill>
-                      <a:prstDash val="solid"/>
-                      <a:round/>
-                      <a:headEnd type="none" w="sm" len="sm"/>
-                      <a:tailEnd type="none" w="sm" len="sm"/>
-                    </a:lnR>
-                    <a:lnT w="9525" cap="flat" cmpd="sng">
-                      <a:solidFill>
-                        <a:srgbClr val="9E9E9E">
-                          <a:alpha val="0"/>
-                        </a:srgbClr>
-                      </a:solidFill>
-                      <a:prstDash val="solid"/>
-                      <a:round/>
-                      <a:headEnd type="none" w="sm" len="sm"/>
-                      <a:tailEnd type="none" w="sm" len="sm"/>
-                    </a:lnT>
-                    <a:lnB w="9525" cap="flat" cmpd="sng">
-                      <a:solidFill>
-                        <a:srgbClr val="9E9E9E">
-                          <a:alpha val="0"/>
-                        </a:srgbClr>
-                      </a:solidFill>
-                      <a:prstDash val="solid"/>
-                      <a:round/>
-                      <a:headEnd type="none" w="sm" len="sm"/>
-                      <a:tailEnd type="none" w="sm" len="sm"/>
-                    </a:lnB>
-                  </a:tcPr>
-                </a:tc>
-                <a:tc>
-                  <a:txBody>
-                    <a:bodyPr/>
-                    <a:lstStyle/>
-                    <a:p>
-                      <a:pPr marL="0" lvl="0" indent="0" algn="ctr" rtl="0">
-                        <a:spcBef>
-                          <a:spcPts val="0"/>
-                        </a:spcBef>
-                        <a:spcAft>
-                          <a:spcPts val="0"/>
-                        </a:spcAft>
-                        <a:buNone/>
-                      </a:pPr>
-                      <a:r>
-                        <a:rPr lang="en-GB" dirty="0">
-                          <a:solidFill>
-                            <a:schemeClr val="accent2"/>
-                          </a:solidFill>
-                          <a:latin typeface="Proxima Nova"/>
-                          <a:ea typeface="Proxima Nova"/>
-                          <a:cs typeface="Proxima Nova"/>
-                          <a:sym typeface="Proxima Nova"/>
-                        </a:rPr>
-                        <a:t>10/9</a:t>
-                      </a:r>
-                    </a:p>
-                  </a:txBody>
-                  <a:tcPr marL="91425" marR="91425" marT="91425" marB="91425" anchor="ctr">
-                    <a:lnL w="9525" cap="flat" cmpd="sng">
-                      <a:solidFill>
-                        <a:srgbClr val="9E9E9E">
-                          <a:alpha val="0"/>
-                        </a:srgbClr>
-                      </a:solidFill>
-                      <a:prstDash val="solid"/>
-                      <a:round/>
-                      <a:headEnd type="none" w="sm" len="sm"/>
-                      <a:tailEnd type="none" w="sm" len="sm"/>
-                    </a:lnL>
-                    <a:lnR w="9525" cap="flat" cmpd="sng">
-                      <a:solidFill>
-                        <a:srgbClr val="9E9E9E">
-                          <a:alpha val="0"/>
-                        </a:srgbClr>
-                      </a:solidFill>
-                      <a:prstDash val="solid"/>
-                      <a:round/>
-                      <a:headEnd type="none" w="sm" len="sm"/>
-                      <a:tailEnd type="none" w="sm" len="sm"/>
-                    </a:lnR>
-                    <a:lnT w="9525" cap="flat" cmpd="sng">
-                      <a:solidFill>
-                        <a:srgbClr val="9E9E9E">
-                          <a:alpha val="0"/>
-                        </a:srgbClr>
-                      </a:solidFill>
-                      <a:prstDash val="solid"/>
-                      <a:round/>
-                      <a:headEnd type="none" w="sm" len="sm"/>
-                      <a:tailEnd type="none" w="sm" len="sm"/>
-                    </a:lnT>
-                    <a:lnB w="9525" cap="flat" cmpd="sng">
-                      <a:solidFill>
-                        <a:srgbClr val="9E9E9E">
-                          <a:alpha val="0"/>
-                        </a:srgbClr>
-                      </a:solidFill>
-                      <a:prstDash val="solid"/>
-                      <a:round/>
-                      <a:headEnd type="none" w="sm" len="sm"/>
-                      <a:tailEnd type="none" w="sm" len="sm"/>
-                    </a:lnB>
-                  </a:tcPr>
-                </a:tc>
-                <a:tc>
-                  <a:txBody>
-                    <a:bodyPr/>
-                    <a:lstStyle/>
-                    <a:p>
-                      <a:pPr marL="0" lvl="0" indent="0" algn="ctr" rtl="0">
-                        <a:spcBef>
-                          <a:spcPts val="0"/>
-                        </a:spcBef>
-                        <a:spcAft>
-                          <a:spcPts val="0"/>
-                        </a:spcAft>
-                        <a:buNone/>
-                      </a:pPr>
-                      <a:r>
-                        <a:rPr lang="en-GB" dirty="0" err="1">
-                          <a:solidFill>
-                            <a:schemeClr val="accent2"/>
-                          </a:solidFill>
-                          <a:latin typeface="Proxima Nova"/>
-                          <a:ea typeface="Proxima Nova"/>
-                          <a:cs typeface="Proxima Nova"/>
-                          <a:sym typeface="Proxima Nova"/>
-                        </a:rPr>
-                        <a:t>Clasificación</a:t>
-                      </a:r>
-                      <a:r>
-                        <a:rPr lang="en-GB" dirty="0">
-                          <a:solidFill>
-                            <a:schemeClr val="accent2"/>
-                          </a:solidFill>
-                          <a:latin typeface="Proxima Nova"/>
-                          <a:ea typeface="Proxima Nova"/>
-                          <a:cs typeface="Proxima Nova"/>
-                          <a:sym typeface="Proxima Nova"/>
-                        </a:rPr>
-                        <a:t> – </a:t>
-                      </a:r>
-                      <a:r>
-                        <a:rPr lang="en-GB" dirty="0" err="1">
-                          <a:solidFill>
-                            <a:schemeClr val="accent2"/>
-                          </a:solidFill>
-                          <a:latin typeface="Proxima Nova"/>
-                          <a:ea typeface="Proxima Nova"/>
-                          <a:cs typeface="Proxima Nova"/>
-                          <a:sym typeface="Proxima Nova"/>
-                        </a:rPr>
-                        <a:t>Modelos</a:t>
-                      </a:r>
-                      <a:r>
-                        <a:rPr lang="en-GB" dirty="0">
-                          <a:solidFill>
-                            <a:schemeClr val="accent2"/>
-                          </a:solidFill>
-                          <a:latin typeface="Proxima Nova"/>
-                          <a:ea typeface="Proxima Nova"/>
-                          <a:cs typeface="Proxima Nova"/>
-                          <a:sym typeface="Proxima Nova"/>
-                        </a:rPr>
-                        <a:t> </a:t>
-                      </a:r>
-                      <a:r>
-                        <a:rPr lang="en-GB" dirty="0" err="1">
-                          <a:solidFill>
-                            <a:schemeClr val="accent2"/>
-                          </a:solidFill>
-                          <a:latin typeface="Proxima Nova"/>
-                          <a:ea typeface="Proxima Nova"/>
-                          <a:cs typeface="Proxima Nova"/>
-                          <a:sym typeface="Proxima Nova"/>
-                        </a:rPr>
-                        <a:t>generativos</a:t>
-                      </a:r>
-                      <a:r>
-                        <a:rPr lang="en-GB" dirty="0">
-                          <a:solidFill>
-                            <a:schemeClr val="accent2"/>
-                          </a:solidFill>
-                          <a:latin typeface="Proxima Nova"/>
-                          <a:ea typeface="Proxima Nova"/>
-                          <a:cs typeface="Proxima Nova"/>
-                          <a:sym typeface="Proxima Nova"/>
-                        </a:rPr>
-                        <a:t> y KNN</a:t>
-                      </a:r>
-                      <a:endParaRPr dirty="0">
-                        <a:solidFill>
-                          <a:schemeClr val="accent2"/>
-                        </a:solidFill>
-                        <a:latin typeface="Proxima Nova"/>
-                        <a:ea typeface="Proxima Nova"/>
-                        <a:cs typeface="Proxima Nova"/>
-                        <a:sym typeface="Proxima Nova"/>
-                      </a:endParaRPr>
-                    </a:p>
-                  </a:txBody>
-                  <a:tcPr marL="91425" marR="91425" marT="91425" marB="91425" anchor="ctr">
-                    <a:lnL w="9525" cap="flat" cmpd="sng">
-                      <a:solidFill>
-                        <a:srgbClr val="9E9E9E">
-                          <a:alpha val="0"/>
-                        </a:srgbClr>
-                      </a:solidFill>
-                      <a:prstDash val="solid"/>
-                      <a:round/>
-                      <a:headEnd type="none" w="sm" len="sm"/>
-                      <a:tailEnd type="none" w="sm" len="sm"/>
-                    </a:lnL>
-                    <a:lnR w="9525" cap="flat" cmpd="sng">
-                      <a:solidFill>
-                        <a:srgbClr val="9E9E9E">
-                          <a:alpha val="0"/>
-                        </a:srgbClr>
-                      </a:solidFill>
-                      <a:prstDash val="solid"/>
-                      <a:round/>
-                      <a:headEnd type="none" w="sm" len="sm"/>
-                      <a:tailEnd type="none" w="sm" len="sm"/>
-                    </a:lnR>
-                    <a:lnT w="9525" cap="flat" cmpd="sng">
-                      <a:solidFill>
-                        <a:srgbClr val="9E9E9E">
-                          <a:alpha val="0"/>
-                        </a:srgbClr>
-                      </a:solidFill>
-                      <a:prstDash val="solid"/>
-                      <a:round/>
-                      <a:headEnd type="none" w="sm" len="sm"/>
-                      <a:tailEnd type="none" w="sm" len="sm"/>
-                    </a:lnT>
-                    <a:lnB w="9525" cap="flat" cmpd="sng">
-                      <a:solidFill>
-                        <a:srgbClr val="9E9E9E">
-                          <a:alpha val="0"/>
-                        </a:srgbClr>
-                      </a:solidFill>
-                      <a:prstDash val="solid"/>
-                      <a:round/>
-                      <a:headEnd type="none" w="sm" len="sm"/>
-                      <a:tailEnd type="none" w="sm" len="sm"/>
-                    </a:lnB>
-                  </a:tcPr>
-                </a:tc>
-                <a:tc>
-                  <a:txBody>
-                    <a:bodyPr/>
-                    <a:lstStyle/>
-                    <a:p>
-                      <a:pPr marL="0" lvl="0" indent="0" algn="ctr" rtl="0">
-                        <a:spcBef>
-                          <a:spcPts val="0"/>
-                        </a:spcBef>
-                        <a:spcAft>
-                          <a:spcPts val="0"/>
-                        </a:spcAft>
-                        <a:buNone/>
-                      </a:pPr>
-                      <a:r>
-                        <a:rPr lang="es-AR" sz="1200" dirty="0" err="1">
-                          <a:solidFill>
-                            <a:schemeClr val="accent2"/>
-                          </a:solidFill>
-                          <a:latin typeface="Proxima Nova"/>
-                          <a:ea typeface="Proxima Nova"/>
-                          <a:cs typeface="Proxima Nova"/>
-                          <a:sym typeface="Proxima Nova"/>
-                        </a:rPr>
-                        <a:t>Cap</a:t>
-                      </a:r>
-                      <a:r>
-                        <a:rPr lang="es-AR" sz="1200" dirty="0">
-                          <a:solidFill>
-                            <a:schemeClr val="accent2"/>
-                          </a:solidFill>
-                          <a:latin typeface="Proxima Nova"/>
-                          <a:ea typeface="Proxima Nova"/>
-                          <a:cs typeface="Proxima Nova"/>
-                          <a:sym typeface="Proxima Nova"/>
-                        </a:rPr>
-                        <a:t> 4 </a:t>
-                      </a:r>
-                      <a:r>
-                        <a:rPr lang="en-GB" sz="1200" dirty="0">
-                          <a:solidFill>
-                            <a:schemeClr val="accent2"/>
-                          </a:solidFill>
                           <a:latin typeface="Proxima Nova"/>
                           <a:ea typeface="Proxima Nova"/>
                           <a:cs typeface="Proxima Nova"/>
@@ -14601,9 +14145,6 @@
                         <a:t>ISLR</a:t>
                       </a:r>
                       <a:endParaRPr lang="es-AR" sz="1200" dirty="0">
-                        <a:solidFill>
-                          <a:schemeClr val="accent2"/>
-                        </a:solidFill>
                         <a:latin typeface="Proxima Nova"/>
                         <a:ea typeface="Proxima Nova"/>
                         <a:cs typeface="Proxima Nova"/>
@@ -14664,7 +14205,7 @@
                   </a:ext>
                 </a:extLst>
               </a:tr>
-              <a:tr h="505525">
+              <a:tr h="514654">
                 <a:tc>
                   <a:txBody>
                     <a:bodyPr/>
@@ -14764,7 +14305,7 @@
                         <a:buNone/>
                       </a:pPr>
                       <a:r>
-                        <a:rPr lang="en-GB" dirty="0">
+                        <a:rPr lang="es-AR" dirty="0">
                           <a:solidFill>
                             <a:schemeClr val="bg2"/>
                           </a:solidFill>
@@ -14773,12 +14314,33 @@
                           <a:cs typeface="Proxima Nova"/>
                           <a:sym typeface="Proxima Nova"/>
                         </a:rPr>
-                        <a:t>17/9</a:t>
+                        <a:t>Métricas de rendimiento y </a:t>
                       </a:r>
+                      <a:r>
+                        <a:rPr lang="es-AR" dirty="0" err="1">
+                          <a:solidFill>
+                            <a:schemeClr val="bg2"/>
+                          </a:solidFill>
+                          <a:latin typeface="Proxima Nova"/>
+                          <a:ea typeface="Proxima Nova"/>
+                          <a:cs typeface="Proxima Nova"/>
+                          <a:sym typeface="Proxima Nova"/>
+                        </a:rPr>
+                        <a:t>CrossValidation</a:t>
+                      </a:r>
+                      <a:endParaRPr dirty="0">
+                        <a:solidFill>
+                          <a:schemeClr val="bg2"/>
+                        </a:solidFill>
+                        <a:latin typeface="Proxima Nova"/>
+                        <a:ea typeface="Proxima Nova"/>
+                        <a:cs typeface="Proxima Nova"/>
+                        <a:sym typeface="Proxima Nova"/>
+                      </a:endParaRPr>
                     </a:p>
                   </a:txBody>
                   <a:tcPr marL="91425" marR="91425" marT="91425" marB="91425" anchor="ctr">
-                    <a:lnL w="9525" cap="flat" cmpd="sng">
+                    <a:lnL w="9525" cap="flat" cmpd="sng" algn="ctr">
                       <a:solidFill>
                         <a:srgbClr val="9E9E9E">
                           <a:alpha val="0"/>
@@ -14800,103 +14362,7 @@
                       <a:headEnd type="none" w="sm" len="sm"/>
                       <a:tailEnd type="none" w="sm" len="sm"/>
                     </a:lnR>
-                    <a:lnT w="9525" cap="flat" cmpd="sng">
-                      <a:solidFill>
-                        <a:srgbClr val="9E9E9E">
-                          <a:alpha val="0"/>
-                        </a:srgbClr>
-                      </a:solidFill>
-                      <a:prstDash val="solid"/>
-                      <a:round/>
-                      <a:headEnd type="none" w="sm" len="sm"/>
-                      <a:tailEnd type="none" w="sm" len="sm"/>
-                    </a:lnT>
-                    <a:lnB w="9525" cap="flat" cmpd="sng">
-                      <a:solidFill>
-                        <a:srgbClr val="9E9E9E">
-                          <a:alpha val="0"/>
-                        </a:srgbClr>
-                      </a:solidFill>
-                      <a:prstDash val="solid"/>
-                      <a:round/>
-                      <a:headEnd type="none" w="sm" len="sm"/>
-                      <a:tailEnd type="none" w="sm" len="sm"/>
-                    </a:lnB>
-                  </a:tcPr>
-                </a:tc>
-                <a:tc>
-                  <a:txBody>
-                    <a:bodyPr/>
-                    <a:lstStyle/>
-                    <a:p>
-                      <a:pPr marL="0" lvl="0" indent="0" algn="ctr" rtl="0">
-                        <a:spcBef>
-                          <a:spcPts val="0"/>
-                        </a:spcBef>
-                        <a:spcAft>
-                          <a:spcPts val="0"/>
-                        </a:spcAft>
-                        <a:buNone/>
-                      </a:pPr>
-                      <a:r>
-                        <a:rPr lang="es-AR" dirty="0">
-                          <a:solidFill>
-                            <a:schemeClr val="bg2"/>
-                          </a:solidFill>
-                          <a:latin typeface="Proxima Nova"/>
-                          <a:ea typeface="Proxima Nova"/>
-                          <a:cs typeface="Proxima Nova"/>
-                          <a:sym typeface="Proxima Nova"/>
-                        </a:rPr>
-                        <a:t>Métricas de rendimiento y Cross </a:t>
-                      </a:r>
-                      <a:r>
-                        <a:rPr lang="es-AR" dirty="0" err="1">
-                          <a:solidFill>
-                            <a:schemeClr val="bg2"/>
-                          </a:solidFill>
-                          <a:latin typeface="Proxima Nova"/>
-                          <a:ea typeface="Proxima Nova"/>
-                          <a:cs typeface="Proxima Nova"/>
-                          <a:sym typeface="Proxima Nova"/>
-                        </a:rPr>
-                        <a:t>Validation</a:t>
-                      </a:r>
-                      <a:endParaRPr dirty="0">
-                        <a:solidFill>
-                          <a:schemeClr val="bg2"/>
-                        </a:solidFill>
-                        <a:latin typeface="Proxima Nova"/>
-                        <a:ea typeface="Proxima Nova"/>
-                        <a:cs typeface="Proxima Nova"/>
-                        <a:sym typeface="Proxima Nova"/>
-                      </a:endParaRPr>
-                    </a:p>
-                  </a:txBody>
-                  <a:tcPr marL="91425" marR="91425" marT="91425" marB="91425" anchor="ctr">
-                    <a:lnL w="9525" cap="flat" cmpd="sng">
-                      <a:solidFill>
-                        <a:srgbClr val="9E9E9E">
-                          <a:alpha val="0"/>
-                        </a:srgbClr>
-                      </a:solidFill>
-                      <a:prstDash val="solid"/>
-                      <a:round/>
-                      <a:headEnd type="none" w="sm" len="sm"/>
-                      <a:tailEnd type="none" w="sm" len="sm"/>
-                    </a:lnL>
-                    <a:lnR w="9525" cap="flat" cmpd="sng">
-                      <a:solidFill>
-                        <a:srgbClr val="9E9E9E">
-                          <a:alpha val="0"/>
-                        </a:srgbClr>
-                      </a:solidFill>
-                      <a:prstDash val="solid"/>
-                      <a:round/>
-                      <a:headEnd type="none" w="sm" len="sm"/>
-                      <a:tailEnd type="none" w="sm" len="sm"/>
-                    </a:lnR>
-                    <a:lnT w="9525" cap="flat" cmpd="sng">
+                    <a:lnT w="9525" cap="flat" cmpd="sng" algn="ctr">
                       <a:solidFill>
                         <a:srgbClr val="9E9E9E">
                           <a:alpha val="0"/>
@@ -15895,9 +15361,9 @@
             <a:avLst/>
           </a:prstGeom>
           <a:noFill/>
-          <a:ln w="12700">
+          <a:ln w="28575">
             <a:solidFill>
-              <a:schemeClr val="accent4"/>
+              <a:schemeClr val="tx2"/>
             </a:solidFill>
           </a:ln>
         </p:spPr>
@@ -15961,7 +15427,7 @@
             <a:avLst/>
           </a:prstGeom>
           <a:noFill/>
-          <a:ln w="12700">
+          <a:ln w="28575">
             <a:solidFill>
               <a:schemeClr val="tx2"/>
             </a:solidFill>
@@ -16020,14 +15486,14 @@
         </p:nvSpPr>
         <p:spPr>
           <a:xfrm>
-            <a:off x="6138472" y="1400935"/>
+            <a:off x="6977913" y="1400935"/>
             <a:ext cx="1828800" cy="457200"/>
           </a:xfrm>
           <a:prstGeom prst="roundRect">
             <a:avLst/>
           </a:prstGeom>
           <a:noFill/>
-          <a:ln w="12700">
+          <a:ln w="19050">
             <a:solidFill>
               <a:schemeClr val="accent4"/>
             </a:solidFill>
@@ -16086,14 +15552,14 @@
         </p:nvSpPr>
         <p:spPr>
           <a:xfrm>
-            <a:off x="367259" y="2115487"/>
+            <a:off x="367259" y="2033042"/>
             <a:ext cx="1828800" cy="457200"/>
           </a:xfrm>
           <a:prstGeom prst="roundRect">
             <a:avLst/>
           </a:prstGeom>
           <a:noFill/>
-          <a:ln w="12700">
+          <a:ln w="28575">
             <a:solidFill>
               <a:schemeClr val="tx2"/>
             </a:solidFill>
@@ -16152,14 +15618,14 @@
         </p:nvSpPr>
         <p:spPr>
           <a:xfrm>
-            <a:off x="3395272" y="2114550"/>
+            <a:off x="4736879" y="2032105"/>
             <a:ext cx="1828800" cy="457200"/>
           </a:xfrm>
           <a:prstGeom prst="roundRect">
             <a:avLst/>
           </a:prstGeom>
           <a:noFill/>
-          <a:ln w="12700">
+          <a:ln w="28575">
             <a:solidFill>
               <a:schemeClr val="tx2"/>
             </a:solidFill>
@@ -16218,14 +15684,14 @@
         </p:nvSpPr>
         <p:spPr>
           <a:xfrm>
-            <a:off x="244542" y="2946366"/>
-            <a:ext cx="1008000" cy="720000"/>
+            <a:off x="2180183" y="3527498"/>
+            <a:ext cx="1080000" cy="720000"/>
           </a:xfrm>
           <a:prstGeom prst="hexagon">
             <a:avLst/>
           </a:prstGeom>
           <a:noFill/>
-          <a:ln w="12700">
+          <a:ln w="28575">
             <a:solidFill>
               <a:schemeClr val="tx2"/>
             </a:solidFill>
@@ -16259,73 +15725,7 @@
                 </a:solidFill>
                 <a:latin typeface="Proxima Nova" panose="020B0604020202020204" charset="0"/>
               </a:rPr>
-              <a:t>Simple</a:t>
-            </a:r>
-            <a:endParaRPr lang="es-AR" sz="1050" dirty="0">
-              <a:solidFill>
-                <a:schemeClr val="accent2"/>
-              </a:solidFill>
-              <a:latin typeface="Proxima Nova" panose="020B0604020202020204" charset="0"/>
-            </a:endParaRPr>
-          </a:p>
-        </p:txBody>
-      </p:sp>
-      <p:sp>
-        <p:nvSpPr>
-          <p:cNvPr id="16" name="Hexágono 15">
-            <a:extLst>
-              <a:ext uri="{FF2B5EF4-FFF2-40B4-BE49-F238E27FC236}">
-                <a16:creationId xmlns:a16="http://schemas.microsoft.com/office/drawing/2014/main" id="{9961A3D7-B739-4884-8B84-3074ECF546FC}"/>
-              </a:ext>
-            </a:extLst>
-          </p:cNvPr>
-          <p:cNvSpPr/>
-          <p:nvPr/>
-        </p:nvSpPr>
-        <p:spPr>
-          <a:xfrm>
-            <a:off x="1315476" y="2946366"/>
-            <a:ext cx="1008000" cy="720000"/>
-          </a:xfrm>
-          <a:prstGeom prst="hexagon">
-            <a:avLst/>
-          </a:prstGeom>
-          <a:noFill/>
-          <a:ln w="12700">
-            <a:solidFill>
-              <a:schemeClr val="tx2"/>
-            </a:solidFill>
-          </a:ln>
-        </p:spPr>
-        <p:style>
-          <a:lnRef idx="2">
-            <a:schemeClr val="accent1">
-              <a:shade val="50000"/>
-            </a:schemeClr>
-          </a:lnRef>
-          <a:fillRef idx="1">
-            <a:schemeClr val="accent1"/>
-          </a:fillRef>
-          <a:effectRef idx="0">
-            <a:schemeClr val="accent1"/>
-          </a:effectRef>
-          <a:fontRef idx="minor">
-            <a:schemeClr val="lt1"/>
-          </a:fontRef>
-        </p:style>
-        <p:txBody>
-          <a:bodyPr rtlCol="0" anchor="ctr"/>
-          <a:lstStyle/>
-          <a:p>
-            <a:pPr algn="ctr"/>
-            <a:r>
-              <a:rPr lang="es-MX" sz="1050" dirty="0">
-                <a:solidFill>
-                  <a:schemeClr val="accent2"/>
-                </a:solidFill>
-                <a:latin typeface="Proxima Nova" panose="020B0604020202020204" charset="0"/>
-              </a:rPr>
-              <a:t>Múltiple</a:t>
+              <a:t>Regresión lineal</a:t>
             </a:r>
             <a:endParaRPr lang="es-AR" sz="1050" dirty="0">
               <a:solidFill>
@@ -16350,14 +15750,14 @@
         </p:nvSpPr>
         <p:spPr>
           <a:xfrm>
-            <a:off x="6026046" y="2133912"/>
+            <a:off x="7457079" y="2114550"/>
             <a:ext cx="1087946" cy="720000"/>
           </a:xfrm>
           <a:prstGeom prst="hexagon">
             <a:avLst/>
           </a:prstGeom>
           <a:noFill/>
-          <a:ln w="12700">
+          <a:ln w="19050">
             <a:solidFill>
               <a:schemeClr val="accent4"/>
             </a:solidFill>
@@ -16404,10 +15804,10 @@
       </p:sp>
       <p:sp>
         <p:nvSpPr>
-          <p:cNvPr id="19" name="Hexágono 18">
+          <p:cNvPr id="23" name="Rectángulo: esquinas redondeadas 22">
             <a:extLst>
               <a:ext uri="{FF2B5EF4-FFF2-40B4-BE49-F238E27FC236}">
-                <a16:creationId xmlns:a16="http://schemas.microsoft.com/office/drawing/2014/main" id="{29BDC7DB-4962-4B47-83B4-B72C48164E29}"/>
+                <a16:creationId xmlns:a16="http://schemas.microsoft.com/office/drawing/2014/main" id="{B9A89CBC-6B47-41DB-9701-F40FC126C137}"/>
               </a:ext>
             </a:extLst>
           </p:cNvPr>
@@ -16416,14 +15816,80 @@
         </p:nvSpPr>
         <p:spPr>
           <a:xfrm>
-            <a:off x="7199411" y="2133912"/>
-            <a:ext cx="1008000" cy="720000"/>
+            <a:off x="3974879" y="2798833"/>
+            <a:ext cx="1584000" cy="457200"/>
           </a:xfrm>
-          <a:prstGeom prst="hexagon">
+          <a:prstGeom prst="roundRect">
             <a:avLst/>
           </a:prstGeom>
           <a:noFill/>
-          <a:ln w="12700">
+          <a:ln w="28575">
+            <a:solidFill>
+              <a:schemeClr val="tx2"/>
+            </a:solidFill>
+          </a:ln>
+        </p:spPr>
+        <p:style>
+          <a:lnRef idx="2">
+            <a:schemeClr val="accent1">
+              <a:shade val="50000"/>
+            </a:schemeClr>
+          </a:lnRef>
+          <a:fillRef idx="1">
+            <a:schemeClr val="accent1"/>
+          </a:fillRef>
+          <a:effectRef idx="0">
+            <a:schemeClr val="accent1"/>
+          </a:effectRef>
+          <a:fontRef idx="minor">
+            <a:schemeClr val="lt1"/>
+          </a:fontRef>
+        </p:style>
+        <p:txBody>
+          <a:bodyPr rtlCol="0" anchor="ctr"/>
+          <a:lstStyle/>
+          <a:p>
+            <a:pPr algn="ctr"/>
+            <a:r>
+              <a:rPr lang="es-MX" dirty="0">
+                <a:solidFill>
+                  <a:schemeClr val="accent2"/>
+                </a:solidFill>
+                <a:latin typeface="Proxima Nova" panose="020B0604020202020204" charset="0"/>
+              </a:rPr>
+              <a:t>Paramétricos</a:t>
+            </a:r>
+            <a:endParaRPr lang="es-AR" dirty="0">
+              <a:solidFill>
+                <a:schemeClr val="accent2"/>
+              </a:solidFill>
+              <a:latin typeface="Proxima Nova" panose="020B0604020202020204" charset="0"/>
+            </a:endParaRPr>
+          </a:p>
+        </p:txBody>
+      </p:sp>
+      <p:sp>
+        <p:nvSpPr>
+          <p:cNvPr id="24" name="Rectángulo: esquinas redondeadas 23">
+            <a:extLst>
+              <a:ext uri="{FF2B5EF4-FFF2-40B4-BE49-F238E27FC236}">
+                <a16:creationId xmlns:a16="http://schemas.microsoft.com/office/drawing/2014/main" id="{39E022CC-60EF-4D14-A8D8-A2272C00939F}"/>
+              </a:ext>
+            </a:extLst>
+          </p:cNvPr>
+          <p:cNvSpPr/>
+          <p:nvPr/>
+        </p:nvSpPr>
+        <p:spPr>
+          <a:xfrm>
+            <a:off x="5963575" y="2796941"/>
+            <a:ext cx="1584000" cy="457200"/>
+          </a:xfrm>
+          <a:prstGeom prst="roundRect">
+            <a:avLst/>
+          </a:prstGeom>
+          <a:noFill/>
+          <a:ln w="19050">
             <a:solidFill>
               <a:schemeClr val="accent4"/>
             </a:solidFill>
@@ -16451,15 +15917,15 @@
           <a:p>
             <a:pPr algn="ctr"/>
             <a:r>
-              <a:rPr lang="es-MX" sz="1050" dirty="0">
+              <a:rPr lang="es-MX" dirty="0">
                 <a:solidFill>
                   <a:schemeClr val="accent2"/>
                 </a:solidFill>
                 <a:latin typeface="Proxima Nova" panose="020B0604020202020204" charset="0"/>
               </a:rPr>
-              <a:t>PCA</a:t>
+              <a:t>No paramétricos</a:t>
             </a:r>
-            <a:endParaRPr lang="es-AR" sz="1050" dirty="0">
+            <a:endParaRPr lang="es-AR" dirty="0">
               <a:solidFill>
                 <a:schemeClr val="accent2"/>
               </a:solidFill>
@@ -16468,12 +15934,415 @@
           </a:p>
         </p:txBody>
       </p:sp>
+      <p:cxnSp>
+        <p:nvCxnSpPr>
+          <p:cNvPr id="27" name="Conector recto 26">
+            <a:extLst>
+              <a:ext uri="{FF2B5EF4-FFF2-40B4-BE49-F238E27FC236}">
+                <a16:creationId xmlns:a16="http://schemas.microsoft.com/office/drawing/2014/main" id="{77E1FACB-771C-4678-8AEC-39BF517E1D99}"/>
+              </a:ext>
+            </a:extLst>
+          </p:cNvPr>
+          <p:cNvCxnSpPr>
+            <a:cxnSpLocks/>
+            <a:stCxn id="11" idx="2"/>
+            <a:endCxn id="46" idx="0"/>
+          </p:cNvCxnSpPr>
+          <p:nvPr/>
+        </p:nvCxnSpPr>
+        <p:spPr>
+          <a:xfrm flipH="1">
+            <a:off x="934597" y="2490242"/>
+            <a:ext cx="347062" cy="328090"/>
+          </a:xfrm>
+          <a:prstGeom prst="line">
+            <a:avLst/>
+          </a:prstGeom>
+          <a:ln w="19050">
+            <a:solidFill>
+              <a:schemeClr val="accent4"/>
+            </a:solidFill>
+          </a:ln>
+        </p:spPr>
+        <p:style>
+          <a:lnRef idx="1">
+            <a:schemeClr val="accent1"/>
+          </a:lnRef>
+          <a:fillRef idx="0">
+            <a:schemeClr val="accent1"/>
+          </a:fillRef>
+          <a:effectRef idx="0">
+            <a:schemeClr val="accent1"/>
+          </a:effectRef>
+          <a:fontRef idx="minor">
+            <a:schemeClr val="tx1"/>
+          </a:fontRef>
+        </p:style>
+      </p:cxnSp>
+      <p:cxnSp>
+        <p:nvCxnSpPr>
+          <p:cNvPr id="30" name="Conector recto 29">
+            <a:extLst>
+              <a:ext uri="{FF2B5EF4-FFF2-40B4-BE49-F238E27FC236}">
+                <a16:creationId xmlns:a16="http://schemas.microsoft.com/office/drawing/2014/main" id="{0F40D13E-8445-47B1-A87F-A5950F6CF87E}"/>
+              </a:ext>
+            </a:extLst>
+          </p:cNvPr>
+          <p:cNvCxnSpPr>
+            <a:cxnSpLocks/>
+            <a:stCxn id="11" idx="2"/>
+            <a:endCxn id="44" idx="0"/>
+          </p:cNvCxnSpPr>
+          <p:nvPr/>
+        </p:nvCxnSpPr>
+        <p:spPr>
+          <a:xfrm>
+            <a:off x="1281659" y="2490242"/>
+            <a:ext cx="1430895" cy="331749"/>
+          </a:xfrm>
+          <a:prstGeom prst="line">
+            <a:avLst/>
+          </a:prstGeom>
+          <a:ln w="28575">
+            <a:solidFill>
+              <a:schemeClr val="tx2"/>
+            </a:solidFill>
+          </a:ln>
+        </p:spPr>
+        <p:style>
+          <a:lnRef idx="1">
+            <a:schemeClr val="accent1"/>
+          </a:lnRef>
+          <a:fillRef idx="0">
+            <a:schemeClr val="accent1"/>
+          </a:fillRef>
+          <a:effectRef idx="0">
+            <a:schemeClr val="accent1"/>
+          </a:effectRef>
+          <a:fontRef idx="minor">
+            <a:schemeClr val="tx1"/>
+          </a:fontRef>
+        </p:style>
+      </p:cxnSp>
+      <p:cxnSp>
+        <p:nvCxnSpPr>
+          <p:cNvPr id="33" name="Conector recto 32">
+            <a:extLst>
+              <a:ext uri="{FF2B5EF4-FFF2-40B4-BE49-F238E27FC236}">
+                <a16:creationId xmlns:a16="http://schemas.microsoft.com/office/drawing/2014/main" id="{7CEEF7BB-59F9-4FD2-B3AB-532406514BF7}"/>
+              </a:ext>
+            </a:extLst>
+          </p:cNvPr>
+          <p:cNvCxnSpPr>
+            <a:cxnSpLocks/>
+            <a:stCxn id="9" idx="2"/>
+            <a:endCxn id="11" idx="0"/>
+          </p:cNvCxnSpPr>
+          <p:nvPr/>
+        </p:nvCxnSpPr>
+        <p:spPr>
+          <a:xfrm flipH="1">
+            <a:off x="1281659" y="1858135"/>
+            <a:ext cx="2113613" cy="174907"/>
+          </a:xfrm>
+          <a:prstGeom prst="line">
+            <a:avLst/>
+          </a:prstGeom>
+          <a:ln w="28575">
+            <a:solidFill>
+              <a:schemeClr val="tx2"/>
+            </a:solidFill>
+          </a:ln>
+        </p:spPr>
+        <p:style>
+          <a:lnRef idx="1">
+            <a:schemeClr val="accent1"/>
+          </a:lnRef>
+          <a:fillRef idx="0">
+            <a:schemeClr val="accent1"/>
+          </a:fillRef>
+          <a:effectRef idx="0">
+            <a:schemeClr val="accent1"/>
+          </a:effectRef>
+          <a:fontRef idx="minor">
+            <a:schemeClr val="tx1"/>
+          </a:fontRef>
+        </p:style>
+      </p:cxnSp>
+      <p:cxnSp>
+        <p:nvCxnSpPr>
+          <p:cNvPr id="36" name="Conector recto 35">
+            <a:extLst>
+              <a:ext uri="{FF2B5EF4-FFF2-40B4-BE49-F238E27FC236}">
+                <a16:creationId xmlns:a16="http://schemas.microsoft.com/office/drawing/2014/main" id="{E6DF477B-E1A1-420E-99FE-F4FEFB8B0159}"/>
+              </a:ext>
+            </a:extLst>
+          </p:cNvPr>
+          <p:cNvCxnSpPr>
+            <a:cxnSpLocks/>
+            <a:stCxn id="9" idx="2"/>
+            <a:endCxn id="12" idx="0"/>
+          </p:cNvCxnSpPr>
+          <p:nvPr/>
+        </p:nvCxnSpPr>
+        <p:spPr>
+          <a:xfrm>
+            <a:off x="3395272" y="1858135"/>
+            <a:ext cx="2256007" cy="173970"/>
+          </a:xfrm>
+          <a:prstGeom prst="line">
+            <a:avLst/>
+          </a:prstGeom>
+          <a:ln w="28575">
+            <a:solidFill>
+              <a:schemeClr val="tx2"/>
+            </a:solidFill>
+          </a:ln>
+        </p:spPr>
+        <p:style>
+          <a:lnRef idx="1">
+            <a:schemeClr val="accent1"/>
+          </a:lnRef>
+          <a:fillRef idx="0">
+            <a:schemeClr val="accent1"/>
+          </a:fillRef>
+          <a:effectRef idx="0">
+            <a:schemeClr val="accent1"/>
+          </a:effectRef>
+          <a:fontRef idx="minor">
+            <a:schemeClr val="tx1"/>
+          </a:fontRef>
+        </p:style>
+      </p:cxnSp>
+      <p:cxnSp>
+        <p:nvCxnSpPr>
+          <p:cNvPr id="39" name="Conector recto 38">
+            <a:extLst>
+              <a:ext uri="{FF2B5EF4-FFF2-40B4-BE49-F238E27FC236}">
+                <a16:creationId xmlns:a16="http://schemas.microsoft.com/office/drawing/2014/main" id="{8DED36CA-EBB0-4414-9220-3514866BE20E}"/>
+              </a:ext>
+            </a:extLst>
+          </p:cNvPr>
+          <p:cNvCxnSpPr>
+            <a:cxnSpLocks/>
+            <a:stCxn id="5" idx="2"/>
+            <a:endCxn id="9" idx="0"/>
+          </p:cNvCxnSpPr>
+          <p:nvPr/>
+        </p:nvCxnSpPr>
+        <p:spPr>
+          <a:xfrm flipH="1">
+            <a:off x="3395272" y="1170442"/>
+            <a:ext cx="1828800" cy="230493"/>
+          </a:xfrm>
+          <a:prstGeom prst="line">
+            <a:avLst/>
+          </a:prstGeom>
+          <a:ln w="28575">
+            <a:solidFill>
+              <a:schemeClr val="tx2"/>
+            </a:solidFill>
+          </a:ln>
+        </p:spPr>
+        <p:style>
+          <a:lnRef idx="1">
+            <a:schemeClr val="accent1"/>
+          </a:lnRef>
+          <a:fillRef idx="0">
+            <a:schemeClr val="accent1"/>
+          </a:fillRef>
+          <a:effectRef idx="0">
+            <a:schemeClr val="accent1"/>
+          </a:effectRef>
+          <a:fontRef idx="minor">
+            <a:schemeClr val="tx1"/>
+          </a:fontRef>
+        </p:style>
+      </p:cxnSp>
+      <p:cxnSp>
+        <p:nvCxnSpPr>
+          <p:cNvPr id="42" name="Conector recto 41">
+            <a:extLst>
+              <a:ext uri="{FF2B5EF4-FFF2-40B4-BE49-F238E27FC236}">
+                <a16:creationId xmlns:a16="http://schemas.microsoft.com/office/drawing/2014/main" id="{36296CC0-4538-4702-BAE5-618BF6EC547F}"/>
+              </a:ext>
+            </a:extLst>
+          </p:cNvPr>
+          <p:cNvCxnSpPr>
+            <a:cxnSpLocks/>
+            <a:stCxn id="5" idx="2"/>
+            <a:endCxn id="10" idx="0"/>
+          </p:cNvCxnSpPr>
+          <p:nvPr/>
+        </p:nvCxnSpPr>
+        <p:spPr>
+          <a:xfrm>
+            <a:off x="5224072" y="1170442"/>
+            <a:ext cx="2668241" cy="230493"/>
+          </a:xfrm>
+          <a:prstGeom prst="line">
+            <a:avLst/>
+          </a:prstGeom>
+          <a:ln w="19050">
+            <a:solidFill>
+              <a:schemeClr val="accent4"/>
+            </a:solidFill>
+          </a:ln>
+        </p:spPr>
+        <p:style>
+          <a:lnRef idx="1">
+            <a:schemeClr val="accent1"/>
+          </a:lnRef>
+          <a:fillRef idx="0">
+            <a:schemeClr val="accent1"/>
+          </a:fillRef>
+          <a:effectRef idx="0">
+            <a:schemeClr val="accent1"/>
+          </a:effectRef>
+          <a:fontRef idx="minor">
+            <a:schemeClr val="tx1"/>
+          </a:fontRef>
+        </p:style>
+      </p:cxnSp>
+      <p:cxnSp>
+        <p:nvCxnSpPr>
+          <p:cNvPr id="45" name="Conector recto 44">
+            <a:extLst>
+              <a:ext uri="{FF2B5EF4-FFF2-40B4-BE49-F238E27FC236}">
+                <a16:creationId xmlns:a16="http://schemas.microsoft.com/office/drawing/2014/main" id="{0A0F49A6-13A2-455D-BE09-F1DA863A84CA}"/>
+              </a:ext>
+            </a:extLst>
+          </p:cNvPr>
+          <p:cNvCxnSpPr>
+            <a:cxnSpLocks/>
+            <a:stCxn id="12" idx="2"/>
+            <a:endCxn id="23" idx="0"/>
+          </p:cNvCxnSpPr>
+          <p:nvPr/>
+        </p:nvCxnSpPr>
+        <p:spPr>
+          <a:xfrm flipH="1">
+            <a:off x="4766879" y="2489305"/>
+            <a:ext cx="884400" cy="309528"/>
+          </a:xfrm>
+          <a:prstGeom prst="line">
+            <a:avLst/>
+          </a:prstGeom>
+          <a:ln w="28575">
+            <a:solidFill>
+              <a:schemeClr val="tx2"/>
+            </a:solidFill>
+          </a:ln>
+        </p:spPr>
+        <p:style>
+          <a:lnRef idx="1">
+            <a:schemeClr val="accent1"/>
+          </a:lnRef>
+          <a:fillRef idx="0">
+            <a:schemeClr val="accent1"/>
+          </a:fillRef>
+          <a:effectRef idx="0">
+            <a:schemeClr val="accent1"/>
+          </a:effectRef>
+          <a:fontRef idx="minor">
+            <a:schemeClr val="tx1"/>
+          </a:fontRef>
+        </p:style>
+      </p:cxnSp>
+      <p:cxnSp>
+        <p:nvCxnSpPr>
+          <p:cNvPr id="48" name="Conector recto 47">
+            <a:extLst>
+              <a:ext uri="{FF2B5EF4-FFF2-40B4-BE49-F238E27FC236}">
+                <a16:creationId xmlns:a16="http://schemas.microsoft.com/office/drawing/2014/main" id="{CE8EE3FF-AC20-4199-88E8-E4E59FB51FDC}"/>
+              </a:ext>
+            </a:extLst>
+          </p:cNvPr>
+          <p:cNvCxnSpPr>
+            <a:cxnSpLocks/>
+            <a:stCxn id="12" idx="2"/>
+            <a:endCxn id="24" idx="0"/>
+          </p:cNvCxnSpPr>
+          <p:nvPr/>
+        </p:nvCxnSpPr>
+        <p:spPr>
+          <a:xfrm>
+            <a:off x="5651279" y="2489305"/>
+            <a:ext cx="1104296" cy="307636"/>
+          </a:xfrm>
+          <a:prstGeom prst="line">
+            <a:avLst/>
+          </a:prstGeom>
+          <a:ln w="19050">
+            <a:solidFill>
+              <a:schemeClr val="accent4"/>
+            </a:solidFill>
+          </a:ln>
+        </p:spPr>
+        <p:style>
+          <a:lnRef idx="1">
+            <a:schemeClr val="accent1"/>
+          </a:lnRef>
+          <a:fillRef idx="0">
+            <a:schemeClr val="accent1"/>
+          </a:fillRef>
+          <a:effectRef idx="0">
+            <a:schemeClr val="accent1"/>
+          </a:effectRef>
+          <a:fontRef idx="minor">
+            <a:schemeClr val="tx1"/>
+          </a:fontRef>
+        </p:style>
+      </p:cxnSp>
+      <p:cxnSp>
+        <p:nvCxnSpPr>
+          <p:cNvPr id="60" name="Conector recto 59">
+            <a:extLst>
+              <a:ext uri="{FF2B5EF4-FFF2-40B4-BE49-F238E27FC236}">
+                <a16:creationId xmlns:a16="http://schemas.microsoft.com/office/drawing/2014/main" id="{3E819977-5368-4D96-9F5B-91B50EC716FF}"/>
+              </a:ext>
+            </a:extLst>
+          </p:cNvPr>
+          <p:cNvCxnSpPr>
+            <a:cxnSpLocks/>
+          </p:cNvCxnSpPr>
+          <p:nvPr/>
+        </p:nvCxnSpPr>
+        <p:spPr>
+          <a:xfrm>
+            <a:off x="7989748" y="1858135"/>
+            <a:ext cx="0" cy="255478"/>
+          </a:xfrm>
+          <a:prstGeom prst="line">
+            <a:avLst/>
+          </a:prstGeom>
+          <a:ln w="19050">
+            <a:solidFill>
+              <a:schemeClr val="accent4"/>
+            </a:solidFill>
+          </a:ln>
+        </p:spPr>
+        <p:style>
+          <a:lnRef idx="1">
+            <a:schemeClr val="accent1"/>
+          </a:lnRef>
+          <a:fillRef idx="0">
+            <a:schemeClr val="accent1"/>
+          </a:fillRef>
+          <a:effectRef idx="0">
+            <a:schemeClr val="accent1"/>
+          </a:effectRef>
+          <a:fontRef idx="minor">
+            <a:schemeClr val="tx1"/>
+          </a:fontRef>
+        </p:style>
+      </p:cxnSp>
       <p:sp>
         <p:nvSpPr>
-          <p:cNvPr id="20" name="Hexágono 19">
+          <p:cNvPr id="32" name="Hexágono 31">
             <a:extLst>
               <a:ext uri="{FF2B5EF4-FFF2-40B4-BE49-F238E27FC236}">
-                <a16:creationId xmlns:a16="http://schemas.microsoft.com/office/drawing/2014/main" id="{C213F2BA-31F1-48E9-92AE-02682E122CBA}"/>
+                <a16:creationId xmlns:a16="http://schemas.microsoft.com/office/drawing/2014/main" id="{A78DF77B-EFC4-4CCD-B18D-08C8C8F8473D}"/>
               </a:ext>
             </a:extLst>
           </p:cNvPr>
@@ -16482,80 +16351,14 @@
         </p:nvSpPr>
         <p:spPr>
           <a:xfrm>
-            <a:off x="2231068" y="3939723"/>
-            <a:ext cx="1087946" cy="720000"/>
+            <a:off x="4239730" y="3527498"/>
+            <a:ext cx="1080000" cy="720000"/>
           </a:xfrm>
           <a:prstGeom prst="hexagon">
             <a:avLst/>
           </a:prstGeom>
           <a:noFill/>
-          <a:ln w="12700">
-            <a:solidFill>
-              <a:schemeClr val="tx2"/>
-            </a:solidFill>
-          </a:ln>
-        </p:spPr>
-        <p:style>
-          <a:lnRef idx="2">
-            <a:schemeClr val="accent1">
-              <a:shade val="50000"/>
-            </a:schemeClr>
-          </a:lnRef>
-          <a:fillRef idx="1">
-            <a:schemeClr val="accent1"/>
-          </a:fillRef>
-          <a:effectRef idx="0">
-            <a:schemeClr val="accent1"/>
-          </a:effectRef>
-          <a:fontRef idx="minor">
-            <a:schemeClr val="lt1"/>
-          </a:fontRef>
-        </p:style>
-        <p:txBody>
-          <a:bodyPr rtlCol="0" anchor="ctr"/>
-          <a:lstStyle/>
-          <a:p>
-            <a:pPr algn="ctr"/>
-            <a:r>
-              <a:rPr lang="es-MX" sz="1050">
-                <a:solidFill>
-                  <a:schemeClr val="accent2"/>
-                </a:solidFill>
-                <a:latin typeface="Proxima Nova" panose="020B0604020202020204" charset="0"/>
-              </a:rPr>
-              <a:t>KNN</a:t>
-            </a:r>
-            <a:endParaRPr lang="es-AR" sz="1050" dirty="0">
-              <a:solidFill>
-                <a:schemeClr val="accent2"/>
-              </a:solidFill>
-              <a:latin typeface="Proxima Nova" panose="020B0604020202020204" charset="0"/>
-            </a:endParaRPr>
-          </a:p>
-        </p:txBody>
-      </p:sp>
-      <p:sp>
-        <p:nvSpPr>
-          <p:cNvPr id="21" name="Hexágono 20">
-            <a:extLst>
-              <a:ext uri="{FF2B5EF4-FFF2-40B4-BE49-F238E27FC236}">
-                <a16:creationId xmlns:a16="http://schemas.microsoft.com/office/drawing/2014/main" id="{97216F1F-A4F2-4D04-B1C8-9E2FFD92A4E4}"/>
-              </a:ext>
-            </a:extLst>
-          </p:cNvPr>
-          <p:cNvSpPr/>
-          <p:nvPr/>
-        </p:nvSpPr>
-        <p:spPr>
-          <a:xfrm>
-            <a:off x="4465909" y="3939723"/>
-            <a:ext cx="1087946" cy="720000"/>
-          </a:xfrm>
-          <a:prstGeom prst="hexagon">
-            <a:avLst/>
-          </a:prstGeom>
-          <a:noFill/>
-          <a:ln w="12700">
+          <a:ln w="28575">
             <a:solidFill>
               <a:schemeClr val="tx2"/>
             </a:solidFill>
@@ -16602,10 +16405,10 @@
       </p:sp>
       <p:sp>
         <p:nvSpPr>
-          <p:cNvPr id="22" name="Hexágono 21">
+          <p:cNvPr id="34" name="Hexágono 33">
             <a:extLst>
               <a:ext uri="{FF2B5EF4-FFF2-40B4-BE49-F238E27FC236}">
-                <a16:creationId xmlns:a16="http://schemas.microsoft.com/office/drawing/2014/main" id="{9448D5DB-40E2-440C-B311-7317E78E6ED1}"/>
+                <a16:creationId xmlns:a16="http://schemas.microsoft.com/office/drawing/2014/main" id="{2FD35B72-9731-44C8-9702-7B02D2407CF5}"/>
               </a:ext>
             </a:extLst>
           </p:cNvPr>
@@ -16614,16 +16417,16 @@
         </p:nvSpPr>
         <p:spPr>
           <a:xfrm>
-            <a:off x="5594499" y="3939723"/>
+            <a:off x="6339144" y="3510556"/>
             <a:ext cx="1087946" cy="720000"/>
           </a:xfrm>
           <a:prstGeom prst="hexagon">
             <a:avLst/>
           </a:prstGeom>
           <a:noFill/>
-          <a:ln w="12700">
+          <a:ln w="19050">
             <a:solidFill>
-              <a:schemeClr val="tx2"/>
+              <a:schemeClr val="accent4"/>
             </a:solidFill>
           </a:ln>
         </p:spPr>
@@ -16655,7 +16458,7 @@
                 </a:solidFill>
                 <a:latin typeface="Proxima Nova" panose="020B0604020202020204" charset="0"/>
               </a:rPr>
-              <a:t>LDA/QDA</a:t>
+              <a:t>KNN</a:t>
             </a:r>
             <a:endParaRPr lang="es-AR" sz="1050" dirty="0">
               <a:solidFill>
@@ -16666,12 +16469,98 @@
           </a:p>
         </p:txBody>
       </p:sp>
+      <p:cxnSp>
+        <p:nvCxnSpPr>
+          <p:cNvPr id="37" name="Conector recto 36">
+            <a:extLst>
+              <a:ext uri="{FF2B5EF4-FFF2-40B4-BE49-F238E27FC236}">
+                <a16:creationId xmlns:a16="http://schemas.microsoft.com/office/drawing/2014/main" id="{B8981D67-8D8A-49B9-BD78-B0097DA717E4}"/>
+              </a:ext>
+            </a:extLst>
+          </p:cNvPr>
+          <p:cNvCxnSpPr>
+            <a:cxnSpLocks/>
+          </p:cNvCxnSpPr>
+          <p:nvPr/>
+        </p:nvCxnSpPr>
+        <p:spPr>
+          <a:xfrm flipH="1">
+            <a:off x="4776208" y="3256033"/>
+            <a:ext cx="0" cy="270528"/>
+          </a:xfrm>
+          <a:prstGeom prst="line">
+            <a:avLst/>
+          </a:prstGeom>
+          <a:ln w="28575">
+            <a:solidFill>
+              <a:schemeClr val="tx2"/>
+            </a:solidFill>
+          </a:ln>
+        </p:spPr>
+        <p:style>
+          <a:lnRef idx="1">
+            <a:schemeClr val="accent1"/>
+          </a:lnRef>
+          <a:fillRef idx="0">
+            <a:schemeClr val="accent1"/>
+          </a:fillRef>
+          <a:effectRef idx="0">
+            <a:schemeClr val="accent1"/>
+          </a:effectRef>
+          <a:fontRef idx="minor">
+            <a:schemeClr val="tx1"/>
+          </a:fontRef>
+        </p:style>
+      </p:cxnSp>
+      <p:cxnSp>
+        <p:nvCxnSpPr>
+          <p:cNvPr id="38" name="Conector recto 37">
+            <a:extLst>
+              <a:ext uri="{FF2B5EF4-FFF2-40B4-BE49-F238E27FC236}">
+                <a16:creationId xmlns:a16="http://schemas.microsoft.com/office/drawing/2014/main" id="{8675A32A-54E3-49E2-B6EA-F57A43BAE636}"/>
+              </a:ext>
+            </a:extLst>
+          </p:cNvPr>
+          <p:cNvCxnSpPr>
+            <a:cxnSpLocks/>
+          </p:cNvCxnSpPr>
+          <p:nvPr/>
+        </p:nvCxnSpPr>
+        <p:spPr>
+          <a:xfrm flipH="1">
+            <a:off x="6872872" y="3254141"/>
+            <a:ext cx="0" cy="256415"/>
+          </a:xfrm>
+          <a:prstGeom prst="line">
+            <a:avLst/>
+          </a:prstGeom>
+          <a:ln w="19050">
+            <a:solidFill>
+              <a:schemeClr val="accent4"/>
+            </a:solidFill>
+          </a:ln>
+        </p:spPr>
+        <p:style>
+          <a:lnRef idx="1">
+            <a:schemeClr val="accent1"/>
+          </a:lnRef>
+          <a:fillRef idx="0">
+            <a:schemeClr val="accent1"/>
+          </a:fillRef>
+          <a:effectRef idx="0">
+            <a:schemeClr val="accent1"/>
+          </a:effectRef>
+          <a:fontRef idx="minor">
+            <a:schemeClr val="tx1"/>
+          </a:fontRef>
+        </p:style>
+      </p:cxnSp>
       <p:sp>
         <p:nvSpPr>
-          <p:cNvPr id="23" name="Rectángulo: esquinas redondeadas 22">
+          <p:cNvPr id="44" name="Rectángulo: esquinas redondeadas 43">
             <a:extLst>
               <a:ext uri="{FF2B5EF4-FFF2-40B4-BE49-F238E27FC236}">
-                <a16:creationId xmlns:a16="http://schemas.microsoft.com/office/drawing/2014/main" id="{B9A89CBC-6B47-41DB-9701-F40FC126C137}"/>
+                <a16:creationId xmlns:a16="http://schemas.microsoft.com/office/drawing/2014/main" id="{0ABF2D76-8778-4E03-A65F-8B886B3D5DDC}"/>
               </a:ext>
             </a:extLst>
           </p:cNvPr>
@@ -16680,80 +16569,14 @@
         </p:nvSpPr>
         <p:spPr>
           <a:xfrm>
-            <a:off x="2633272" y="3211058"/>
-            <a:ext cx="1828800" cy="457200"/>
+            <a:off x="1920554" y="2821991"/>
+            <a:ext cx="1584000" cy="457200"/>
           </a:xfrm>
           <a:prstGeom prst="roundRect">
             <a:avLst/>
           </a:prstGeom>
           <a:noFill/>
-          <a:ln w="12700">
-            <a:solidFill>
-              <a:schemeClr val="tx2"/>
-            </a:solidFill>
-          </a:ln>
-        </p:spPr>
-        <p:style>
-          <a:lnRef idx="2">
-            <a:schemeClr val="accent1">
-              <a:shade val="50000"/>
-            </a:schemeClr>
-          </a:lnRef>
-          <a:fillRef idx="1">
-            <a:schemeClr val="accent1"/>
-          </a:fillRef>
-          <a:effectRef idx="0">
-            <a:schemeClr val="accent1"/>
-          </a:effectRef>
-          <a:fontRef idx="minor">
-            <a:schemeClr val="lt1"/>
-          </a:fontRef>
-        </p:style>
-        <p:txBody>
-          <a:bodyPr rtlCol="0" anchor="ctr"/>
-          <a:lstStyle/>
-          <a:p>
-            <a:pPr algn="ctr"/>
-            <a:r>
-              <a:rPr lang="es-MX" dirty="0">
-                <a:solidFill>
-                  <a:schemeClr val="accent2"/>
-                </a:solidFill>
-                <a:latin typeface="Proxima Nova" panose="020B0604020202020204" charset="0"/>
-              </a:rPr>
-              <a:t>No paramétricos</a:t>
-            </a:r>
-            <a:endParaRPr lang="es-AR" dirty="0">
-              <a:solidFill>
-                <a:schemeClr val="accent2"/>
-              </a:solidFill>
-              <a:latin typeface="Proxima Nova" panose="020B0604020202020204" charset="0"/>
-            </a:endParaRPr>
-          </a:p>
-        </p:txBody>
-      </p:sp>
-      <p:sp>
-        <p:nvSpPr>
-          <p:cNvPr id="24" name="Rectángulo: esquinas redondeadas 23">
-            <a:extLst>
-              <a:ext uri="{FF2B5EF4-FFF2-40B4-BE49-F238E27FC236}">
-                <a16:creationId xmlns:a16="http://schemas.microsoft.com/office/drawing/2014/main" id="{39E022CC-60EF-4D14-A8D8-A2272C00939F}"/>
-              </a:ext>
-            </a:extLst>
-          </p:cNvPr>
-          <p:cNvSpPr/>
-          <p:nvPr/>
-        </p:nvSpPr>
-        <p:spPr>
-          <a:xfrm>
-            <a:off x="4621968" y="3209166"/>
-            <a:ext cx="1828800" cy="457200"/>
-          </a:xfrm>
-          <a:prstGeom prst="roundRect">
-            <a:avLst/>
-          </a:prstGeom>
-          <a:noFill/>
-          <a:ln w="12700">
+          <a:ln w="28575">
             <a:solidFill>
               <a:schemeClr val="tx2"/>
             </a:solidFill>
@@ -16798,118 +16621,95 @@
           </a:p>
         </p:txBody>
       </p:sp>
-      <p:cxnSp>
-        <p:nvCxnSpPr>
-          <p:cNvPr id="27" name="Conector recto 26">
+      <p:sp>
+        <p:nvSpPr>
+          <p:cNvPr id="46" name="Rectángulo: esquinas redondeadas 45">
             <a:extLst>
               <a:ext uri="{FF2B5EF4-FFF2-40B4-BE49-F238E27FC236}">
-                <a16:creationId xmlns:a16="http://schemas.microsoft.com/office/drawing/2014/main" id="{77E1FACB-771C-4678-8AEC-39BF517E1D99}"/>
+                <a16:creationId xmlns:a16="http://schemas.microsoft.com/office/drawing/2014/main" id="{DE43DF11-E945-4BA6-B83D-F1135911F0D5}"/>
               </a:ext>
             </a:extLst>
           </p:cNvPr>
-          <p:cNvCxnSpPr>
-            <a:stCxn id="11" idx="2"/>
-          </p:cNvCxnSpPr>
+          <p:cNvSpPr/>
           <p:nvPr/>
-        </p:nvCxnSpPr>
+        </p:nvSpPr>
         <p:spPr>
-          <a:xfrm flipH="1">
-            <a:off x="748542" y="2572687"/>
-            <a:ext cx="533117" cy="373679"/>
+          <a:xfrm>
+            <a:off x="142597" y="2818332"/>
+            <a:ext cx="1584000" cy="457200"/>
           </a:xfrm>
-          <a:prstGeom prst="line">
+          <a:prstGeom prst="roundRect">
             <a:avLst/>
           </a:prstGeom>
-          <a:ln w="12700">
+          <a:noFill/>
+          <a:ln w="19050">
             <a:solidFill>
               <a:schemeClr val="accent4"/>
             </a:solidFill>
           </a:ln>
         </p:spPr>
         <p:style>
-          <a:lnRef idx="1">
-            <a:schemeClr val="accent1"/>
+          <a:lnRef idx="2">
+            <a:schemeClr val="accent1">
+              <a:shade val="50000"/>
+            </a:schemeClr>
           </a:lnRef>
-          <a:fillRef idx="0">
+          <a:fillRef idx="1">
             <a:schemeClr val="accent1"/>
           </a:fillRef>
           <a:effectRef idx="0">
             <a:schemeClr val="accent1"/>
           </a:effectRef>
           <a:fontRef idx="minor">
-            <a:schemeClr val="tx1"/>
+            <a:schemeClr val="lt1"/>
           </a:fontRef>
         </p:style>
-      </p:cxnSp>
+        <p:txBody>
+          <a:bodyPr rtlCol="0" anchor="ctr"/>
+          <a:lstStyle/>
+          <a:p>
+            <a:pPr algn="ctr"/>
+            <a:r>
+              <a:rPr lang="es-MX" dirty="0">
+                <a:solidFill>
+                  <a:schemeClr val="accent2"/>
+                </a:solidFill>
+                <a:latin typeface="Proxima Nova" panose="020B0604020202020204" charset="0"/>
+              </a:rPr>
+              <a:t>No paramétricos</a:t>
+            </a:r>
+            <a:endParaRPr lang="es-AR" dirty="0">
+              <a:solidFill>
+                <a:schemeClr val="accent2"/>
+              </a:solidFill>
+              <a:latin typeface="Proxima Nova" panose="020B0604020202020204" charset="0"/>
+            </a:endParaRPr>
+          </a:p>
+        </p:txBody>
+      </p:sp>
       <p:cxnSp>
         <p:nvCxnSpPr>
-          <p:cNvPr id="30" name="Conector recto 29">
+          <p:cNvPr id="47" name="Conector recto 46">
             <a:extLst>
               <a:ext uri="{FF2B5EF4-FFF2-40B4-BE49-F238E27FC236}">
-                <a16:creationId xmlns:a16="http://schemas.microsoft.com/office/drawing/2014/main" id="{0F40D13E-8445-47B1-A87F-A5950F6CF87E}"/>
+                <a16:creationId xmlns:a16="http://schemas.microsoft.com/office/drawing/2014/main" id="{F07607E4-6E57-420C-953B-899797D0B314}"/>
               </a:ext>
             </a:extLst>
           </p:cNvPr>
           <p:cNvCxnSpPr>
             <a:cxnSpLocks/>
-            <a:stCxn id="11" idx="2"/>
           </p:cNvCxnSpPr>
           <p:nvPr/>
         </p:nvCxnSpPr>
         <p:spPr>
           <a:xfrm>
-            <a:off x="1281659" y="2572687"/>
-            <a:ext cx="547038" cy="373679"/>
+            <a:off x="2712554" y="3279191"/>
+            <a:ext cx="0" cy="247370"/>
           </a:xfrm>
           <a:prstGeom prst="line">
             <a:avLst/>
           </a:prstGeom>
-          <a:ln w="12700">
-            <a:solidFill>
-              <a:schemeClr val="accent4"/>
-            </a:solidFill>
-          </a:ln>
-        </p:spPr>
-        <p:style>
-          <a:lnRef idx="1">
-            <a:schemeClr val="accent1"/>
-          </a:lnRef>
-          <a:fillRef idx="0">
-            <a:schemeClr val="accent1"/>
-          </a:fillRef>
-          <a:effectRef idx="0">
-            <a:schemeClr val="accent1"/>
-          </a:effectRef>
-          <a:fontRef idx="minor">
-            <a:schemeClr val="tx1"/>
-          </a:fontRef>
-        </p:style>
-      </p:cxnSp>
-      <p:cxnSp>
-        <p:nvCxnSpPr>
-          <p:cNvPr id="33" name="Conector recto 32">
-            <a:extLst>
-              <a:ext uri="{FF2B5EF4-FFF2-40B4-BE49-F238E27FC236}">
-                <a16:creationId xmlns:a16="http://schemas.microsoft.com/office/drawing/2014/main" id="{7CEEF7BB-59F9-4FD2-B3AB-532406514BF7}"/>
-              </a:ext>
-            </a:extLst>
-          </p:cNvPr>
-          <p:cNvCxnSpPr>
-            <a:cxnSpLocks/>
-            <a:stCxn id="9" idx="2"/>
-            <a:endCxn id="11" idx="0"/>
-          </p:cNvCxnSpPr>
-          <p:nvPr/>
-        </p:nvCxnSpPr>
-        <p:spPr>
-          <a:xfrm flipH="1">
-            <a:off x="1281659" y="1858135"/>
-            <a:ext cx="2113613" cy="257352"/>
-          </a:xfrm>
-          <a:prstGeom prst="line">
-            <a:avLst/>
-          </a:prstGeom>
-          <a:ln w="12700">
+          <a:ln w="28575">
             <a:solidFill>
               <a:schemeClr val="tx2"/>
             </a:solidFill>
@@ -16930,456 +16730,12 @@
           </a:fontRef>
         </p:style>
       </p:cxnSp>
-      <p:cxnSp>
-        <p:nvCxnSpPr>
-          <p:cNvPr id="36" name="Conector recto 35">
+      <p:sp>
+        <p:nvSpPr>
+          <p:cNvPr id="50" name="Hexágono 49">
             <a:extLst>
               <a:ext uri="{FF2B5EF4-FFF2-40B4-BE49-F238E27FC236}">
-                <a16:creationId xmlns:a16="http://schemas.microsoft.com/office/drawing/2014/main" id="{E6DF477B-E1A1-420E-99FE-F4FEFB8B0159}"/>
-              </a:ext>
-            </a:extLst>
-          </p:cNvPr>
-          <p:cNvCxnSpPr>
-            <a:cxnSpLocks/>
-            <a:stCxn id="9" idx="2"/>
-            <a:endCxn id="12" idx="0"/>
-          </p:cNvCxnSpPr>
-          <p:nvPr/>
-        </p:nvCxnSpPr>
-        <p:spPr>
-          <a:xfrm>
-            <a:off x="3395272" y="1858135"/>
-            <a:ext cx="914400" cy="256415"/>
-          </a:xfrm>
-          <a:prstGeom prst="line">
-            <a:avLst/>
-          </a:prstGeom>
-          <a:ln w="12700">
-            <a:solidFill>
-              <a:schemeClr val="tx2"/>
-            </a:solidFill>
-          </a:ln>
-        </p:spPr>
-        <p:style>
-          <a:lnRef idx="1">
-            <a:schemeClr val="accent1"/>
-          </a:lnRef>
-          <a:fillRef idx="0">
-            <a:schemeClr val="accent1"/>
-          </a:fillRef>
-          <a:effectRef idx="0">
-            <a:schemeClr val="accent1"/>
-          </a:effectRef>
-          <a:fontRef idx="minor">
-            <a:schemeClr val="tx1"/>
-          </a:fontRef>
-        </p:style>
-      </p:cxnSp>
-      <p:cxnSp>
-        <p:nvCxnSpPr>
-          <p:cNvPr id="39" name="Conector recto 38">
-            <a:extLst>
-              <a:ext uri="{FF2B5EF4-FFF2-40B4-BE49-F238E27FC236}">
-                <a16:creationId xmlns:a16="http://schemas.microsoft.com/office/drawing/2014/main" id="{8DED36CA-EBB0-4414-9220-3514866BE20E}"/>
-              </a:ext>
-            </a:extLst>
-          </p:cNvPr>
-          <p:cNvCxnSpPr>
-            <a:cxnSpLocks/>
-            <a:stCxn id="5" idx="2"/>
-            <a:endCxn id="9" idx="0"/>
-          </p:cNvCxnSpPr>
-          <p:nvPr/>
-        </p:nvCxnSpPr>
-        <p:spPr>
-          <a:xfrm flipH="1">
-            <a:off x="3395272" y="1170442"/>
-            <a:ext cx="1828800" cy="230493"/>
-          </a:xfrm>
-          <a:prstGeom prst="line">
-            <a:avLst/>
-          </a:prstGeom>
-          <a:ln w="12700">
-            <a:solidFill>
-              <a:schemeClr val="tx2"/>
-            </a:solidFill>
-          </a:ln>
-        </p:spPr>
-        <p:style>
-          <a:lnRef idx="1">
-            <a:schemeClr val="accent1"/>
-          </a:lnRef>
-          <a:fillRef idx="0">
-            <a:schemeClr val="accent1"/>
-          </a:fillRef>
-          <a:effectRef idx="0">
-            <a:schemeClr val="accent1"/>
-          </a:effectRef>
-          <a:fontRef idx="minor">
-            <a:schemeClr val="tx1"/>
-          </a:fontRef>
-        </p:style>
-      </p:cxnSp>
-      <p:cxnSp>
-        <p:nvCxnSpPr>
-          <p:cNvPr id="42" name="Conector recto 41">
-            <a:extLst>
-              <a:ext uri="{FF2B5EF4-FFF2-40B4-BE49-F238E27FC236}">
-                <a16:creationId xmlns:a16="http://schemas.microsoft.com/office/drawing/2014/main" id="{36296CC0-4538-4702-BAE5-618BF6EC547F}"/>
-              </a:ext>
-            </a:extLst>
-          </p:cNvPr>
-          <p:cNvCxnSpPr>
-            <a:cxnSpLocks/>
-            <a:stCxn id="5" idx="2"/>
-            <a:endCxn id="10" idx="0"/>
-          </p:cNvCxnSpPr>
-          <p:nvPr/>
-        </p:nvCxnSpPr>
-        <p:spPr>
-          <a:xfrm>
-            <a:off x="5224072" y="1170442"/>
-            <a:ext cx="1828800" cy="230493"/>
-          </a:xfrm>
-          <a:prstGeom prst="line">
-            <a:avLst/>
-          </a:prstGeom>
-          <a:ln w="12700">
-            <a:solidFill>
-              <a:schemeClr val="accent4"/>
-            </a:solidFill>
-          </a:ln>
-        </p:spPr>
-        <p:style>
-          <a:lnRef idx="1">
-            <a:schemeClr val="accent1"/>
-          </a:lnRef>
-          <a:fillRef idx="0">
-            <a:schemeClr val="accent1"/>
-          </a:fillRef>
-          <a:effectRef idx="0">
-            <a:schemeClr val="accent1"/>
-          </a:effectRef>
-          <a:fontRef idx="minor">
-            <a:schemeClr val="tx1"/>
-          </a:fontRef>
-        </p:style>
-      </p:cxnSp>
-      <p:cxnSp>
-        <p:nvCxnSpPr>
-          <p:cNvPr id="45" name="Conector recto 44">
-            <a:extLst>
-              <a:ext uri="{FF2B5EF4-FFF2-40B4-BE49-F238E27FC236}">
-                <a16:creationId xmlns:a16="http://schemas.microsoft.com/office/drawing/2014/main" id="{0A0F49A6-13A2-455D-BE09-F1DA863A84CA}"/>
-              </a:ext>
-            </a:extLst>
-          </p:cNvPr>
-          <p:cNvCxnSpPr>
-            <a:cxnSpLocks/>
-            <a:stCxn id="12" idx="2"/>
-            <a:endCxn id="23" idx="0"/>
-          </p:cNvCxnSpPr>
-          <p:nvPr/>
-        </p:nvCxnSpPr>
-        <p:spPr>
-          <a:xfrm flipH="1">
-            <a:off x="3547672" y="2571750"/>
-            <a:ext cx="762000" cy="639308"/>
-          </a:xfrm>
-          <a:prstGeom prst="line">
-            <a:avLst/>
-          </a:prstGeom>
-          <a:ln w="12700">
-            <a:solidFill>
-              <a:schemeClr val="tx2"/>
-            </a:solidFill>
-          </a:ln>
-        </p:spPr>
-        <p:style>
-          <a:lnRef idx="1">
-            <a:schemeClr val="accent1"/>
-          </a:lnRef>
-          <a:fillRef idx="0">
-            <a:schemeClr val="accent1"/>
-          </a:fillRef>
-          <a:effectRef idx="0">
-            <a:schemeClr val="accent1"/>
-          </a:effectRef>
-          <a:fontRef idx="minor">
-            <a:schemeClr val="tx1"/>
-          </a:fontRef>
-        </p:style>
-      </p:cxnSp>
-      <p:cxnSp>
-        <p:nvCxnSpPr>
-          <p:cNvPr id="48" name="Conector recto 47">
-            <a:extLst>
-              <a:ext uri="{FF2B5EF4-FFF2-40B4-BE49-F238E27FC236}">
-                <a16:creationId xmlns:a16="http://schemas.microsoft.com/office/drawing/2014/main" id="{CE8EE3FF-AC20-4199-88E8-E4E59FB51FDC}"/>
-              </a:ext>
-            </a:extLst>
-          </p:cNvPr>
-          <p:cNvCxnSpPr>
-            <a:cxnSpLocks/>
-            <a:stCxn id="12" idx="2"/>
-            <a:endCxn id="24" idx="0"/>
-          </p:cNvCxnSpPr>
-          <p:nvPr/>
-        </p:nvCxnSpPr>
-        <p:spPr>
-          <a:xfrm>
-            <a:off x="4309672" y="2571750"/>
-            <a:ext cx="1226696" cy="637416"/>
-          </a:xfrm>
-          <a:prstGeom prst="line">
-            <a:avLst/>
-          </a:prstGeom>
-          <a:ln w="12700">
-            <a:solidFill>
-              <a:schemeClr val="tx2"/>
-            </a:solidFill>
-          </a:ln>
-        </p:spPr>
-        <p:style>
-          <a:lnRef idx="1">
-            <a:schemeClr val="accent1"/>
-          </a:lnRef>
-          <a:fillRef idx="0">
-            <a:schemeClr val="accent1"/>
-          </a:fillRef>
-          <a:effectRef idx="0">
-            <a:schemeClr val="accent1"/>
-          </a:effectRef>
-          <a:fontRef idx="minor">
-            <a:schemeClr val="tx1"/>
-          </a:fontRef>
-        </p:style>
-      </p:cxnSp>
-      <p:cxnSp>
-        <p:nvCxnSpPr>
-          <p:cNvPr id="52" name="Conector recto 51">
-            <a:extLst>
-              <a:ext uri="{FF2B5EF4-FFF2-40B4-BE49-F238E27FC236}">
-                <a16:creationId xmlns:a16="http://schemas.microsoft.com/office/drawing/2014/main" id="{D05382A2-D7D6-4418-91FA-F06975755EFA}"/>
-              </a:ext>
-            </a:extLst>
-          </p:cNvPr>
-          <p:cNvCxnSpPr>
-            <a:cxnSpLocks/>
-            <a:stCxn id="23" idx="2"/>
-          </p:cNvCxnSpPr>
-          <p:nvPr/>
-        </p:nvCxnSpPr>
-        <p:spPr>
-          <a:xfrm flipH="1">
-            <a:off x="2785730" y="3668258"/>
-            <a:ext cx="761942" cy="258700"/>
-          </a:xfrm>
-          <a:prstGeom prst="line">
-            <a:avLst/>
-          </a:prstGeom>
-          <a:ln w="12700">
-            <a:solidFill>
-              <a:schemeClr val="tx2"/>
-            </a:solidFill>
-          </a:ln>
-        </p:spPr>
-        <p:style>
-          <a:lnRef idx="1">
-            <a:schemeClr val="accent1"/>
-          </a:lnRef>
-          <a:fillRef idx="0">
-            <a:schemeClr val="accent1"/>
-          </a:fillRef>
-          <a:effectRef idx="0">
-            <a:schemeClr val="accent1"/>
-          </a:effectRef>
-          <a:fontRef idx="minor">
-            <a:schemeClr val="tx1"/>
-          </a:fontRef>
-        </p:style>
-      </p:cxnSp>
-      <p:cxnSp>
-        <p:nvCxnSpPr>
-          <p:cNvPr id="55" name="Conector recto 54">
-            <a:extLst>
-              <a:ext uri="{FF2B5EF4-FFF2-40B4-BE49-F238E27FC236}">
-                <a16:creationId xmlns:a16="http://schemas.microsoft.com/office/drawing/2014/main" id="{1C9CA186-BA11-44F3-BB42-E6592CADB14F}"/>
-              </a:ext>
-            </a:extLst>
-          </p:cNvPr>
-          <p:cNvCxnSpPr>
-            <a:cxnSpLocks/>
-            <a:stCxn id="24" idx="2"/>
-          </p:cNvCxnSpPr>
-          <p:nvPr/>
-        </p:nvCxnSpPr>
-        <p:spPr>
-          <a:xfrm flipH="1">
-            <a:off x="5009882" y="3666366"/>
-            <a:ext cx="526486" cy="275524"/>
-          </a:xfrm>
-          <a:prstGeom prst="line">
-            <a:avLst/>
-          </a:prstGeom>
-          <a:ln w="12700">
-            <a:solidFill>
-              <a:schemeClr val="tx2"/>
-            </a:solidFill>
-          </a:ln>
-        </p:spPr>
-        <p:style>
-          <a:lnRef idx="1">
-            <a:schemeClr val="accent1"/>
-          </a:lnRef>
-          <a:fillRef idx="0">
-            <a:schemeClr val="accent1"/>
-          </a:fillRef>
-          <a:effectRef idx="0">
-            <a:schemeClr val="accent1"/>
-          </a:effectRef>
-          <a:fontRef idx="minor">
-            <a:schemeClr val="tx1"/>
-          </a:fontRef>
-        </p:style>
-      </p:cxnSp>
-      <p:cxnSp>
-        <p:nvCxnSpPr>
-          <p:cNvPr id="58" name="Conector recto 57">
-            <a:extLst>
-              <a:ext uri="{FF2B5EF4-FFF2-40B4-BE49-F238E27FC236}">
-                <a16:creationId xmlns:a16="http://schemas.microsoft.com/office/drawing/2014/main" id="{BCF97D6B-32FC-4C6B-B0A5-7FC37875742B}"/>
-              </a:ext>
-            </a:extLst>
-          </p:cNvPr>
-          <p:cNvCxnSpPr>
-            <a:cxnSpLocks/>
-            <a:stCxn id="24" idx="2"/>
-          </p:cNvCxnSpPr>
-          <p:nvPr/>
-        </p:nvCxnSpPr>
-        <p:spPr>
-          <a:xfrm>
-            <a:off x="5536368" y="3666366"/>
-            <a:ext cx="602104" cy="275524"/>
-          </a:xfrm>
-          <a:prstGeom prst="line">
-            <a:avLst/>
-          </a:prstGeom>
-          <a:ln w="12700">
-            <a:solidFill>
-              <a:schemeClr val="tx2"/>
-            </a:solidFill>
-          </a:ln>
-        </p:spPr>
-        <p:style>
-          <a:lnRef idx="1">
-            <a:schemeClr val="accent1"/>
-          </a:lnRef>
-          <a:fillRef idx="0">
-            <a:schemeClr val="accent1"/>
-          </a:fillRef>
-          <a:effectRef idx="0">
-            <a:schemeClr val="accent1"/>
-          </a:effectRef>
-          <a:fontRef idx="minor">
-            <a:schemeClr val="tx1"/>
-          </a:fontRef>
-        </p:style>
-      </p:cxnSp>
-      <p:cxnSp>
-        <p:nvCxnSpPr>
-          <p:cNvPr id="60" name="Conector recto 59">
-            <a:extLst>
-              <a:ext uri="{FF2B5EF4-FFF2-40B4-BE49-F238E27FC236}">
-                <a16:creationId xmlns:a16="http://schemas.microsoft.com/office/drawing/2014/main" id="{3E819977-5368-4D96-9F5B-91B50EC716FF}"/>
-              </a:ext>
-            </a:extLst>
-          </p:cNvPr>
-          <p:cNvCxnSpPr>
-            <a:stCxn id="10" idx="2"/>
-          </p:cNvCxnSpPr>
-          <p:nvPr/>
-        </p:nvCxnSpPr>
-        <p:spPr>
-          <a:xfrm flipH="1">
-            <a:off x="6570019" y="1858135"/>
-            <a:ext cx="482853" cy="275777"/>
-          </a:xfrm>
-          <a:prstGeom prst="line">
-            <a:avLst/>
-          </a:prstGeom>
-          <a:ln w="12700">
-            <a:solidFill>
-              <a:schemeClr val="accent4"/>
-            </a:solidFill>
-          </a:ln>
-        </p:spPr>
-        <p:style>
-          <a:lnRef idx="1">
-            <a:schemeClr val="accent1"/>
-          </a:lnRef>
-          <a:fillRef idx="0">
-            <a:schemeClr val="accent1"/>
-          </a:fillRef>
-          <a:effectRef idx="0">
-            <a:schemeClr val="accent1"/>
-          </a:effectRef>
-          <a:fontRef idx="minor">
-            <a:schemeClr val="tx1"/>
-          </a:fontRef>
-        </p:style>
-      </p:cxnSp>
-      <p:cxnSp>
-        <p:nvCxnSpPr>
-          <p:cNvPr id="63" name="Conector recto 62">
-            <a:extLst>
-              <a:ext uri="{FF2B5EF4-FFF2-40B4-BE49-F238E27FC236}">
-                <a16:creationId xmlns:a16="http://schemas.microsoft.com/office/drawing/2014/main" id="{74C57113-C9A9-45EB-B72F-220236E69265}"/>
-              </a:ext>
-            </a:extLst>
-          </p:cNvPr>
-          <p:cNvCxnSpPr>
-            <a:cxnSpLocks/>
-            <a:stCxn id="10" idx="2"/>
-          </p:cNvCxnSpPr>
-          <p:nvPr/>
-        </p:nvCxnSpPr>
-        <p:spPr>
-          <a:xfrm>
-            <a:off x="7052872" y="1858135"/>
-            <a:ext cx="650539" cy="275777"/>
-          </a:xfrm>
-          <a:prstGeom prst="line">
-            <a:avLst/>
-          </a:prstGeom>
-          <a:ln w="12700">
-            <a:solidFill>
-              <a:schemeClr val="accent4"/>
-            </a:solidFill>
-          </a:ln>
-        </p:spPr>
-        <p:style>
-          <a:lnRef idx="1">
-            <a:schemeClr val="accent1"/>
-          </a:lnRef>
-          <a:fillRef idx="0">
-            <a:schemeClr val="accent1"/>
-          </a:fillRef>
-          <a:effectRef idx="0">
-            <a:schemeClr val="accent1"/>
-          </a:effectRef>
-          <a:fontRef idx="minor">
-            <a:schemeClr val="tx1"/>
-          </a:fontRef>
-        </p:style>
-      </p:cxnSp>
-      <p:sp>
-        <p:nvSpPr>
-          <p:cNvPr id="31" name="Hexágono 30">
-            <a:extLst>
-              <a:ext uri="{FF2B5EF4-FFF2-40B4-BE49-F238E27FC236}">
-                <a16:creationId xmlns:a16="http://schemas.microsoft.com/office/drawing/2014/main" id="{3AB4D146-46D3-4BE5-AEAF-84C3BB3503E2}"/>
+                <a16:creationId xmlns:a16="http://schemas.microsoft.com/office/drawing/2014/main" id="{135B1211-C838-4C20-BDDF-1C4257FDEB2A}"/>
               </a:ext>
             </a:extLst>
           </p:cNvPr>
@@ -17388,16 +16744,16 @@
         </p:nvSpPr>
         <p:spPr>
           <a:xfrm>
-            <a:off x="3348488" y="3939723"/>
+            <a:off x="405051" y="3541867"/>
             <a:ext cx="1087946" cy="720000"/>
           </a:xfrm>
           <a:prstGeom prst="hexagon">
             <a:avLst/>
           </a:prstGeom>
           <a:noFill/>
-          <a:ln w="12700">
+          <a:ln w="19050">
             <a:solidFill>
-              <a:schemeClr val="tx2"/>
+              <a:schemeClr val="accent4"/>
             </a:solidFill>
           </a:ln>
         </p:spPr>
@@ -17429,16 +16785,7 @@
                 </a:solidFill>
                 <a:latin typeface="Proxima Nova" panose="020B0604020202020204" charset="0"/>
               </a:rPr>
-              <a:t>Naive</a:t>
-            </a:r>
-            <a:r>
-              <a:rPr lang="es-MX" sz="1050" dirty="0">
-                <a:solidFill>
-                  <a:schemeClr val="accent2"/>
-                </a:solidFill>
-                <a:latin typeface="Proxima Nova" panose="020B0604020202020204" charset="0"/>
-              </a:rPr>
-              <a:t> Bayes</a:t>
+              <a:t>Splines</a:t>
             </a:r>
             <a:endParaRPr lang="es-AR" sz="1050" dirty="0">
               <a:solidFill>
@@ -17451,31 +16798,194 @@
       </p:sp>
       <p:cxnSp>
         <p:nvCxnSpPr>
-          <p:cNvPr id="32" name="Conector recto 31">
+          <p:cNvPr id="51" name="Conector recto 50">
             <a:extLst>
               <a:ext uri="{FF2B5EF4-FFF2-40B4-BE49-F238E27FC236}">
-                <a16:creationId xmlns:a16="http://schemas.microsoft.com/office/drawing/2014/main" id="{CFB927DE-B6F4-4E82-BBE5-FCED23C29751}"/>
+                <a16:creationId xmlns:a16="http://schemas.microsoft.com/office/drawing/2014/main" id="{EFE217A9-08AF-49BA-9AB4-D631A29A9D8D}"/>
               </a:ext>
             </a:extLst>
           </p:cNvPr>
           <p:cNvCxnSpPr>
             <a:cxnSpLocks/>
-            <a:stCxn id="23" idx="2"/>
           </p:cNvCxnSpPr>
           <p:nvPr/>
         </p:nvCxnSpPr>
         <p:spPr>
           <a:xfrm>
-            <a:off x="3547672" y="3668258"/>
-            <a:ext cx="344789" cy="270528"/>
+            <a:off x="947106" y="3267612"/>
+            <a:ext cx="0" cy="274255"/>
           </a:xfrm>
           <a:prstGeom prst="line">
             <a:avLst/>
           </a:prstGeom>
-          <a:ln w="12700">
+          <a:ln w="19050">
+            <a:solidFill>
+              <a:schemeClr val="accent4"/>
+            </a:solidFill>
+          </a:ln>
+        </p:spPr>
+        <p:style>
+          <a:lnRef idx="1">
+            <a:schemeClr val="accent1"/>
+          </a:lnRef>
+          <a:fillRef idx="0">
+            <a:schemeClr val="accent1"/>
+          </a:fillRef>
+          <a:effectRef idx="0">
+            <a:schemeClr val="accent1"/>
+          </a:effectRef>
+          <a:fontRef idx="minor">
+            <a:schemeClr val="tx1"/>
+          </a:fontRef>
+        </p:style>
+      </p:cxnSp>
+      <p:sp>
+        <p:nvSpPr>
+          <p:cNvPr id="49" name="Rectángulo: esquinas redondeadas 48">
+            <a:extLst>
+              <a:ext uri="{FF2B5EF4-FFF2-40B4-BE49-F238E27FC236}">
+                <a16:creationId xmlns:a16="http://schemas.microsoft.com/office/drawing/2014/main" id="{C4F8BF29-2D4F-4DDB-9887-90F0F3D0A277}"/>
+              </a:ext>
+            </a:extLst>
+          </p:cNvPr>
+          <p:cNvSpPr/>
+          <p:nvPr/>
+        </p:nvSpPr>
+        <p:spPr>
+          <a:xfrm>
+            <a:off x="2023672" y="3432749"/>
+            <a:ext cx="3477717" cy="922560"/>
+          </a:xfrm>
+          <a:prstGeom prst="roundRect">
+            <a:avLst/>
+          </a:prstGeom>
+          <a:noFill/>
+          <a:ln>
+            <a:solidFill>
+              <a:schemeClr val="accent4"/>
+            </a:solidFill>
+            <a:prstDash val="dash"/>
+          </a:ln>
+        </p:spPr>
+        <p:style>
+          <a:lnRef idx="2">
+            <a:schemeClr val="accent1">
+              <a:shade val="50000"/>
+            </a:schemeClr>
+          </a:lnRef>
+          <a:fillRef idx="1">
+            <a:schemeClr val="accent1"/>
+          </a:fillRef>
+          <a:effectRef idx="0">
+            <a:schemeClr val="accent1"/>
+          </a:effectRef>
+          <a:fontRef idx="minor">
+            <a:schemeClr val="lt1"/>
+          </a:fontRef>
+        </p:style>
+        <p:txBody>
+          <a:bodyPr rtlCol="0" anchor="ctr"/>
+          <a:lstStyle/>
+          <a:p>
+            <a:pPr algn="ctr"/>
+            <a:endParaRPr lang="es-AR"/>
+          </a:p>
+        </p:txBody>
+      </p:sp>
+      <p:sp>
+        <p:nvSpPr>
+          <p:cNvPr id="57" name="Hexágono 56">
+            <a:extLst>
+              <a:ext uri="{FF2B5EF4-FFF2-40B4-BE49-F238E27FC236}">
+                <a16:creationId xmlns:a16="http://schemas.microsoft.com/office/drawing/2014/main" id="{075E4624-6159-4D88-B99C-4BAE0492B27D}"/>
+              </a:ext>
+            </a:extLst>
+          </p:cNvPr>
+          <p:cNvSpPr/>
+          <p:nvPr/>
+        </p:nvSpPr>
+        <p:spPr>
+          <a:xfrm>
+            <a:off x="5512130" y="4268154"/>
+            <a:ext cx="1080000" cy="720000"/>
+          </a:xfrm>
+          <a:prstGeom prst="hexagon">
+            <a:avLst/>
+          </a:prstGeom>
+          <a:noFill/>
+          <a:ln w="28575">
             <a:solidFill>
               <a:schemeClr val="tx2"/>
             </a:solidFill>
+          </a:ln>
+        </p:spPr>
+        <p:style>
+          <a:lnRef idx="2">
+            <a:schemeClr val="accent1">
+              <a:shade val="50000"/>
+            </a:schemeClr>
+          </a:lnRef>
+          <a:fillRef idx="1">
+            <a:schemeClr val="accent1"/>
+          </a:fillRef>
+          <a:effectRef idx="0">
+            <a:schemeClr val="accent1"/>
+          </a:effectRef>
+          <a:fontRef idx="minor">
+            <a:schemeClr val="lt1"/>
+          </a:fontRef>
+        </p:style>
+        <p:txBody>
+          <a:bodyPr rtlCol="0" anchor="ctr"/>
+          <a:lstStyle/>
+          <a:p>
+            <a:pPr algn="ctr"/>
+            <a:r>
+              <a:rPr lang="es-MX" sz="1050" dirty="0">
+                <a:solidFill>
+                  <a:schemeClr val="accent2"/>
+                </a:solidFill>
+                <a:latin typeface="Proxima Nova" panose="020B0604020202020204" charset="0"/>
+              </a:rPr>
+              <a:t>LASSO</a:t>
+            </a:r>
+            <a:endParaRPr lang="es-AR" sz="1050" dirty="0">
+              <a:solidFill>
+                <a:schemeClr val="accent2"/>
+              </a:solidFill>
+              <a:latin typeface="Proxima Nova" panose="020B0604020202020204" charset="0"/>
+            </a:endParaRPr>
+          </a:p>
+        </p:txBody>
+      </p:sp>
+      <p:cxnSp>
+        <p:nvCxnSpPr>
+          <p:cNvPr id="53" name="Conector: angular 52">
+            <a:extLst>
+              <a:ext uri="{FF2B5EF4-FFF2-40B4-BE49-F238E27FC236}">
+                <a16:creationId xmlns:a16="http://schemas.microsoft.com/office/drawing/2014/main" id="{FF24B52B-AE9A-42DC-BAE2-53BE82F50593}"/>
+              </a:ext>
+            </a:extLst>
+          </p:cNvPr>
+          <p:cNvCxnSpPr>
+            <a:stCxn id="57" idx="3"/>
+            <a:endCxn id="49" idx="2"/>
+          </p:cNvCxnSpPr>
+          <p:nvPr/>
+        </p:nvCxnSpPr>
+        <p:spPr>
+          <a:xfrm rot="10800000">
+            <a:off x="3762532" y="4355310"/>
+            <a:ext cx="1749599" cy="272845"/>
+          </a:xfrm>
+          <a:prstGeom prst="bentConnector2">
+            <a:avLst/>
+          </a:prstGeom>
+          <a:ln w="28575">
+            <a:solidFill>
+              <a:schemeClr val="tx2"/>
+            </a:solidFill>
+            <a:tailEnd type="triangle"/>
           </a:ln>
         </p:spPr>
         <p:style>
@@ -17495,10 +17005,10 @@
       </p:cxnSp>
       <p:pic>
         <p:nvPicPr>
-          <p:cNvPr id="3" name="Gráfico 2" descr="Marca de verificación con relleno sólido">
+          <p:cNvPr id="35" name="Gráfico 34" descr="Marca de verificación con relleno sólido">
             <a:extLst>
               <a:ext uri="{FF2B5EF4-FFF2-40B4-BE49-F238E27FC236}">
-                <a16:creationId xmlns:a16="http://schemas.microsoft.com/office/drawing/2014/main" id="{D1B37063-8210-40F1-A4F9-BD4824CCBC2B}"/>
+                <a16:creationId xmlns:a16="http://schemas.microsoft.com/office/drawing/2014/main" id="{4F588990-5C6D-4D48-82F9-88393BEB25FD}"/>
               </a:ext>
             </a:extLst>
           </p:cNvPr>
@@ -17521,7 +17031,7 @@
         </p:blipFill>
         <p:spPr>
           <a:xfrm>
-            <a:off x="7510072" y="3715640"/>
+            <a:off x="7807645" y="3973058"/>
             <a:ext cx="914400" cy="914400"/>
           </a:xfrm>
           <a:prstGeom prst="rect">
@@ -17532,7 +17042,7 @@
     </p:spTree>
     <p:extLst>
       <p:ext uri="{BB962C8B-B14F-4D97-AF65-F5344CB8AC3E}">
-        <p14:creationId xmlns:p14="http://schemas.microsoft.com/office/powerpoint/2010/main" val="1640414692"/>
+        <p14:creationId xmlns:p14="http://schemas.microsoft.com/office/powerpoint/2010/main" val="4111567153"/>
       </p:ext>
     </p:extLst>
   </p:cSld>

--- a/clase6/teorica_6.pptx
+++ b/clase6/teorica_6.pptx
@@ -11226,8 +11226,8 @@
           </a:p>
         </p:txBody>
       </p:sp>
-      <mc:AlternateContent xmlns:mc="http://schemas.openxmlformats.org/markup-compatibility/2006">
-        <mc:Choice xmlns:a14="http://schemas.microsoft.com/office/drawing/2010/main" Requires="a14">
+      <mc:AlternateContent xmlns:mc="http://schemas.openxmlformats.org/markup-compatibility/2006" xmlns:a14="http://schemas.microsoft.com/office/drawing/2010/main">
+        <mc:Choice Requires="a14">
           <p:sp>
             <p:nvSpPr>
               <p:cNvPr id="4" name="Rectangle 3">
@@ -11302,7 +11302,7 @@
             </p:txBody>
           </p:sp>
         </mc:Choice>
-        <mc:Fallback>
+        <mc:Fallback xmlns="">
           <p:sp>
             <p:nvSpPr>
               <p:cNvPr id="4" name="Rectangle 3">
@@ -11348,8 +11348,8 @@
           </p:sp>
         </mc:Fallback>
       </mc:AlternateContent>
-      <mc:AlternateContent xmlns:mc="http://schemas.openxmlformats.org/markup-compatibility/2006">
-        <mc:Choice xmlns:a14="http://schemas.microsoft.com/office/drawing/2010/main" Requires="a14">
+      <mc:AlternateContent xmlns:mc="http://schemas.openxmlformats.org/markup-compatibility/2006" xmlns:a14="http://schemas.microsoft.com/office/drawing/2010/main">
+        <mc:Choice Requires="a14">
           <p:sp>
             <p:nvSpPr>
               <p:cNvPr id="5" name="Rectangle 4">
@@ -11424,7 +11424,7 @@
             </p:txBody>
           </p:sp>
         </mc:Choice>
-        <mc:Fallback>
+        <mc:Fallback xmlns="">
           <p:sp>
             <p:nvSpPr>
               <p:cNvPr id="5" name="Rectangle 4">
@@ -11698,8 +11698,8 @@
           </a:p>
         </p:txBody>
       </p:sp>
-      <mc:AlternateContent xmlns:mc="http://schemas.openxmlformats.org/markup-compatibility/2006">
-        <mc:Choice xmlns:a14="http://schemas.microsoft.com/office/drawing/2010/main" Requires="a14">
+      <mc:AlternateContent xmlns:mc="http://schemas.openxmlformats.org/markup-compatibility/2006" xmlns:a14="http://schemas.microsoft.com/office/drawing/2010/main">
+        <mc:Choice Requires="a14">
           <p:sp>
             <p:nvSpPr>
               <p:cNvPr id="11" name="Rectangle 10">
@@ -11774,7 +11774,7 @@
             </p:txBody>
           </p:sp>
         </mc:Choice>
-        <mc:Fallback>
+        <mc:Fallback xmlns="">
           <p:sp>
             <p:nvSpPr>
               <p:cNvPr id="11" name="Rectangle 10">
@@ -17215,7 +17215,7 @@
                 <a:spcPts val="0"/>
               </a:spcBef>
               <a:spcAft>
-                <a:spcPts val="0"/>
+                <a:spcPts val="600"/>
               </a:spcAft>
               <a:buSzPts val="1800"/>
               <a:buAutoNum type="romanUcPeriod"/>
@@ -17247,7 +17247,7 @@
                 <a:spcPts val="0"/>
               </a:spcBef>
               <a:spcAft>
-                <a:spcPts val="0"/>
+                <a:spcPts val="600"/>
               </a:spcAft>
               <a:buSzPts val="1800"/>
               <a:buAutoNum type="romanUcPeriod"/>
@@ -17274,7 +17274,7 @@
                 <a:spcPts val="0"/>
               </a:spcBef>
               <a:spcAft>
-                <a:spcPts val="0"/>
+                <a:spcPts val="600"/>
               </a:spcAft>
               <a:buSzPts val="1800"/>
               <a:buAutoNum type="romanUcPeriod"/>
@@ -17301,7 +17301,7 @@
                 <a:spcPts val="0"/>
               </a:spcBef>
               <a:spcAft>
-                <a:spcPts val="0"/>
+                <a:spcPts val="600"/>
               </a:spcAft>
               <a:buSzPts val="1800"/>
               <a:buAutoNum type="romanUcPeriod"/>
@@ -17337,7 +17337,7 @@
                 <a:spcPts val="0"/>
               </a:spcBef>
               <a:spcAft>
-                <a:spcPts val="0"/>
+                <a:spcPts val="600"/>
               </a:spcAft>
               <a:buSzPts val="1800"/>
               <a:buAutoNum type="romanUcPeriod"/>

--- a/clase6/teorica_6.pptx
+++ b/clase6/teorica_6.pptx
@@ -9104,7 +9104,7 @@
             </a:pPr>
             <a:r>
               <a:rPr lang="es-MX" sz="1600" dirty="0"/>
-              <a:t>Overfitting se puede producir por varias causas. Ej: polinomios de muy alto grado, utilización de una gran cantidad de variables, valores de parámetros que otorgan mucha flexibilidad (como un K bajo en KNN)</a:t>
+              <a:t>Overfitting se puede producir por varias causas. Ej: polinomios de muy alto grado, utilización de una gran cantidad de variables, valores de parámetros que otorgan mucha flexibilidad</a:t>
             </a:r>
           </a:p>
         </p:txBody>
@@ -9549,8 +9549,8 @@
           </a:p>
         </p:txBody>
       </p:sp>
-      <mc:AlternateContent xmlns:mc="http://schemas.openxmlformats.org/markup-compatibility/2006" xmlns:a14="http://schemas.microsoft.com/office/drawing/2010/main">
-        <mc:Choice Requires="a14">
+      <mc:AlternateContent xmlns:mc="http://schemas.openxmlformats.org/markup-compatibility/2006">
+        <mc:Choice xmlns:a14="http://schemas.microsoft.com/office/drawing/2010/main" Requires="a14">
           <p:sp>
             <p:nvSpPr>
               <p:cNvPr id="4" name="Google Shape;284;p49">
@@ -9874,21 +9874,27 @@
                 </a:r>
                 <a:r>
                   <a:rPr lang="es-MX" sz="1600" dirty="0"/>
-                  <a:t> (como </a:t>
+                  <a:t> (como</a:t>
                 </a:r>
                 <a14:m>
                   <m:oMath xmlns:m="http://schemas.openxmlformats.org/officeDocument/2006/math">
                     <m:r>
-                      <a:rPr lang="es-MX" sz="1600" i="1" dirty="0" smtClean="0">
+                      <a:rPr lang="es-ES" sz="1600" b="0" i="0" smtClean="0">
                         <a:latin typeface="Cambria Math" panose="02040503050406030204" pitchFamily="18" charset="0"/>
                       </a:rPr>
-                      <m:t>𝐾</m:t>
+                      <m:t> </m:t>
+                    </m:r>
+                    <m:r>
+                      <a:rPr lang="es-MX" sz="1600" i="1">
+                        <a:latin typeface="Cambria Math" panose="02040503050406030204" pitchFamily="18" charset="0"/>
+                      </a:rPr>
+                      <m:t>𝜆</m:t>
                     </m:r>
                   </m:oMath>
                 </a14:m>
                 <a:r>
                   <a:rPr lang="es-MX" sz="1600" dirty="0"/>
-                  <a:t> en KNN).</a:t>
+                  <a:t>en LASSO).</a:t>
                 </a:r>
               </a:p>
               <a:p>
@@ -9919,7 +9925,7 @@
             </p:txBody>
           </p:sp>
         </mc:Choice>
-        <mc:Fallback xmlns="">
+        <mc:Fallback>
           <p:sp>
             <p:nvSpPr>
               <p:cNvPr id="4" name="Google Shape;284;p49">
